--- a/assets/TCS349/Unit-1/Lecture8-9_Fairness_Tradeoffs_Mitigation.pptx
+++ b/assets/TCS349/Unit-1/Lecture8-9_Fairness_Tradeoffs_Mitigation.pptx
@@ -5,28 +5,23 @@
     <p:sldMasterId id="2147483648" r:id="rId1"/>
   </p:sldMasterIdLst>
   <p:notesMasterIdLst>
-    <p:notesMasterId r:id="rId21"/>
+    <p:notesMasterId r:id="rId16"/>
   </p:notesMasterIdLst>
   <p:sldIdLst>
     <p:sldId id="256" r:id="rId2"/>
-    <p:sldId id="257" r:id="rId3"/>
-    <p:sldId id="258" r:id="rId4"/>
-    <p:sldId id="259" r:id="rId5"/>
-    <p:sldId id="260" r:id="rId6"/>
-    <p:sldId id="261" r:id="rId7"/>
-    <p:sldId id="262" r:id="rId8"/>
-    <p:sldId id="263" r:id="rId9"/>
-    <p:sldId id="264" r:id="rId10"/>
-    <p:sldId id="265" r:id="rId11"/>
-    <p:sldId id="266" r:id="rId12"/>
-    <p:sldId id="267" r:id="rId13"/>
-    <p:sldId id="268" r:id="rId14"/>
-    <p:sldId id="269" r:id="rId15"/>
-    <p:sldId id="270" r:id="rId16"/>
-    <p:sldId id="271" r:id="rId17"/>
-    <p:sldId id="272" r:id="rId18"/>
-    <p:sldId id="273" r:id="rId19"/>
-    <p:sldId id="274" r:id="rId20"/>
+    <p:sldId id="259" r:id="rId3"/>
+    <p:sldId id="260" r:id="rId4"/>
+    <p:sldId id="261" r:id="rId5"/>
+    <p:sldId id="262" r:id="rId6"/>
+    <p:sldId id="263" r:id="rId7"/>
+    <p:sldId id="264" r:id="rId8"/>
+    <p:sldId id="265" r:id="rId9"/>
+    <p:sldId id="266" r:id="rId10"/>
+    <p:sldId id="267" r:id="rId11"/>
+    <p:sldId id="268" r:id="rId12"/>
+    <p:sldId id="269" r:id="rId13"/>
+    <p:sldId id="270" r:id="rId14"/>
+    <p:sldId id="271" r:id="rId15"/>
   </p:sldIdLst>
   <p:sldSz cx="12192000" cy="6858000"/>
   <p:notesSz cx="6858000" cy="12192000"/>
@@ -954,426 +949,6 @@
 </p:notes>
 </file>
 
-<file path=ppt/notesSlides/notesSlide15.xml><?xml version="1.0" encoding="utf-8"?>
-<p:notes xmlns:a="http://schemas.openxmlformats.org/drawingml/2006/main" xmlns:r="http://schemas.openxmlformats.org/officeDocument/2006/relationships" xmlns:p="http://schemas.openxmlformats.org/presentationml/2006/main">
-  <p:cSld>
-    <p:spTree>
-      <p:nvGrpSpPr>
-        <p:cNvPr id="1" name=""/>
-        <p:cNvGrpSpPr/>
-        <p:nvPr/>
-      </p:nvGrpSpPr>
-      <p:grpSpPr>
-        <a:xfrm>
-          <a:off x="0" y="0"/>
-          <a:ext cx="0" cy="0"/>
-          <a:chOff x="0" y="0"/>
-          <a:chExt cx="0" cy="0"/>
-        </a:xfrm>
-      </p:grpSpPr>
-      <p:sp>
-        <p:nvSpPr>
-          <p:cNvPr id="2" name="Slide Image Placeholder 1"/>
-          <p:cNvSpPr>
-            <a:spLocks noGrp="1" noRot="1" noChangeAspect="1"/>
-          </p:cNvSpPr>
-          <p:nvPr>
-            <p:ph type="sldImg"/>
-          </p:nvPr>
-        </p:nvSpPr>
-        <p:spPr/>
-      </p:sp>
-      <p:sp>
-        <p:nvSpPr>
-          <p:cNvPr id="3" name="Notes Placeholder 2"/>
-          <p:cNvSpPr>
-            <a:spLocks noGrp="1"/>
-          </p:cNvSpPr>
-          <p:nvPr>
-            <p:ph type="body" idx="1"/>
-          </p:nvPr>
-        </p:nvSpPr>
-        <p:spPr/>
-        <p:txBody>
-          <a:bodyPr/>
-          <a:lstStyle/>
-          <a:p>
-            <a:endParaRPr lang="en-US" dirty="0"/>
-          </a:p>
-        </p:txBody>
-      </p:sp>
-      <p:sp>
-        <p:nvSpPr>
-          <p:cNvPr id="4" name="Slide Number Placeholder 3"/>
-          <p:cNvSpPr>
-            <a:spLocks noGrp="1"/>
-          </p:cNvSpPr>
-          <p:nvPr>
-            <p:ph type="sldNum" sz="quarter" idx="10"/>
-          </p:nvPr>
-        </p:nvSpPr>
-        <p:spPr/>
-        <p:txBody>
-          <a:bodyPr/>
-          <a:lstStyle/>
-          <a:p>
-            <a:fld id="{F7021451-1387-4CA6-816F-3879F97B5CBC}" type="slidenum">
-              <a:rPr lang="en-US"/>
-              <a:t>15</a:t>
-            </a:fld>
-            <a:endParaRPr lang="en-US"/>
-          </a:p>
-        </p:txBody>
-      </p:sp>
-    </p:spTree>
-    <p:extLst>
-      <p:ext uri="{BB962C8B-B14F-4D97-AF65-F5344CB8AC3E}">
-        <p14:creationId xmlns:p14="http://schemas.microsoft.com/office/powerpoint/2010/main" val="1024086991"/>
-      </p:ext>
-    </p:extLst>
-  </p:cSld>
-  <p:clrMapOvr>
-    <a:masterClrMapping/>
-  </p:clrMapOvr>
-</p:notes>
-</file>
-
-<file path=ppt/notesSlides/notesSlide16.xml><?xml version="1.0" encoding="utf-8"?>
-<p:notes xmlns:a="http://schemas.openxmlformats.org/drawingml/2006/main" xmlns:r="http://schemas.openxmlformats.org/officeDocument/2006/relationships" xmlns:p="http://schemas.openxmlformats.org/presentationml/2006/main">
-  <p:cSld>
-    <p:spTree>
-      <p:nvGrpSpPr>
-        <p:cNvPr id="1" name=""/>
-        <p:cNvGrpSpPr/>
-        <p:nvPr/>
-      </p:nvGrpSpPr>
-      <p:grpSpPr>
-        <a:xfrm>
-          <a:off x="0" y="0"/>
-          <a:ext cx="0" cy="0"/>
-          <a:chOff x="0" y="0"/>
-          <a:chExt cx="0" cy="0"/>
-        </a:xfrm>
-      </p:grpSpPr>
-      <p:sp>
-        <p:nvSpPr>
-          <p:cNvPr id="2" name="Slide Image Placeholder 1"/>
-          <p:cNvSpPr>
-            <a:spLocks noGrp="1" noRot="1" noChangeAspect="1"/>
-          </p:cNvSpPr>
-          <p:nvPr>
-            <p:ph type="sldImg"/>
-          </p:nvPr>
-        </p:nvSpPr>
-        <p:spPr/>
-      </p:sp>
-      <p:sp>
-        <p:nvSpPr>
-          <p:cNvPr id="3" name="Notes Placeholder 2"/>
-          <p:cNvSpPr>
-            <a:spLocks noGrp="1"/>
-          </p:cNvSpPr>
-          <p:nvPr>
-            <p:ph type="body" idx="1"/>
-          </p:nvPr>
-        </p:nvSpPr>
-        <p:spPr/>
-        <p:txBody>
-          <a:bodyPr/>
-          <a:lstStyle/>
-          <a:p>
-            <a:endParaRPr lang="en-US" dirty="0"/>
-          </a:p>
-        </p:txBody>
-      </p:sp>
-      <p:sp>
-        <p:nvSpPr>
-          <p:cNvPr id="4" name="Slide Number Placeholder 3"/>
-          <p:cNvSpPr>
-            <a:spLocks noGrp="1"/>
-          </p:cNvSpPr>
-          <p:nvPr>
-            <p:ph type="sldNum" sz="quarter" idx="10"/>
-          </p:nvPr>
-        </p:nvSpPr>
-        <p:spPr/>
-        <p:txBody>
-          <a:bodyPr/>
-          <a:lstStyle/>
-          <a:p>
-            <a:fld id="{F7021451-1387-4CA6-816F-3879F97B5CBC}" type="slidenum">
-              <a:rPr lang="en-US"/>
-              <a:t>16</a:t>
-            </a:fld>
-            <a:endParaRPr lang="en-US"/>
-          </a:p>
-        </p:txBody>
-      </p:sp>
-    </p:spTree>
-    <p:extLst>
-      <p:ext uri="{BB962C8B-B14F-4D97-AF65-F5344CB8AC3E}">
-        <p14:creationId xmlns:p14="http://schemas.microsoft.com/office/powerpoint/2010/main" val="1024086991"/>
-      </p:ext>
-    </p:extLst>
-  </p:cSld>
-  <p:clrMapOvr>
-    <a:masterClrMapping/>
-  </p:clrMapOvr>
-</p:notes>
-</file>
-
-<file path=ppt/notesSlides/notesSlide17.xml><?xml version="1.0" encoding="utf-8"?>
-<p:notes xmlns:a="http://schemas.openxmlformats.org/drawingml/2006/main" xmlns:r="http://schemas.openxmlformats.org/officeDocument/2006/relationships" xmlns:p="http://schemas.openxmlformats.org/presentationml/2006/main">
-  <p:cSld>
-    <p:spTree>
-      <p:nvGrpSpPr>
-        <p:cNvPr id="1" name=""/>
-        <p:cNvGrpSpPr/>
-        <p:nvPr/>
-      </p:nvGrpSpPr>
-      <p:grpSpPr>
-        <a:xfrm>
-          <a:off x="0" y="0"/>
-          <a:ext cx="0" cy="0"/>
-          <a:chOff x="0" y="0"/>
-          <a:chExt cx="0" cy="0"/>
-        </a:xfrm>
-      </p:grpSpPr>
-      <p:sp>
-        <p:nvSpPr>
-          <p:cNvPr id="2" name="Slide Image Placeholder 1"/>
-          <p:cNvSpPr>
-            <a:spLocks noGrp="1" noRot="1" noChangeAspect="1"/>
-          </p:cNvSpPr>
-          <p:nvPr>
-            <p:ph type="sldImg"/>
-          </p:nvPr>
-        </p:nvSpPr>
-        <p:spPr/>
-      </p:sp>
-      <p:sp>
-        <p:nvSpPr>
-          <p:cNvPr id="3" name="Notes Placeholder 2"/>
-          <p:cNvSpPr>
-            <a:spLocks noGrp="1"/>
-          </p:cNvSpPr>
-          <p:nvPr>
-            <p:ph type="body" idx="1"/>
-          </p:nvPr>
-        </p:nvSpPr>
-        <p:spPr/>
-        <p:txBody>
-          <a:bodyPr/>
-          <a:lstStyle/>
-          <a:p>
-            <a:endParaRPr lang="en-US" dirty="0"/>
-          </a:p>
-        </p:txBody>
-      </p:sp>
-      <p:sp>
-        <p:nvSpPr>
-          <p:cNvPr id="4" name="Slide Number Placeholder 3"/>
-          <p:cNvSpPr>
-            <a:spLocks noGrp="1"/>
-          </p:cNvSpPr>
-          <p:nvPr>
-            <p:ph type="sldNum" sz="quarter" idx="10"/>
-          </p:nvPr>
-        </p:nvSpPr>
-        <p:spPr/>
-        <p:txBody>
-          <a:bodyPr/>
-          <a:lstStyle/>
-          <a:p>
-            <a:fld id="{F7021451-1387-4CA6-816F-3879F97B5CBC}" type="slidenum">
-              <a:rPr lang="en-US"/>
-              <a:t>17</a:t>
-            </a:fld>
-            <a:endParaRPr lang="en-US"/>
-          </a:p>
-        </p:txBody>
-      </p:sp>
-    </p:spTree>
-    <p:extLst>
-      <p:ext uri="{BB962C8B-B14F-4D97-AF65-F5344CB8AC3E}">
-        <p14:creationId xmlns:p14="http://schemas.microsoft.com/office/powerpoint/2010/main" val="1024086991"/>
-      </p:ext>
-    </p:extLst>
-  </p:cSld>
-  <p:clrMapOvr>
-    <a:masterClrMapping/>
-  </p:clrMapOvr>
-</p:notes>
-</file>
-
-<file path=ppt/notesSlides/notesSlide18.xml><?xml version="1.0" encoding="utf-8"?>
-<p:notes xmlns:a="http://schemas.openxmlformats.org/drawingml/2006/main" xmlns:r="http://schemas.openxmlformats.org/officeDocument/2006/relationships" xmlns:p="http://schemas.openxmlformats.org/presentationml/2006/main">
-  <p:cSld>
-    <p:spTree>
-      <p:nvGrpSpPr>
-        <p:cNvPr id="1" name=""/>
-        <p:cNvGrpSpPr/>
-        <p:nvPr/>
-      </p:nvGrpSpPr>
-      <p:grpSpPr>
-        <a:xfrm>
-          <a:off x="0" y="0"/>
-          <a:ext cx="0" cy="0"/>
-          <a:chOff x="0" y="0"/>
-          <a:chExt cx="0" cy="0"/>
-        </a:xfrm>
-      </p:grpSpPr>
-      <p:sp>
-        <p:nvSpPr>
-          <p:cNvPr id="2" name="Slide Image Placeholder 1"/>
-          <p:cNvSpPr>
-            <a:spLocks noGrp="1" noRot="1" noChangeAspect="1"/>
-          </p:cNvSpPr>
-          <p:nvPr>
-            <p:ph type="sldImg"/>
-          </p:nvPr>
-        </p:nvSpPr>
-        <p:spPr/>
-      </p:sp>
-      <p:sp>
-        <p:nvSpPr>
-          <p:cNvPr id="3" name="Notes Placeholder 2"/>
-          <p:cNvSpPr>
-            <a:spLocks noGrp="1"/>
-          </p:cNvSpPr>
-          <p:nvPr>
-            <p:ph type="body" idx="1"/>
-          </p:nvPr>
-        </p:nvSpPr>
-        <p:spPr/>
-        <p:txBody>
-          <a:bodyPr/>
-          <a:lstStyle/>
-          <a:p>
-            <a:endParaRPr lang="en-US" dirty="0"/>
-          </a:p>
-        </p:txBody>
-      </p:sp>
-      <p:sp>
-        <p:nvSpPr>
-          <p:cNvPr id="4" name="Slide Number Placeholder 3"/>
-          <p:cNvSpPr>
-            <a:spLocks noGrp="1"/>
-          </p:cNvSpPr>
-          <p:nvPr>
-            <p:ph type="sldNum" sz="quarter" idx="10"/>
-          </p:nvPr>
-        </p:nvSpPr>
-        <p:spPr/>
-        <p:txBody>
-          <a:bodyPr/>
-          <a:lstStyle/>
-          <a:p>
-            <a:fld id="{F7021451-1387-4CA6-816F-3879F97B5CBC}" type="slidenum">
-              <a:rPr lang="en-US"/>
-              <a:t>18</a:t>
-            </a:fld>
-            <a:endParaRPr lang="en-US"/>
-          </a:p>
-        </p:txBody>
-      </p:sp>
-    </p:spTree>
-    <p:extLst>
-      <p:ext uri="{BB962C8B-B14F-4D97-AF65-F5344CB8AC3E}">
-        <p14:creationId xmlns:p14="http://schemas.microsoft.com/office/powerpoint/2010/main" val="1024086991"/>
-      </p:ext>
-    </p:extLst>
-  </p:cSld>
-  <p:clrMapOvr>
-    <a:masterClrMapping/>
-  </p:clrMapOvr>
-</p:notes>
-</file>
-
-<file path=ppt/notesSlides/notesSlide19.xml><?xml version="1.0" encoding="utf-8"?>
-<p:notes xmlns:a="http://schemas.openxmlformats.org/drawingml/2006/main" xmlns:r="http://schemas.openxmlformats.org/officeDocument/2006/relationships" xmlns:p="http://schemas.openxmlformats.org/presentationml/2006/main">
-  <p:cSld>
-    <p:spTree>
-      <p:nvGrpSpPr>
-        <p:cNvPr id="1" name=""/>
-        <p:cNvGrpSpPr/>
-        <p:nvPr/>
-      </p:nvGrpSpPr>
-      <p:grpSpPr>
-        <a:xfrm>
-          <a:off x="0" y="0"/>
-          <a:ext cx="0" cy="0"/>
-          <a:chOff x="0" y="0"/>
-          <a:chExt cx="0" cy="0"/>
-        </a:xfrm>
-      </p:grpSpPr>
-      <p:sp>
-        <p:nvSpPr>
-          <p:cNvPr id="2" name="Slide Image Placeholder 1"/>
-          <p:cNvSpPr>
-            <a:spLocks noGrp="1" noRot="1" noChangeAspect="1"/>
-          </p:cNvSpPr>
-          <p:nvPr>
-            <p:ph type="sldImg"/>
-          </p:nvPr>
-        </p:nvSpPr>
-        <p:spPr/>
-      </p:sp>
-      <p:sp>
-        <p:nvSpPr>
-          <p:cNvPr id="3" name="Notes Placeholder 2"/>
-          <p:cNvSpPr>
-            <a:spLocks noGrp="1"/>
-          </p:cNvSpPr>
-          <p:nvPr>
-            <p:ph type="body" idx="1"/>
-          </p:nvPr>
-        </p:nvSpPr>
-        <p:spPr/>
-        <p:txBody>
-          <a:bodyPr/>
-          <a:lstStyle/>
-          <a:p>
-            <a:endParaRPr lang="en-US" dirty="0"/>
-          </a:p>
-        </p:txBody>
-      </p:sp>
-      <p:sp>
-        <p:nvSpPr>
-          <p:cNvPr id="4" name="Slide Number Placeholder 3"/>
-          <p:cNvSpPr>
-            <a:spLocks noGrp="1"/>
-          </p:cNvSpPr>
-          <p:nvPr>
-            <p:ph type="sldNum" sz="quarter" idx="10"/>
-          </p:nvPr>
-        </p:nvSpPr>
-        <p:spPr/>
-        <p:txBody>
-          <a:bodyPr/>
-          <a:lstStyle/>
-          <a:p>
-            <a:fld id="{F7021451-1387-4CA6-816F-3879F97B5CBC}" type="slidenum">
-              <a:rPr lang="en-US"/>
-              <a:t>19</a:t>
-            </a:fld>
-            <a:endParaRPr lang="en-US"/>
-          </a:p>
-        </p:txBody>
-      </p:sp>
-    </p:spTree>
-    <p:extLst>
-      <p:ext uri="{BB962C8B-B14F-4D97-AF65-F5344CB8AC3E}">
-        <p14:creationId xmlns:p14="http://schemas.microsoft.com/office/powerpoint/2010/main" val="1024086991"/>
-      </p:ext>
-    </p:extLst>
-  </p:cSld>
-  <p:clrMapOvr>
-    <a:masterClrMapping/>
-  </p:clrMapOvr>
-</p:notes>
-</file>
-
 <file path=ppt/notesSlides/notesSlide2.xml><?xml version="1.0" encoding="utf-8"?>
 <p:notes xmlns:a="http://schemas.openxmlformats.org/drawingml/2006/main" xmlns:r="http://schemas.openxmlformats.org/officeDocument/2006/relationships" xmlns:p="http://schemas.openxmlformats.org/presentationml/2006/main">
   <p:cSld>
@@ -2645,6 +2220,17 @@
               <a:buNone/>
             </a:pPr>
             <a:r>
+              <a:rPr lang="en-US" dirty="0">
+                <a:solidFill>
+                  <a:srgbClr val="191919"/>
+                </a:solidFill>
+                <a:latin typeface="Times New Roman" pitchFamily="34" charset="0"/>
+                <a:ea typeface="Times New Roman" pitchFamily="34" charset="-122"/>
+                <a:cs typeface="Times New Roman" pitchFamily="34" charset="-120"/>
+              </a:rPr>
+              <a:t>M</a:t>
+            </a:r>
+            <a:r>
               <a:rPr lang="en-US" sz="1800" dirty="0">
                 <a:solidFill>
                   <a:srgbClr val="191919"/>
@@ -2653,7 +2239,7 @@
                 <a:ea typeface="Times New Roman" pitchFamily="34" charset="-122"/>
                 <a:cs typeface="Times New Roman" pitchFamily="34" charset="-120"/>
               </a:rPr>
-              <a:t>Dr. Manoj Kaushik</a:t>
+              <a:t>r. Manoj Kaushik</a:t>
             </a:r>
             <a:endParaRPr lang="en-US" sz="1800" dirty="0"/>
           </a:p>
@@ -3083,45 +2669,6 @@
       </p:sp>
       <p:sp>
         <p:nvSpPr>
-          <p:cNvPr id="21" name="Text 15"/>
-          <p:cNvSpPr/>
-          <p:nvPr/>
-        </p:nvSpPr>
-        <p:spPr>
-          <a:xfrm>
-            <a:off x="502920" y="6382512"/>
-            <a:ext cx="10744200" cy="320040"/>
-          </a:xfrm>
-          <a:prstGeom prst="rect">
-            <a:avLst/>
-          </a:prstGeom>
-          <a:noFill/>
-          <a:ln/>
-        </p:spPr>
-        <p:txBody>
-          <a:bodyPr wrap="square" lIns="0" tIns="0" rIns="0" bIns="0" rtlCol="0" anchor="ctr"/>
-          <a:lstStyle/>
-          <a:p>
-            <a:pPr marL="0" indent="0">
-              <a:buNone/>
-            </a:pPr>
-            <a:r>
-              <a:rPr lang="en-US" sz="1200" i="1" dirty="0">
-                <a:solidFill>
-                  <a:srgbClr val="595959"/>
-                </a:solidFill>
-                <a:latin typeface="Times New Roman" pitchFamily="34" charset="0"/>
-                <a:ea typeface="Times New Roman" pitchFamily="34" charset="-122"/>
-                <a:cs typeface="Times New Roman" pitchFamily="34" charset="-120"/>
-              </a:rPr>
-              <a:t>Teaching cue: These two lectures close Unit I — link the metrics from Lecture 7 to concrete mitigation and risk awareness.</a:t>
-            </a:r>
-            <a:endParaRPr lang="en-US" sz="1200" dirty="0"/>
-          </a:p>
-        </p:txBody>
-      </p:sp>
-      <p:sp>
-        <p:nvSpPr>
           <p:cNvPr id="22" name="Text 16"/>
           <p:cNvSpPr/>
           <p:nvPr/>
@@ -3168,1630 +2715,6 @@
 </file>
 
 <file path=ppt/slides/slide10.xml><?xml version="1.0" encoding="utf-8"?>
-<p:sld xmlns:a="http://schemas.openxmlformats.org/drawingml/2006/main" xmlns:r="http://schemas.openxmlformats.org/officeDocument/2006/relationships" xmlns:p="http://schemas.openxmlformats.org/presentationml/2006/main">
-  <p:cSld name="Slide 10">
-    <p:bg>
-      <p:bgPr>
-        <a:solidFill>
-          <a:srgbClr val="FFFFFF"/>
-        </a:solidFill>
-        <a:effectLst/>
-      </p:bgPr>
-    </p:bg>
-    <p:spTree>
-      <p:nvGrpSpPr>
-        <p:cNvPr id="1" name=""/>
-        <p:cNvGrpSpPr/>
-        <p:nvPr/>
-      </p:nvGrpSpPr>
-      <p:grpSpPr>
-        <a:xfrm>
-          <a:off x="0" y="0"/>
-          <a:ext cx="0" cy="0"/>
-          <a:chOff x="0" y="0"/>
-          <a:chExt cx="0" cy="0"/>
-        </a:xfrm>
-      </p:grpSpPr>
-      <p:sp>
-        <p:nvSpPr>
-          <p:cNvPr id="2" name="Shape 0"/>
-          <p:cNvSpPr/>
-          <p:nvPr/>
-        </p:nvSpPr>
-        <p:spPr>
-          <a:xfrm>
-            <a:off x="0" y="0"/>
-            <a:ext cx="12191695" cy="502920"/>
-          </a:xfrm>
-          <a:prstGeom prst="rect">
-            <a:avLst/>
-          </a:prstGeom>
-          <a:solidFill>
-            <a:srgbClr val="F8FBFF"/>
-          </a:solidFill>
-          <a:ln w="12700">
-            <a:solidFill>
-              <a:srgbClr val="F8FBFF"/>
-            </a:solidFill>
-            <a:prstDash val="solid"/>
-          </a:ln>
-        </p:spPr>
-        <p:txBody>
-          <a:bodyPr/>
-          <a:lstStyle/>
-          <a:p>
-            <a:endParaRPr lang="en-IN"/>
-          </a:p>
-        </p:txBody>
-      </p:sp>
-      <p:sp>
-        <p:nvSpPr>
-          <p:cNvPr id="3" name="Shape 1"/>
-          <p:cNvSpPr/>
-          <p:nvPr/>
-        </p:nvSpPr>
-        <p:spPr>
-          <a:xfrm>
-            <a:off x="0" y="475488"/>
-            <a:ext cx="12191695" cy="27432"/>
-          </a:xfrm>
-          <a:prstGeom prst="rect">
-            <a:avLst/>
-          </a:prstGeom>
-          <a:solidFill>
-            <a:srgbClr val="2E75B6"/>
-          </a:solidFill>
-          <a:ln w="12700">
-            <a:solidFill>
-              <a:srgbClr val="2E75B6"/>
-            </a:solidFill>
-            <a:prstDash val="solid"/>
-          </a:ln>
-        </p:spPr>
-        <p:txBody>
-          <a:bodyPr/>
-          <a:lstStyle/>
-          <a:p>
-            <a:endParaRPr lang="en-IN"/>
-          </a:p>
-        </p:txBody>
-      </p:sp>
-      <p:sp>
-        <p:nvSpPr>
-          <p:cNvPr id="4" name="Text 2"/>
-          <p:cNvSpPr/>
-          <p:nvPr/>
-        </p:nvSpPr>
-        <p:spPr>
-          <a:xfrm>
-            <a:off x="365760" y="73152"/>
-            <a:ext cx="6400800" cy="274320"/>
-          </a:xfrm>
-          <a:prstGeom prst="rect">
-            <a:avLst/>
-          </a:prstGeom>
-          <a:noFill/>
-          <a:ln/>
-        </p:spPr>
-        <p:txBody>
-          <a:bodyPr wrap="square" lIns="0" tIns="0" rIns="0" bIns="0" rtlCol="0" anchor="ctr"/>
-          <a:lstStyle/>
-          <a:p>
-            <a:pPr marL="0" indent="0">
-              <a:buNone/>
-            </a:pPr>
-            <a:r>
-              <a:rPr lang="en-US" sz="1800" b="1" dirty="0">
-                <a:solidFill>
-                  <a:srgbClr val="1F4E79"/>
-                </a:solidFill>
-                <a:latin typeface="Times New Roman" pitchFamily="34" charset="0"/>
-                <a:ea typeface="Times New Roman" pitchFamily="34" charset="-122"/>
-                <a:cs typeface="Times New Roman" pitchFamily="34" charset="-120"/>
-              </a:rPr>
-              <a:t>TCS349: Responsible and Explainable AI</a:t>
-            </a:r>
-            <a:endParaRPr lang="en-US" sz="1800" dirty="0"/>
-          </a:p>
-        </p:txBody>
-      </p:sp>
-      <p:sp>
-        <p:nvSpPr>
-          <p:cNvPr id="5" name="Text 3"/>
-          <p:cNvSpPr/>
-          <p:nvPr/>
-        </p:nvSpPr>
-        <p:spPr>
-          <a:xfrm>
-            <a:off x="8321040" y="82296"/>
-            <a:ext cx="3383280" cy="274320"/>
-          </a:xfrm>
-          <a:prstGeom prst="rect">
-            <a:avLst/>
-          </a:prstGeom>
-          <a:noFill/>
-          <a:ln/>
-        </p:spPr>
-        <p:txBody>
-          <a:bodyPr wrap="square" lIns="0" tIns="0" rIns="0" bIns="0" rtlCol="0" anchor="ctr"/>
-          <a:lstStyle/>
-          <a:p>
-            <a:pPr marL="0" indent="0" algn="r">
-              <a:buNone/>
-            </a:pPr>
-            <a:r>
-              <a:rPr lang="en-US" sz="1600" b="1" dirty="0">
-                <a:solidFill>
-                  <a:srgbClr val="1F4E79"/>
-                </a:solidFill>
-                <a:latin typeface="Times New Roman" pitchFamily="34" charset="0"/>
-                <a:ea typeface="Times New Roman" pitchFamily="34" charset="-122"/>
-                <a:cs typeface="Times New Roman" pitchFamily="34" charset="-120"/>
-              </a:rPr>
-              <a:t>Unit 1 | Lecture 8</a:t>
-            </a:r>
-            <a:endParaRPr lang="en-US" sz="1600" dirty="0"/>
-          </a:p>
-        </p:txBody>
-      </p:sp>
-      <p:sp>
-        <p:nvSpPr>
-          <p:cNvPr id="6" name="Text 4"/>
-          <p:cNvSpPr/>
-          <p:nvPr/>
-        </p:nvSpPr>
-        <p:spPr>
-          <a:xfrm>
-            <a:off x="502920" y="640080"/>
-            <a:ext cx="11155680" cy="640080"/>
-          </a:xfrm>
-          <a:prstGeom prst="rect">
-            <a:avLst/>
-          </a:prstGeom>
-          <a:noFill/>
-          <a:ln/>
-        </p:spPr>
-        <p:txBody>
-          <a:bodyPr wrap="square" lIns="0" tIns="0" rIns="0" bIns="0" rtlCol="0" anchor="ctr"/>
-          <a:lstStyle/>
-          <a:p>
-            <a:pPr marL="0" indent="0">
-              <a:buNone/>
-            </a:pPr>
-            <a:r>
-              <a:rPr lang="en-US" sz="2300" b="1" dirty="0">
-                <a:solidFill>
-                  <a:srgbClr val="1F4E79"/>
-                </a:solidFill>
-                <a:latin typeface="Times New Roman" pitchFamily="34" charset="0"/>
-                <a:ea typeface="Times New Roman" pitchFamily="34" charset="-122"/>
-                <a:cs typeface="Times New Roman" pitchFamily="34" charset="-120"/>
-              </a:rPr>
-              <a:t>7. Lecture 8 Summary</a:t>
-            </a:r>
-            <a:endParaRPr lang="en-US" sz="2300" dirty="0"/>
-          </a:p>
-        </p:txBody>
-      </p:sp>
-      <p:sp>
-        <p:nvSpPr>
-          <p:cNvPr id="7" name="Text 5"/>
-          <p:cNvSpPr/>
-          <p:nvPr/>
-        </p:nvSpPr>
-        <p:spPr>
-          <a:xfrm>
-            <a:off x="594360" y="1417320"/>
-            <a:ext cx="10972800" cy="4434840"/>
-          </a:xfrm>
-          <a:prstGeom prst="rect">
-            <a:avLst/>
-          </a:prstGeom>
-          <a:noFill/>
-          <a:ln/>
-        </p:spPr>
-        <p:txBody>
-          <a:bodyPr wrap="square" lIns="50800" tIns="50800" rIns="50800" bIns="50800" rtlCol="0" anchor="t"/>
-          <a:lstStyle/>
-          <a:p>
-            <a:pPr marL="0" indent="0">
-              <a:buNone/>
-            </a:pPr>
-            <a:r>
-              <a:rPr lang="en-US" sz="1800" dirty="0">
-                <a:solidFill>
-                  <a:srgbClr val="191919"/>
-                </a:solidFill>
-                <a:latin typeface="Times New Roman" pitchFamily="34" charset="0"/>
-                <a:ea typeface="Times New Roman" pitchFamily="34" charset="-122"/>
-                <a:cs typeface="Times New Roman" pitchFamily="34" charset="-120"/>
-              </a:rPr>
-              <a:t>Equal opportunity, equalized odds and predictive parity each formalise a different notion of equal treatment.</a:t>
-            </a:r>
-            <a:endParaRPr lang="en-US" sz="1800" dirty="0"/>
-          </a:p>
-          <a:p>
-            <a:pPr marL="0" indent="0">
-              <a:buNone/>
-            </a:pPr>
-            <a:endParaRPr lang="en-US" sz="1800" dirty="0"/>
-          </a:p>
-          <a:p>
-            <a:pPr marL="0" indent="0">
-              <a:buNone/>
-            </a:pPr>
-            <a:r>
-              <a:rPr lang="en-US" sz="1800" dirty="0">
-                <a:solidFill>
-                  <a:srgbClr val="191919"/>
-                </a:solidFill>
-                <a:latin typeface="Times New Roman" pitchFamily="34" charset="0"/>
-                <a:ea typeface="Times New Roman" pitchFamily="34" charset="-122"/>
-                <a:cs typeface="Times New Roman" pitchFamily="34" charset="-120"/>
-              </a:rPr>
-              <a:t>These metrics generally cannot all be satisfied at once when groups have different base rates.</a:t>
-            </a:r>
-            <a:endParaRPr lang="en-US" sz="1800" dirty="0"/>
-          </a:p>
-          <a:p>
-            <a:pPr marL="0" indent="0">
-              <a:buNone/>
-            </a:pPr>
-            <a:endParaRPr lang="en-US" sz="1800" dirty="0"/>
-          </a:p>
-          <a:p>
-            <a:pPr marL="0" indent="0">
-              <a:buNone/>
-            </a:pPr>
-            <a:r>
-              <a:rPr lang="en-US" sz="1800" dirty="0">
-                <a:solidFill>
-                  <a:srgbClr val="191919"/>
-                </a:solidFill>
-                <a:latin typeface="Times New Roman" pitchFamily="34" charset="0"/>
-                <a:ea typeface="Times New Roman" pitchFamily="34" charset="-122"/>
-                <a:cs typeface="Times New Roman" pitchFamily="34" charset="-120"/>
-              </a:rPr>
-              <a:t>Metric choice should reflect the real-world cost of false positives versus false negatives in that application.</a:t>
-            </a:r>
-            <a:endParaRPr lang="en-US" sz="1800" dirty="0"/>
-          </a:p>
-          <a:p>
-            <a:pPr marL="0" indent="0">
-              <a:buNone/>
-            </a:pPr>
-            <a:endParaRPr lang="en-US" sz="1800" dirty="0"/>
-          </a:p>
-          <a:p>
-            <a:pPr marL="0" indent="0">
-              <a:buNone/>
-            </a:pPr>
-            <a:r>
-              <a:rPr lang="en-US" sz="1800" dirty="0">
-                <a:solidFill>
-                  <a:srgbClr val="191919"/>
-                </a:solidFill>
-                <a:latin typeface="Times New Roman" pitchFamily="34" charset="0"/>
-                <a:ea typeface="Times New Roman" pitchFamily="34" charset="-122"/>
-                <a:cs typeface="Times New Roman" pitchFamily="34" charset="-120"/>
-              </a:rPr>
-              <a:t>Next: how to actually reduce the bias these metrics reveal - bias-mitigation strategies.</a:t>
-            </a:r>
-            <a:endParaRPr lang="en-US" sz="1800" dirty="0"/>
-          </a:p>
-        </p:txBody>
-      </p:sp>
-      <p:sp>
-        <p:nvSpPr>
-          <p:cNvPr id="8" name="Text 6"/>
-          <p:cNvSpPr/>
-          <p:nvPr/>
-        </p:nvSpPr>
-        <p:spPr>
-          <a:xfrm>
-            <a:off x="502920" y="6382512"/>
-            <a:ext cx="10744200" cy="320040"/>
-          </a:xfrm>
-          <a:prstGeom prst="rect">
-            <a:avLst/>
-          </a:prstGeom>
-          <a:noFill/>
-          <a:ln/>
-        </p:spPr>
-        <p:txBody>
-          <a:bodyPr wrap="square" lIns="0" tIns="0" rIns="0" bIns="0" rtlCol="0" anchor="ctr"/>
-          <a:lstStyle/>
-          <a:p>
-            <a:pPr marL="0" indent="0">
-              <a:buNone/>
-            </a:pPr>
-            <a:r>
-              <a:rPr lang="en-US" sz="1200" i="1" dirty="0">
-                <a:solidFill>
-                  <a:srgbClr val="595959"/>
-                </a:solidFill>
-                <a:latin typeface="Times New Roman" pitchFamily="34" charset="0"/>
-                <a:ea typeface="Times New Roman" pitchFamily="34" charset="-122"/>
-                <a:cs typeface="Times New Roman" pitchFamily="34" charset="-120"/>
-              </a:rPr>
-              <a:t>Teaching cue: This is a natural pause point if splitting Lecture 8 and Lecture 9 across two class periods.</a:t>
-            </a:r>
-            <a:endParaRPr lang="en-US" sz="1200" dirty="0"/>
-          </a:p>
-        </p:txBody>
-      </p:sp>
-      <p:sp>
-        <p:nvSpPr>
-          <p:cNvPr id="9" name="Text 7"/>
-          <p:cNvSpPr/>
-          <p:nvPr/>
-        </p:nvSpPr>
-        <p:spPr>
-          <a:xfrm>
-            <a:off x="11430000" y="6446520"/>
-            <a:ext cx="365760" cy="182880"/>
-          </a:xfrm>
-          <a:prstGeom prst="rect">
-            <a:avLst/>
-          </a:prstGeom>
-          <a:noFill/>
-          <a:ln/>
-        </p:spPr>
-        <p:txBody>
-          <a:bodyPr wrap="square" lIns="0" tIns="0" rIns="0" bIns="0" rtlCol="0" anchor="ctr"/>
-          <a:lstStyle/>
-          <a:p>
-            <a:pPr marL="0" indent="0" algn="ctr">
-              <a:buNone/>
-            </a:pPr>
-            <a:r>
-              <a:rPr lang="en-US" sz="1200" dirty="0">
-                <a:solidFill>
-                  <a:srgbClr val="595959"/>
-                </a:solidFill>
-                <a:latin typeface="Times New Roman" pitchFamily="34" charset="0"/>
-                <a:ea typeface="Times New Roman" pitchFamily="34" charset="-122"/>
-                <a:cs typeface="Times New Roman" pitchFamily="34" charset="-120"/>
-              </a:rPr>
-              <a:t>10</a:t>
-            </a:r>
-            <a:endParaRPr lang="en-US" sz="1200" dirty="0"/>
-          </a:p>
-        </p:txBody>
-      </p:sp>
-    </p:spTree>
-  </p:cSld>
-  <p:clrMapOvr>
-    <a:masterClrMapping/>
-  </p:clrMapOvr>
-</p:sld>
-</file>
-
-<file path=ppt/slides/slide11.xml><?xml version="1.0" encoding="utf-8"?>
-<p:sld xmlns:a="http://schemas.openxmlformats.org/drawingml/2006/main" xmlns:r="http://schemas.openxmlformats.org/officeDocument/2006/relationships" xmlns:p="http://schemas.openxmlformats.org/presentationml/2006/main">
-  <p:cSld name="Slide 11">
-    <p:bg>
-      <p:bgPr>
-        <a:solidFill>
-          <a:srgbClr val="FFFFFF"/>
-        </a:solidFill>
-        <a:effectLst/>
-      </p:bgPr>
-    </p:bg>
-    <p:spTree>
-      <p:nvGrpSpPr>
-        <p:cNvPr id="1" name=""/>
-        <p:cNvGrpSpPr/>
-        <p:nvPr/>
-      </p:nvGrpSpPr>
-      <p:grpSpPr>
-        <a:xfrm>
-          <a:off x="0" y="0"/>
-          <a:ext cx="0" cy="0"/>
-          <a:chOff x="0" y="0"/>
-          <a:chExt cx="0" cy="0"/>
-        </a:xfrm>
-      </p:grpSpPr>
-      <p:sp>
-        <p:nvSpPr>
-          <p:cNvPr id="2" name="Shape 0"/>
-          <p:cNvSpPr/>
-          <p:nvPr/>
-        </p:nvSpPr>
-        <p:spPr>
-          <a:xfrm>
-            <a:off x="0" y="0"/>
-            <a:ext cx="12191695" cy="502920"/>
-          </a:xfrm>
-          <a:prstGeom prst="rect">
-            <a:avLst/>
-          </a:prstGeom>
-          <a:solidFill>
-            <a:srgbClr val="F8FBFF"/>
-          </a:solidFill>
-          <a:ln w="12700">
-            <a:solidFill>
-              <a:srgbClr val="F8FBFF"/>
-            </a:solidFill>
-            <a:prstDash val="solid"/>
-          </a:ln>
-        </p:spPr>
-        <p:txBody>
-          <a:bodyPr/>
-          <a:lstStyle/>
-          <a:p>
-            <a:endParaRPr lang="en-IN"/>
-          </a:p>
-        </p:txBody>
-      </p:sp>
-      <p:sp>
-        <p:nvSpPr>
-          <p:cNvPr id="3" name="Shape 1"/>
-          <p:cNvSpPr/>
-          <p:nvPr/>
-        </p:nvSpPr>
-        <p:spPr>
-          <a:xfrm>
-            <a:off x="0" y="475488"/>
-            <a:ext cx="12191695" cy="27432"/>
-          </a:xfrm>
-          <a:prstGeom prst="rect">
-            <a:avLst/>
-          </a:prstGeom>
-          <a:solidFill>
-            <a:srgbClr val="2E75B6"/>
-          </a:solidFill>
-          <a:ln w="12700">
-            <a:solidFill>
-              <a:srgbClr val="2E75B6"/>
-            </a:solidFill>
-            <a:prstDash val="solid"/>
-          </a:ln>
-        </p:spPr>
-        <p:txBody>
-          <a:bodyPr/>
-          <a:lstStyle/>
-          <a:p>
-            <a:endParaRPr lang="en-IN"/>
-          </a:p>
-        </p:txBody>
-      </p:sp>
-      <p:sp>
-        <p:nvSpPr>
-          <p:cNvPr id="4" name="Text 2"/>
-          <p:cNvSpPr/>
-          <p:nvPr/>
-        </p:nvSpPr>
-        <p:spPr>
-          <a:xfrm>
-            <a:off x="365760" y="73152"/>
-            <a:ext cx="6400800" cy="274320"/>
-          </a:xfrm>
-          <a:prstGeom prst="rect">
-            <a:avLst/>
-          </a:prstGeom>
-          <a:noFill/>
-          <a:ln/>
-        </p:spPr>
-        <p:txBody>
-          <a:bodyPr wrap="square" lIns="0" tIns="0" rIns="0" bIns="0" rtlCol="0" anchor="ctr"/>
-          <a:lstStyle/>
-          <a:p>
-            <a:pPr marL="0" indent="0">
-              <a:buNone/>
-            </a:pPr>
-            <a:r>
-              <a:rPr lang="en-US" sz="1800" b="1" dirty="0">
-                <a:solidFill>
-                  <a:srgbClr val="1F4E79"/>
-                </a:solidFill>
-                <a:latin typeface="Times New Roman" pitchFamily="34" charset="0"/>
-                <a:ea typeface="Times New Roman" pitchFamily="34" charset="-122"/>
-                <a:cs typeface="Times New Roman" pitchFamily="34" charset="-120"/>
-              </a:rPr>
-              <a:t>TCS349: Responsible and Explainable AI</a:t>
-            </a:r>
-            <a:endParaRPr lang="en-US" sz="1800" dirty="0"/>
-          </a:p>
-        </p:txBody>
-      </p:sp>
-      <p:sp>
-        <p:nvSpPr>
-          <p:cNvPr id="5" name="Text 3"/>
-          <p:cNvSpPr/>
-          <p:nvPr/>
-        </p:nvSpPr>
-        <p:spPr>
-          <a:xfrm>
-            <a:off x="8321040" y="82296"/>
-            <a:ext cx="3383280" cy="274320"/>
-          </a:xfrm>
-          <a:prstGeom prst="rect">
-            <a:avLst/>
-          </a:prstGeom>
-          <a:noFill/>
-          <a:ln/>
-        </p:spPr>
-        <p:txBody>
-          <a:bodyPr wrap="square" lIns="0" tIns="0" rIns="0" bIns="0" rtlCol="0" anchor="ctr"/>
-          <a:lstStyle/>
-          <a:p>
-            <a:pPr marL="0" indent="0" algn="r">
-              <a:buNone/>
-            </a:pPr>
-            <a:r>
-              <a:rPr lang="en-US" sz="1600" b="1" dirty="0">
-                <a:solidFill>
-                  <a:srgbClr val="1F4E79"/>
-                </a:solidFill>
-                <a:latin typeface="Times New Roman" pitchFamily="34" charset="0"/>
-                <a:ea typeface="Times New Roman" pitchFamily="34" charset="-122"/>
-                <a:cs typeface="Times New Roman" pitchFamily="34" charset="-120"/>
-              </a:rPr>
-              <a:t>Unit 1 | Lecture 9</a:t>
-            </a:r>
-            <a:endParaRPr lang="en-US" sz="1600" dirty="0"/>
-          </a:p>
-        </p:txBody>
-      </p:sp>
-      <p:sp>
-        <p:nvSpPr>
-          <p:cNvPr id="6" name="Text 4"/>
-          <p:cNvSpPr/>
-          <p:nvPr/>
-        </p:nvSpPr>
-        <p:spPr>
-          <a:xfrm>
-            <a:off x="502920" y="640080"/>
-            <a:ext cx="11155680" cy="640080"/>
-          </a:xfrm>
-          <a:prstGeom prst="rect">
-            <a:avLst/>
-          </a:prstGeom>
-          <a:noFill/>
-          <a:ln/>
-        </p:spPr>
-        <p:txBody>
-          <a:bodyPr wrap="square" lIns="0" tIns="0" rIns="0" bIns="0" rtlCol="0" anchor="ctr"/>
-          <a:lstStyle/>
-          <a:p>
-            <a:pPr marL="0" indent="0">
-              <a:buNone/>
-            </a:pPr>
-            <a:r>
-              <a:rPr lang="en-US" sz="2300" b="1" dirty="0">
-                <a:solidFill>
-                  <a:srgbClr val="1F4E79"/>
-                </a:solidFill>
-                <a:latin typeface="Times New Roman" pitchFamily="34" charset="0"/>
-                <a:ea typeface="Times New Roman" pitchFamily="34" charset="-122"/>
-                <a:cs typeface="Times New Roman" pitchFamily="34" charset="-120"/>
-              </a:rPr>
-              <a:t>8. Bias Mitigation - Three Intervention Points</a:t>
-            </a:r>
-            <a:endParaRPr lang="en-US" sz="2300" dirty="0"/>
-          </a:p>
-        </p:txBody>
-      </p:sp>
-      <p:sp>
-        <p:nvSpPr>
-          <p:cNvPr id="7" name="Text 5"/>
-          <p:cNvSpPr/>
-          <p:nvPr/>
-        </p:nvSpPr>
-        <p:spPr>
-          <a:xfrm>
-            <a:off x="594360" y="1417320"/>
-            <a:ext cx="10972800" cy="548640"/>
-          </a:xfrm>
-          <a:prstGeom prst="rect">
-            <a:avLst/>
-          </a:prstGeom>
-          <a:noFill/>
-          <a:ln/>
-        </p:spPr>
-        <p:txBody>
-          <a:bodyPr wrap="square" lIns="50800" tIns="50800" rIns="50800" bIns="50800" rtlCol="0" anchor="t"/>
-          <a:lstStyle/>
-          <a:p>
-            <a:pPr marL="0" indent="0">
-              <a:buNone/>
-            </a:pPr>
-            <a:r>
-              <a:rPr lang="en-US" sz="1800" dirty="0">
-                <a:solidFill>
-                  <a:srgbClr val="191919"/>
-                </a:solidFill>
-                <a:latin typeface="Times New Roman" pitchFamily="34" charset="0"/>
-                <a:ea typeface="Times New Roman" pitchFamily="34" charset="-122"/>
-                <a:cs typeface="Times New Roman" pitchFamily="34" charset="-120"/>
-              </a:rPr>
-              <a:t>Bias-mitigation techniques intervene at one of three stages of the ML pipeline:</a:t>
-            </a:r>
-            <a:endParaRPr lang="en-US" sz="1800" dirty="0"/>
-          </a:p>
-        </p:txBody>
-      </p:sp>
-      <p:graphicFrame>
-        <p:nvGraphicFramePr>
-          <p:cNvPr id="12" name="Table 0"/>
-          <p:cNvGraphicFramePr>
-            <a:graphicFrameLocks noGrp="1"/>
-          </p:cNvGraphicFramePr>
-          <p:nvPr>
-            <p:extLst>
-              <p:ext uri="{D42A27DB-BD31-4B8C-83A1-F6EECF244321}">
-                <p14:modId xmlns:p14="http://schemas.microsoft.com/office/powerpoint/2010/main" val="1579011935"/>
-              </p:ext>
-            </p:extLst>
-          </p:nvPr>
-        </p:nvGraphicFramePr>
-        <p:xfrm>
-          <a:off x="502920" y="2103120"/>
-          <a:ext cx="11155680" cy="3566160"/>
-        </p:xfrm>
-        <a:graphic>
-          <a:graphicData uri="http://schemas.openxmlformats.org/drawingml/2006/table">
-            <a:tbl>
-              <a:tblPr/>
-              <a:tblGrid>
-                <a:gridCol w="2377440">
-                  <a:extLst>
-                    <a:ext uri="{9D8B030D-6E8A-4147-A177-3AD203B41FA5}">
-                      <a16:colId xmlns:a16="http://schemas.microsoft.com/office/drawing/2014/main" val="20000"/>
-                    </a:ext>
-                  </a:extLst>
-                </a:gridCol>
-                <a:gridCol w="3931920">
-                  <a:extLst>
-                    <a:ext uri="{9D8B030D-6E8A-4147-A177-3AD203B41FA5}">
-                      <a16:colId xmlns:a16="http://schemas.microsoft.com/office/drawing/2014/main" val="20001"/>
-                    </a:ext>
-                  </a:extLst>
-                </a:gridCol>
-                <a:gridCol w="4846320">
-                  <a:extLst>
-                    <a:ext uri="{9D8B030D-6E8A-4147-A177-3AD203B41FA5}">
-                      <a16:colId xmlns:a16="http://schemas.microsoft.com/office/drawing/2014/main" val="20002"/>
-                    </a:ext>
-                  </a:extLst>
-                </a:gridCol>
-              </a:tblGrid>
-              <a:tr h="891540">
-                <a:tc>
-                  <a:txBody>
-                    <a:bodyPr/>
-                    <a:lstStyle/>
-                    <a:p>
-                      <a:pPr marL="0" indent="0" algn="ctr">
-                        <a:buNone/>
-                      </a:pPr>
-                      <a:r>
-                        <a:rPr lang="en-US" sz="1800" b="1" dirty="0">
-                          <a:solidFill>
-                            <a:srgbClr val="FFFFFF"/>
-                          </a:solidFill>
-                          <a:latin typeface="Times New Roman" pitchFamily="34" charset="0"/>
-                          <a:ea typeface="Times New Roman" pitchFamily="34" charset="-122"/>
-                          <a:cs typeface="Times New Roman" pitchFamily="34" charset="-120"/>
-                        </a:rPr>
-                        <a:t>Stage</a:t>
-                      </a:r>
-                      <a:endParaRPr lang="en-US" sz="1800" dirty="0">
-                        <a:latin typeface="Times New Roman" charset="0"/>
-                        <a:ea typeface="Times New Roman" charset="0"/>
-                        <a:cs typeface="Times New Roman" charset="0"/>
-                      </a:endParaRPr>
-                    </a:p>
-                  </a:txBody>
-                  <a:tcPr anchor="ctr">
-                    <a:lnL w="25400" cap="flat" cmpd="sng" algn="ctr">
-                      <a:solidFill>
-                        <a:srgbClr val="FFFFFF"/>
-                      </a:solidFill>
-                      <a:prstDash val="solid"/>
-                      <a:round/>
-                      <a:headEnd type="none" w="med" len="med"/>
-                      <a:tailEnd type="none" w="med" len="med"/>
-                    </a:lnL>
-                    <a:lnR w="25400" cap="flat" cmpd="sng" algn="ctr">
-                      <a:solidFill>
-                        <a:srgbClr val="FFFFFF"/>
-                      </a:solidFill>
-                      <a:prstDash val="solid"/>
-                      <a:round/>
-                      <a:headEnd type="none" w="med" len="med"/>
-                      <a:tailEnd type="none" w="med" len="med"/>
-                    </a:lnR>
-                    <a:lnT w="25400" cap="flat" cmpd="sng" algn="ctr">
-                      <a:solidFill>
-                        <a:srgbClr val="FFFFFF"/>
-                      </a:solidFill>
-                      <a:prstDash val="solid"/>
-                      <a:round/>
-                      <a:headEnd type="none" w="med" len="med"/>
-                      <a:tailEnd type="none" w="med" len="med"/>
-                    </a:lnT>
-                    <a:lnB w="25400" cap="flat" cmpd="sng" algn="ctr">
-                      <a:solidFill>
-                        <a:srgbClr val="FFFFFF"/>
-                      </a:solidFill>
-                      <a:prstDash val="solid"/>
-                      <a:round/>
-                      <a:headEnd type="none" w="med" len="med"/>
-                      <a:tailEnd type="none" w="med" len="med"/>
-                    </a:lnB>
-                    <a:solidFill>
-                      <a:srgbClr val="1F4E79"/>
-                    </a:solidFill>
-                  </a:tcPr>
-                </a:tc>
-                <a:tc>
-                  <a:txBody>
-                    <a:bodyPr/>
-                    <a:lstStyle/>
-                    <a:p>
-                      <a:pPr marL="0" indent="0" algn="ctr">
-                        <a:buNone/>
-                      </a:pPr>
-                      <a:r>
-                        <a:rPr lang="en-US" sz="1800" b="1" dirty="0">
-                          <a:solidFill>
-                            <a:srgbClr val="FFFFFF"/>
-                          </a:solidFill>
-                          <a:latin typeface="Times New Roman" pitchFamily="34" charset="0"/>
-                          <a:ea typeface="Times New Roman" pitchFamily="34" charset="-122"/>
-                          <a:cs typeface="Times New Roman" pitchFamily="34" charset="-120"/>
-                        </a:rPr>
-                        <a:t>When It Intervenes</a:t>
-                      </a:r>
-                      <a:endParaRPr lang="en-US" sz="1800" dirty="0">
-                        <a:latin typeface="Times New Roman" charset="0"/>
-                        <a:ea typeface="Times New Roman" charset="0"/>
-                        <a:cs typeface="Times New Roman" charset="0"/>
-                      </a:endParaRPr>
-                    </a:p>
-                  </a:txBody>
-                  <a:tcPr anchor="ctr">
-                    <a:lnL w="25400" cap="flat" cmpd="sng" algn="ctr">
-                      <a:solidFill>
-                        <a:srgbClr val="FFFFFF"/>
-                      </a:solidFill>
-                      <a:prstDash val="solid"/>
-                      <a:round/>
-                      <a:headEnd type="none" w="med" len="med"/>
-                      <a:tailEnd type="none" w="med" len="med"/>
-                    </a:lnL>
-                    <a:lnR w="25400" cap="flat" cmpd="sng" algn="ctr">
-                      <a:solidFill>
-                        <a:srgbClr val="FFFFFF"/>
-                      </a:solidFill>
-                      <a:prstDash val="solid"/>
-                      <a:round/>
-                      <a:headEnd type="none" w="med" len="med"/>
-                      <a:tailEnd type="none" w="med" len="med"/>
-                    </a:lnR>
-                    <a:lnT w="25400" cap="flat" cmpd="sng" algn="ctr">
-                      <a:solidFill>
-                        <a:srgbClr val="FFFFFF"/>
-                      </a:solidFill>
-                      <a:prstDash val="solid"/>
-                      <a:round/>
-                      <a:headEnd type="none" w="med" len="med"/>
-                      <a:tailEnd type="none" w="med" len="med"/>
-                    </a:lnT>
-                    <a:lnB w="25400" cap="flat" cmpd="sng" algn="ctr">
-                      <a:solidFill>
-                        <a:srgbClr val="FFFFFF"/>
-                      </a:solidFill>
-                      <a:prstDash val="solid"/>
-                      <a:round/>
-                      <a:headEnd type="none" w="med" len="med"/>
-                      <a:tailEnd type="none" w="med" len="med"/>
-                    </a:lnB>
-                    <a:solidFill>
-                      <a:srgbClr val="1F4E79"/>
-                    </a:solidFill>
-                  </a:tcPr>
-                </a:tc>
-                <a:tc>
-                  <a:txBody>
-                    <a:bodyPr/>
-                    <a:lstStyle/>
-                    <a:p>
-                      <a:pPr marL="0" indent="0" algn="ctr">
-                        <a:buNone/>
-                      </a:pPr>
-                      <a:r>
-                        <a:rPr lang="en-US" sz="1800" b="1" dirty="0">
-                          <a:solidFill>
-                            <a:srgbClr val="FFFFFF"/>
-                          </a:solidFill>
-                          <a:latin typeface="Times New Roman" pitchFamily="34" charset="0"/>
-                          <a:ea typeface="Times New Roman" pitchFamily="34" charset="-122"/>
-                          <a:cs typeface="Times New Roman" pitchFamily="34" charset="-120"/>
-                        </a:rPr>
-                        <a:t>Example Technique</a:t>
-                      </a:r>
-                      <a:endParaRPr lang="en-US" sz="1800" dirty="0">
-                        <a:latin typeface="Times New Roman" charset="0"/>
-                        <a:ea typeface="Times New Roman" charset="0"/>
-                        <a:cs typeface="Times New Roman" charset="0"/>
-                      </a:endParaRPr>
-                    </a:p>
-                  </a:txBody>
-                  <a:tcPr anchor="ctr">
-                    <a:lnL w="25400" cap="flat" cmpd="sng" algn="ctr">
-                      <a:solidFill>
-                        <a:srgbClr val="FFFFFF"/>
-                      </a:solidFill>
-                      <a:prstDash val="solid"/>
-                      <a:round/>
-                      <a:headEnd type="none" w="med" len="med"/>
-                      <a:tailEnd type="none" w="med" len="med"/>
-                    </a:lnL>
-                    <a:lnR w="25400" cap="flat" cmpd="sng" algn="ctr">
-                      <a:solidFill>
-                        <a:srgbClr val="FFFFFF"/>
-                      </a:solidFill>
-                      <a:prstDash val="solid"/>
-                      <a:round/>
-                      <a:headEnd type="none" w="med" len="med"/>
-                      <a:tailEnd type="none" w="med" len="med"/>
-                    </a:lnR>
-                    <a:lnT w="25400" cap="flat" cmpd="sng" algn="ctr">
-                      <a:solidFill>
-                        <a:srgbClr val="FFFFFF"/>
-                      </a:solidFill>
-                      <a:prstDash val="solid"/>
-                      <a:round/>
-                      <a:headEnd type="none" w="med" len="med"/>
-                      <a:tailEnd type="none" w="med" len="med"/>
-                    </a:lnT>
-                    <a:lnB w="25400" cap="flat" cmpd="sng" algn="ctr">
-                      <a:solidFill>
-                        <a:srgbClr val="FFFFFF"/>
-                      </a:solidFill>
-                      <a:prstDash val="solid"/>
-                      <a:round/>
-                      <a:headEnd type="none" w="med" len="med"/>
-                      <a:tailEnd type="none" w="med" len="med"/>
-                    </a:lnB>
-                    <a:solidFill>
-                      <a:srgbClr val="1F4E79"/>
-                    </a:solidFill>
-                  </a:tcPr>
-                </a:tc>
-                <a:extLst>
-                  <a:ext uri="{0D108BD9-81ED-4DB2-BD59-A6C34878D82A}">
-                    <a16:rowId xmlns:a16="http://schemas.microsoft.com/office/drawing/2014/main" val="10000"/>
-                  </a:ext>
-                </a:extLst>
-              </a:tr>
-              <a:tr h="891540">
-                <a:tc>
-                  <a:txBody>
-                    <a:bodyPr/>
-                    <a:lstStyle/>
-                    <a:p>
-                      <a:pPr marL="0" indent="0" algn="ctr">
-                        <a:buNone/>
-                      </a:pPr>
-                      <a:r>
-                        <a:rPr lang="en-US" sz="1800" b="1" dirty="0">
-                          <a:solidFill>
-                            <a:srgbClr val="FFFFFF"/>
-                          </a:solidFill>
-                          <a:latin typeface="Times New Roman" pitchFamily="34" charset="0"/>
-                          <a:ea typeface="Times New Roman" pitchFamily="34" charset="-122"/>
-                          <a:cs typeface="Times New Roman" pitchFamily="34" charset="-120"/>
-                        </a:rPr>
-                        <a:t>Pre-processing</a:t>
-                      </a:r>
-                      <a:endParaRPr lang="en-US" sz="1800" dirty="0">
-                        <a:latin typeface="Times New Roman" charset="0"/>
-                        <a:ea typeface="Times New Roman" charset="0"/>
-                        <a:cs typeface="Times New Roman" charset="0"/>
-                      </a:endParaRPr>
-                    </a:p>
-                  </a:txBody>
-                  <a:tcPr anchor="ctr">
-                    <a:lnL w="25400" cap="flat" cmpd="sng" algn="ctr">
-                      <a:solidFill>
-                        <a:srgbClr val="FFFFFF"/>
-                      </a:solidFill>
-                      <a:prstDash val="solid"/>
-                      <a:round/>
-                      <a:headEnd type="none" w="med" len="med"/>
-                      <a:tailEnd type="none" w="med" len="med"/>
-                    </a:lnL>
-                    <a:lnR w="25400" cap="flat" cmpd="sng" algn="ctr">
-                      <a:solidFill>
-                        <a:srgbClr val="FFFFFF"/>
-                      </a:solidFill>
-                      <a:prstDash val="solid"/>
-                      <a:round/>
-                      <a:headEnd type="none" w="med" len="med"/>
-                      <a:tailEnd type="none" w="med" len="med"/>
-                    </a:lnR>
-                    <a:lnT w="25400" cap="flat" cmpd="sng" algn="ctr">
-                      <a:solidFill>
-                        <a:srgbClr val="FFFFFF"/>
-                      </a:solidFill>
-                      <a:prstDash val="solid"/>
-                      <a:round/>
-                      <a:headEnd type="none" w="med" len="med"/>
-                      <a:tailEnd type="none" w="med" len="med"/>
-                    </a:lnT>
-                    <a:lnB w="25400" cap="flat" cmpd="sng" algn="ctr">
-                      <a:solidFill>
-                        <a:srgbClr val="FFFFFF"/>
-                      </a:solidFill>
-                      <a:prstDash val="solid"/>
-                      <a:round/>
-                      <a:headEnd type="none" w="med" len="med"/>
-                      <a:tailEnd type="none" w="med" len="med"/>
-                    </a:lnB>
-                    <a:solidFill>
-                      <a:srgbClr val="1F4E79"/>
-                    </a:solidFill>
-                  </a:tcPr>
-                </a:tc>
-                <a:tc>
-                  <a:txBody>
-                    <a:bodyPr/>
-                    <a:lstStyle/>
-                    <a:p>
-                      <a:pPr marL="0" indent="0" algn="ctr">
-                        <a:buNone/>
-                      </a:pPr>
-                      <a:r>
-                        <a:rPr lang="en-US" sz="1800" dirty="0">
-                          <a:solidFill>
-                            <a:srgbClr val="191919"/>
-                          </a:solidFill>
-                          <a:latin typeface="Times New Roman" pitchFamily="34" charset="0"/>
-                          <a:ea typeface="Times New Roman" pitchFamily="34" charset="-122"/>
-                          <a:cs typeface="Times New Roman" pitchFamily="34" charset="-120"/>
-                        </a:rPr>
-                        <a:t>Before training, on the data</a:t>
-                      </a:r>
-                      <a:endParaRPr lang="en-US" sz="1800" dirty="0">
-                        <a:latin typeface="Times New Roman" charset="0"/>
-                        <a:ea typeface="Times New Roman" charset="0"/>
-                        <a:cs typeface="Times New Roman" charset="0"/>
-                      </a:endParaRPr>
-                    </a:p>
-                  </a:txBody>
-                  <a:tcPr anchor="ctr">
-                    <a:lnL w="25400" cap="flat" cmpd="sng" algn="ctr">
-                      <a:solidFill>
-                        <a:srgbClr val="FFFFFF"/>
-                      </a:solidFill>
-                      <a:prstDash val="solid"/>
-                      <a:round/>
-                      <a:headEnd type="none" w="med" len="med"/>
-                      <a:tailEnd type="none" w="med" len="med"/>
-                    </a:lnL>
-                    <a:lnR w="25400" cap="flat" cmpd="sng" algn="ctr">
-                      <a:solidFill>
-                        <a:srgbClr val="FFFFFF"/>
-                      </a:solidFill>
-                      <a:prstDash val="solid"/>
-                      <a:round/>
-                      <a:headEnd type="none" w="med" len="med"/>
-                      <a:tailEnd type="none" w="med" len="med"/>
-                    </a:lnR>
-                    <a:lnT w="25400" cap="flat" cmpd="sng" algn="ctr">
-                      <a:solidFill>
-                        <a:srgbClr val="FFFFFF"/>
-                      </a:solidFill>
-                      <a:prstDash val="solid"/>
-                      <a:round/>
-                      <a:headEnd type="none" w="med" len="med"/>
-                      <a:tailEnd type="none" w="med" len="med"/>
-                    </a:lnT>
-                    <a:lnB w="25400" cap="flat" cmpd="sng" algn="ctr">
-                      <a:solidFill>
-                        <a:srgbClr val="FFFFFF"/>
-                      </a:solidFill>
-                      <a:prstDash val="solid"/>
-                      <a:round/>
-                      <a:headEnd type="none" w="med" len="med"/>
-                      <a:tailEnd type="none" w="med" len="med"/>
-                    </a:lnB>
-                    <a:solidFill>
-                      <a:srgbClr val="EEF5FF"/>
-                    </a:solidFill>
-                  </a:tcPr>
-                </a:tc>
-                <a:tc>
-                  <a:txBody>
-                    <a:bodyPr/>
-                    <a:lstStyle/>
-                    <a:p>
-                      <a:pPr marL="0" indent="0" algn="ctr">
-                        <a:buNone/>
-                      </a:pPr>
-                      <a:r>
-                        <a:rPr lang="en-US" sz="1800" dirty="0">
-                          <a:solidFill>
-                            <a:srgbClr val="191919"/>
-                          </a:solidFill>
-                          <a:latin typeface="Times New Roman" pitchFamily="34" charset="0"/>
-                          <a:ea typeface="Times New Roman" pitchFamily="34" charset="-122"/>
-                          <a:cs typeface="Times New Roman" pitchFamily="34" charset="-120"/>
-                        </a:rPr>
-                        <a:t>Reweighing, resampling</a:t>
-                      </a:r>
-                      <a:endParaRPr lang="en-US" sz="1800" dirty="0">
-                        <a:latin typeface="Times New Roman" charset="0"/>
-                        <a:ea typeface="Times New Roman" charset="0"/>
-                        <a:cs typeface="Times New Roman" charset="0"/>
-                      </a:endParaRPr>
-                    </a:p>
-                  </a:txBody>
-                  <a:tcPr anchor="ctr">
-                    <a:lnL w="25400" cap="flat" cmpd="sng" algn="ctr">
-                      <a:solidFill>
-                        <a:srgbClr val="FFFFFF"/>
-                      </a:solidFill>
-                      <a:prstDash val="solid"/>
-                      <a:round/>
-                      <a:headEnd type="none" w="med" len="med"/>
-                      <a:tailEnd type="none" w="med" len="med"/>
-                    </a:lnL>
-                    <a:lnR w="25400" cap="flat" cmpd="sng" algn="ctr">
-                      <a:solidFill>
-                        <a:srgbClr val="FFFFFF"/>
-                      </a:solidFill>
-                      <a:prstDash val="solid"/>
-                      <a:round/>
-                      <a:headEnd type="none" w="med" len="med"/>
-                      <a:tailEnd type="none" w="med" len="med"/>
-                    </a:lnR>
-                    <a:lnT w="25400" cap="flat" cmpd="sng" algn="ctr">
-                      <a:solidFill>
-                        <a:srgbClr val="FFFFFF"/>
-                      </a:solidFill>
-                      <a:prstDash val="solid"/>
-                      <a:round/>
-                      <a:headEnd type="none" w="med" len="med"/>
-                      <a:tailEnd type="none" w="med" len="med"/>
-                    </a:lnT>
-                    <a:lnB w="25400" cap="flat" cmpd="sng" algn="ctr">
-                      <a:solidFill>
-                        <a:srgbClr val="FFFFFF"/>
-                      </a:solidFill>
-                      <a:prstDash val="solid"/>
-                      <a:round/>
-                      <a:headEnd type="none" w="med" len="med"/>
-                      <a:tailEnd type="none" w="med" len="med"/>
-                    </a:lnB>
-                    <a:solidFill>
-                      <a:srgbClr val="EEF5FF"/>
-                    </a:solidFill>
-                  </a:tcPr>
-                </a:tc>
-                <a:extLst>
-                  <a:ext uri="{0D108BD9-81ED-4DB2-BD59-A6C34878D82A}">
-                    <a16:rowId xmlns:a16="http://schemas.microsoft.com/office/drawing/2014/main" val="10001"/>
-                  </a:ext>
-                </a:extLst>
-              </a:tr>
-              <a:tr h="891540">
-                <a:tc>
-                  <a:txBody>
-                    <a:bodyPr/>
-                    <a:lstStyle/>
-                    <a:p>
-                      <a:pPr marL="0" indent="0" algn="ctr">
-                        <a:buNone/>
-                      </a:pPr>
-                      <a:r>
-                        <a:rPr lang="en-US" sz="1800" b="1" dirty="0">
-                          <a:solidFill>
-                            <a:srgbClr val="FFFFFF"/>
-                          </a:solidFill>
-                          <a:latin typeface="Times New Roman" pitchFamily="34" charset="0"/>
-                          <a:ea typeface="Times New Roman" pitchFamily="34" charset="-122"/>
-                          <a:cs typeface="Times New Roman" pitchFamily="34" charset="-120"/>
-                        </a:rPr>
-                        <a:t>In-processing</a:t>
-                      </a:r>
-                      <a:endParaRPr lang="en-US" sz="1800" dirty="0">
-                        <a:latin typeface="Times New Roman" charset="0"/>
-                        <a:ea typeface="Times New Roman" charset="0"/>
-                        <a:cs typeface="Times New Roman" charset="0"/>
-                      </a:endParaRPr>
-                    </a:p>
-                  </a:txBody>
-                  <a:tcPr anchor="ctr">
-                    <a:lnL w="25400" cap="flat" cmpd="sng" algn="ctr">
-                      <a:solidFill>
-                        <a:srgbClr val="FFFFFF"/>
-                      </a:solidFill>
-                      <a:prstDash val="solid"/>
-                      <a:round/>
-                      <a:headEnd type="none" w="med" len="med"/>
-                      <a:tailEnd type="none" w="med" len="med"/>
-                    </a:lnL>
-                    <a:lnR w="25400" cap="flat" cmpd="sng" algn="ctr">
-                      <a:solidFill>
-                        <a:srgbClr val="FFFFFF"/>
-                      </a:solidFill>
-                      <a:prstDash val="solid"/>
-                      <a:round/>
-                      <a:headEnd type="none" w="med" len="med"/>
-                      <a:tailEnd type="none" w="med" len="med"/>
-                    </a:lnR>
-                    <a:lnT w="25400" cap="flat" cmpd="sng" algn="ctr">
-                      <a:solidFill>
-                        <a:srgbClr val="FFFFFF"/>
-                      </a:solidFill>
-                      <a:prstDash val="solid"/>
-                      <a:round/>
-                      <a:headEnd type="none" w="med" len="med"/>
-                      <a:tailEnd type="none" w="med" len="med"/>
-                    </a:lnT>
-                    <a:lnB w="25400" cap="flat" cmpd="sng" algn="ctr">
-                      <a:solidFill>
-                        <a:srgbClr val="FFFFFF"/>
-                      </a:solidFill>
-                      <a:prstDash val="solid"/>
-                      <a:round/>
-                      <a:headEnd type="none" w="med" len="med"/>
-                      <a:tailEnd type="none" w="med" len="med"/>
-                    </a:lnB>
-                    <a:solidFill>
-                      <a:srgbClr val="1F4E79"/>
-                    </a:solidFill>
-                  </a:tcPr>
-                </a:tc>
-                <a:tc>
-                  <a:txBody>
-                    <a:bodyPr/>
-                    <a:lstStyle/>
-                    <a:p>
-                      <a:pPr marL="0" indent="0" algn="ctr">
-                        <a:buNone/>
-                      </a:pPr>
-                      <a:r>
-                        <a:rPr lang="en-US" sz="1800" dirty="0">
-                          <a:solidFill>
-                            <a:srgbClr val="191919"/>
-                          </a:solidFill>
-                          <a:latin typeface="Times New Roman" pitchFamily="34" charset="0"/>
-                          <a:ea typeface="Times New Roman" pitchFamily="34" charset="-122"/>
-                          <a:cs typeface="Times New Roman" pitchFamily="34" charset="-120"/>
-                        </a:rPr>
-                        <a:t>During training, in the objective</a:t>
-                      </a:r>
-                      <a:endParaRPr lang="en-US" sz="1800" dirty="0">
-                        <a:latin typeface="Times New Roman" charset="0"/>
-                        <a:ea typeface="Times New Roman" charset="0"/>
-                        <a:cs typeface="Times New Roman" charset="0"/>
-                      </a:endParaRPr>
-                    </a:p>
-                  </a:txBody>
-                  <a:tcPr anchor="ctr">
-                    <a:lnL w="25400" cap="flat" cmpd="sng" algn="ctr">
-                      <a:solidFill>
-                        <a:srgbClr val="FFFFFF"/>
-                      </a:solidFill>
-                      <a:prstDash val="solid"/>
-                      <a:round/>
-                      <a:headEnd type="none" w="med" len="med"/>
-                      <a:tailEnd type="none" w="med" len="med"/>
-                    </a:lnL>
-                    <a:lnR w="25400" cap="flat" cmpd="sng" algn="ctr">
-                      <a:solidFill>
-                        <a:srgbClr val="FFFFFF"/>
-                      </a:solidFill>
-                      <a:prstDash val="solid"/>
-                      <a:round/>
-                      <a:headEnd type="none" w="med" len="med"/>
-                      <a:tailEnd type="none" w="med" len="med"/>
-                    </a:lnR>
-                    <a:lnT w="25400" cap="flat" cmpd="sng" algn="ctr">
-                      <a:solidFill>
-                        <a:srgbClr val="FFFFFF"/>
-                      </a:solidFill>
-                      <a:prstDash val="solid"/>
-                      <a:round/>
-                      <a:headEnd type="none" w="med" len="med"/>
-                      <a:tailEnd type="none" w="med" len="med"/>
-                    </a:lnT>
-                    <a:lnB w="25400" cap="flat" cmpd="sng" algn="ctr">
-                      <a:solidFill>
-                        <a:srgbClr val="FFFFFF"/>
-                      </a:solidFill>
-                      <a:prstDash val="solid"/>
-                      <a:round/>
-                      <a:headEnd type="none" w="med" len="med"/>
-                      <a:tailEnd type="none" w="med" len="med"/>
-                    </a:lnB>
-                    <a:solidFill>
-                      <a:srgbClr val="F3F8FF"/>
-                    </a:solidFill>
-                  </a:tcPr>
-                </a:tc>
-                <a:tc>
-                  <a:txBody>
-                    <a:bodyPr/>
-                    <a:lstStyle/>
-                    <a:p>
-                      <a:pPr marL="0" indent="0" algn="ctr">
-                        <a:buNone/>
-                      </a:pPr>
-                      <a:r>
-                        <a:rPr lang="en-US" sz="1800" dirty="0">
-                          <a:solidFill>
-                            <a:srgbClr val="191919"/>
-                          </a:solidFill>
-                          <a:latin typeface="Times New Roman" pitchFamily="34" charset="0"/>
-                          <a:ea typeface="Times New Roman" pitchFamily="34" charset="-122"/>
-                          <a:cs typeface="Times New Roman" pitchFamily="34" charset="-120"/>
-                        </a:rPr>
-                        <a:t>Constrained optimisation, adversarial debiasing</a:t>
-                      </a:r>
-                      <a:endParaRPr lang="en-US" sz="1800" dirty="0">
-                        <a:latin typeface="Times New Roman" charset="0"/>
-                        <a:ea typeface="Times New Roman" charset="0"/>
-                        <a:cs typeface="Times New Roman" charset="0"/>
-                      </a:endParaRPr>
-                    </a:p>
-                  </a:txBody>
-                  <a:tcPr anchor="ctr">
-                    <a:lnL w="25400" cap="flat" cmpd="sng" algn="ctr">
-                      <a:solidFill>
-                        <a:srgbClr val="FFFFFF"/>
-                      </a:solidFill>
-                      <a:prstDash val="solid"/>
-                      <a:round/>
-                      <a:headEnd type="none" w="med" len="med"/>
-                      <a:tailEnd type="none" w="med" len="med"/>
-                    </a:lnL>
-                    <a:lnR w="25400" cap="flat" cmpd="sng" algn="ctr">
-                      <a:solidFill>
-                        <a:srgbClr val="FFFFFF"/>
-                      </a:solidFill>
-                      <a:prstDash val="solid"/>
-                      <a:round/>
-                      <a:headEnd type="none" w="med" len="med"/>
-                      <a:tailEnd type="none" w="med" len="med"/>
-                    </a:lnR>
-                    <a:lnT w="25400" cap="flat" cmpd="sng" algn="ctr">
-                      <a:solidFill>
-                        <a:srgbClr val="FFFFFF"/>
-                      </a:solidFill>
-                      <a:prstDash val="solid"/>
-                      <a:round/>
-                      <a:headEnd type="none" w="med" len="med"/>
-                      <a:tailEnd type="none" w="med" len="med"/>
-                    </a:lnT>
-                    <a:lnB w="25400" cap="flat" cmpd="sng" algn="ctr">
-                      <a:solidFill>
-                        <a:srgbClr val="FFFFFF"/>
-                      </a:solidFill>
-                      <a:prstDash val="solid"/>
-                      <a:round/>
-                      <a:headEnd type="none" w="med" len="med"/>
-                      <a:tailEnd type="none" w="med" len="med"/>
-                    </a:lnB>
-                    <a:solidFill>
-                      <a:srgbClr val="F3F8FF"/>
-                    </a:solidFill>
-                  </a:tcPr>
-                </a:tc>
-                <a:extLst>
-                  <a:ext uri="{0D108BD9-81ED-4DB2-BD59-A6C34878D82A}">
-                    <a16:rowId xmlns:a16="http://schemas.microsoft.com/office/drawing/2014/main" val="10002"/>
-                  </a:ext>
-                </a:extLst>
-              </a:tr>
-              <a:tr h="891540">
-                <a:tc>
-                  <a:txBody>
-                    <a:bodyPr/>
-                    <a:lstStyle/>
-                    <a:p>
-                      <a:pPr marL="0" indent="0" algn="ctr">
-                        <a:buNone/>
-                      </a:pPr>
-                      <a:r>
-                        <a:rPr lang="en-US" sz="1800" b="1" dirty="0">
-                          <a:solidFill>
-                            <a:srgbClr val="FFFFFF"/>
-                          </a:solidFill>
-                          <a:latin typeface="Times New Roman" pitchFamily="34" charset="0"/>
-                          <a:ea typeface="Times New Roman" pitchFamily="34" charset="-122"/>
-                          <a:cs typeface="Times New Roman" pitchFamily="34" charset="-120"/>
-                        </a:rPr>
-                        <a:t>Post-processing</a:t>
-                      </a:r>
-                      <a:endParaRPr lang="en-US" sz="1800" dirty="0">
-                        <a:latin typeface="Times New Roman" charset="0"/>
-                        <a:ea typeface="Times New Roman" charset="0"/>
-                        <a:cs typeface="Times New Roman" charset="0"/>
-                      </a:endParaRPr>
-                    </a:p>
-                  </a:txBody>
-                  <a:tcPr anchor="ctr">
-                    <a:lnL w="25400" cap="flat" cmpd="sng" algn="ctr">
-                      <a:solidFill>
-                        <a:srgbClr val="FFFFFF"/>
-                      </a:solidFill>
-                      <a:prstDash val="solid"/>
-                      <a:round/>
-                      <a:headEnd type="none" w="med" len="med"/>
-                      <a:tailEnd type="none" w="med" len="med"/>
-                    </a:lnL>
-                    <a:lnR w="25400" cap="flat" cmpd="sng" algn="ctr">
-                      <a:solidFill>
-                        <a:srgbClr val="FFFFFF"/>
-                      </a:solidFill>
-                      <a:prstDash val="solid"/>
-                      <a:round/>
-                      <a:headEnd type="none" w="med" len="med"/>
-                      <a:tailEnd type="none" w="med" len="med"/>
-                    </a:lnR>
-                    <a:lnT w="25400" cap="flat" cmpd="sng" algn="ctr">
-                      <a:solidFill>
-                        <a:srgbClr val="FFFFFF"/>
-                      </a:solidFill>
-                      <a:prstDash val="solid"/>
-                      <a:round/>
-                      <a:headEnd type="none" w="med" len="med"/>
-                      <a:tailEnd type="none" w="med" len="med"/>
-                    </a:lnT>
-                    <a:lnB w="25400" cap="flat" cmpd="sng" algn="ctr">
-                      <a:solidFill>
-                        <a:srgbClr val="FFFFFF"/>
-                      </a:solidFill>
-                      <a:prstDash val="solid"/>
-                      <a:round/>
-                      <a:headEnd type="none" w="med" len="med"/>
-                      <a:tailEnd type="none" w="med" len="med"/>
-                    </a:lnB>
-                    <a:solidFill>
-                      <a:srgbClr val="1F4E79"/>
-                    </a:solidFill>
-                  </a:tcPr>
-                </a:tc>
-                <a:tc>
-                  <a:txBody>
-                    <a:bodyPr/>
-                    <a:lstStyle/>
-                    <a:p>
-                      <a:pPr marL="0" indent="0" algn="ctr">
-                        <a:buNone/>
-                      </a:pPr>
-                      <a:r>
-                        <a:rPr lang="en-US" sz="1800" dirty="0">
-                          <a:solidFill>
-                            <a:srgbClr val="191919"/>
-                          </a:solidFill>
-                          <a:latin typeface="Times New Roman" pitchFamily="34" charset="0"/>
-                          <a:ea typeface="Times New Roman" pitchFamily="34" charset="-122"/>
-                          <a:cs typeface="Times New Roman" pitchFamily="34" charset="-120"/>
-                        </a:rPr>
-                        <a:t>After training, on the outputs</a:t>
-                      </a:r>
-                      <a:endParaRPr lang="en-US" sz="1800" dirty="0">
-                        <a:latin typeface="Times New Roman" charset="0"/>
-                        <a:ea typeface="Times New Roman" charset="0"/>
-                        <a:cs typeface="Times New Roman" charset="0"/>
-                      </a:endParaRPr>
-                    </a:p>
-                  </a:txBody>
-                  <a:tcPr anchor="ctr">
-                    <a:lnL w="25400" cap="flat" cmpd="sng" algn="ctr">
-                      <a:solidFill>
-                        <a:srgbClr val="FFFFFF"/>
-                      </a:solidFill>
-                      <a:prstDash val="solid"/>
-                      <a:round/>
-                      <a:headEnd type="none" w="med" len="med"/>
-                      <a:tailEnd type="none" w="med" len="med"/>
-                    </a:lnL>
-                    <a:lnR w="25400" cap="flat" cmpd="sng" algn="ctr">
-                      <a:solidFill>
-                        <a:srgbClr val="FFFFFF"/>
-                      </a:solidFill>
-                      <a:prstDash val="solid"/>
-                      <a:round/>
-                      <a:headEnd type="none" w="med" len="med"/>
-                      <a:tailEnd type="none" w="med" len="med"/>
-                    </a:lnR>
-                    <a:lnT w="25400" cap="flat" cmpd="sng" algn="ctr">
-                      <a:solidFill>
-                        <a:srgbClr val="FFFFFF"/>
-                      </a:solidFill>
-                      <a:prstDash val="solid"/>
-                      <a:round/>
-                      <a:headEnd type="none" w="med" len="med"/>
-                      <a:tailEnd type="none" w="med" len="med"/>
-                    </a:lnT>
-                    <a:lnB w="25400" cap="flat" cmpd="sng" algn="ctr">
-                      <a:solidFill>
-                        <a:srgbClr val="FFFFFF"/>
-                      </a:solidFill>
-                      <a:prstDash val="solid"/>
-                      <a:round/>
-                      <a:headEnd type="none" w="med" len="med"/>
-                      <a:tailEnd type="none" w="med" len="med"/>
-                    </a:lnB>
-                    <a:solidFill>
-                      <a:srgbClr val="EEF5FF"/>
-                    </a:solidFill>
-                  </a:tcPr>
-                </a:tc>
-                <a:tc>
-                  <a:txBody>
-                    <a:bodyPr/>
-                    <a:lstStyle/>
-                    <a:p>
-                      <a:pPr marL="0" indent="0" algn="ctr">
-                        <a:buNone/>
-                      </a:pPr>
-                      <a:r>
-                        <a:rPr lang="en-US" sz="1800" dirty="0">
-                          <a:solidFill>
-                            <a:srgbClr val="191919"/>
-                          </a:solidFill>
-                          <a:latin typeface="Times New Roman" pitchFamily="34" charset="0"/>
-                          <a:ea typeface="Times New Roman" pitchFamily="34" charset="-122"/>
-                          <a:cs typeface="Times New Roman" pitchFamily="34" charset="-120"/>
-                        </a:rPr>
-                        <a:t>Threshold adjustment, calibration</a:t>
-                      </a:r>
-                      <a:endParaRPr lang="en-US" sz="1800" dirty="0">
-                        <a:latin typeface="Times New Roman" charset="0"/>
-                        <a:ea typeface="Times New Roman" charset="0"/>
-                        <a:cs typeface="Times New Roman" charset="0"/>
-                      </a:endParaRPr>
-                    </a:p>
-                  </a:txBody>
-                  <a:tcPr anchor="ctr">
-                    <a:lnL w="25400" cap="flat" cmpd="sng" algn="ctr">
-                      <a:solidFill>
-                        <a:srgbClr val="FFFFFF"/>
-                      </a:solidFill>
-                      <a:prstDash val="solid"/>
-                      <a:round/>
-                      <a:headEnd type="none" w="med" len="med"/>
-                      <a:tailEnd type="none" w="med" len="med"/>
-                    </a:lnL>
-                    <a:lnR w="25400" cap="flat" cmpd="sng" algn="ctr">
-                      <a:solidFill>
-                        <a:srgbClr val="FFFFFF"/>
-                      </a:solidFill>
-                      <a:prstDash val="solid"/>
-                      <a:round/>
-                      <a:headEnd type="none" w="med" len="med"/>
-                      <a:tailEnd type="none" w="med" len="med"/>
-                    </a:lnR>
-                    <a:lnT w="25400" cap="flat" cmpd="sng" algn="ctr">
-                      <a:solidFill>
-                        <a:srgbClr val="FFFFFF"/>
-                      </a:solidFill>
-                      <a:prstDash val="solid"/>
-                      <a:round/>
-                      <a:headEnd type="none" w="med" len="med"/>
-                      <a:tailEnd type="none" w="med" len="med"/>
-                    </a:lnT>
-                    <a:lnB w="25400" cap="flat" cmpd="sng" algn="ctr">
-                      <a:solidFill>
-                        <a:srgbClr val="FFFFFF"/>
-                      </a:solidFill>
-                      <a:prstDash val="solid"/>
-                      <a:round/>
-                      <a:headEnd type="none" w="med" len="med"/>
-                      <a:tailEnd type="none" w="med" len="med"/>
-                    </a:lnB>
-                    <a:solidFill>
-                      <a:srgbClr val="EEF5FF"/>
-                    </a:solidFill>
-                  </a:tcPr>
-                </a:tc>
-                <a:extLst>
-                  <a:ext uri="{0D108BD9-81ED-4DB2-BD59-A6C34878D82A}">
-                    <a16:rowId xmlns:a16="http://schemas.microsoft.com/office/drawing/2014/main" val="10003"/>
-                  </a:ext>
-                </a:extLst>
-              </a:tr>
-            </a:tbl>
-          </a:graphicData>
-        </a:graphic>
-      </p:graphicFrame>
-      <p:sp>
-        <p:nvSpPr>
-          <p:cNvPr id="9" name="Text 6"/>
-          <p:cNvSpPr/>
-          <p:nvPr/>
-        </p:nvSpPr>
-        <p:spPr>
-          <a:xfrm>
-            <a:off x="502920" y="6382512"/>
-            <a:ext cx="10744200" cy="320040"/>
-          </a:xfrm>
-          <a:prstGeom prst="rect">
-            <a:avLst/>
-          </a:prstGeom>
-          <a:noFill/>
-          <a:ln/>
-        </p:spPr>
-        <p:txBody>
-          <a:bodyPr wrap="square" lIns="0" tIns="0" rIns="0" bIns="0" rtlCol="0" anchor="ctr"/>
-          <a:lstStyle/>
-          <a:p>
-            <a:pPr marL="0" indent="0">
-              <a:buNone/>
-            </a:pPr>
-            <a:r>
-              <a:rPr lang="en-US" sz="1200" i="1" dirty="0">
-                <a:solidFill>
-                  <a:srgbClr val="595959"/>
-                </a:solidFill>
-                <a:latin typeface="Times New Roman" pitchFamily="34" charset="0"/>
-                <a:ea typeface="Times New Roman" pitchFamily="34" charset="-122"/>
-                <a:cs typeface="Times New Roman" pitchFamily="34" charset="-120"/>
-              </a:rPr>
-              <a:t>Teaching cue: The next three slides take one row of this table at a time.</a:t>
-            </a:r>
-            <a:endParaRPr lang="en-US" sz="1200" dirty="0"/>
-          </a:p>
-        </p:txBody>
-      </p:sp>
-      <p:sp>
-        <p:nvSpPr>
-          <p:cNvPr id="10" name="Text 7"/>
-          <p:cNvSpPr/>
-          <p:nvPr/>
-        </p:nvSpPr>
-        <p:spPr>
-          <a:xfrm>
-            <a:off x="11430000" y="6446520"/>
-            <a:ext cx="365760" cy="182880"/>
-          </a:xfrm>
-          <a:prstGeom prst="rect">
-            <a:avLst/>
-          </a:prstGeom>
-          <a:noFill/>
-          <a:ln/>
-        </p:spPr>
-        <p:txBody>
-          <a:bodyPr wrap="square" lIns="0" tIns="0" rIns="0" bIns="0" rtlCol="0" anchor="ctr"/>
-          <a:lstStyle/>
-          <a:p>
-            <a:pPr marL="0" indent="0" algn="ctr">
-              <a:buNone/>
-            </a:pPr>
-            <a:r>
-              <a:rPr lang="en-US" sz="1200" dirty="0">
-                <a:solidFill>
-                  <a:srgbClr val="595959"/>
-                </a:solidFill>
-                <a:latin typeface="Times New Roman" pitchFamily="34" charset="0"/>
-                <a:ea typeface="Times New Roman" pitchFamily="34" charset="-122"/>
-                <a:cs typeface="Times New Roman" pitchFamily="34" charset="-120"/>
-              </a:rPr>
-              <a:t>11</a:t>
-            </a:r>
-            <a:endParaRPr lang="en-US" sz="1200" dirty="0"/>
-          </a:p>
-        </p:txBody>
-      </p:sp>
-    </p:spTree>
-  </p:cSld>
-  <p:clrMapOvr>
-    <a:masterClrMapping/>
-  </p:clrMapOvr>
-</p:sld>
-</file>
-
-<file path=ppt/slides/slide12.xml><?xml version="1.0" encoding="utf-8"?>
 <p:sld xmlns:a="http://schemas.openxmlformats.org/drawingml/2006/main" xmlns:r="http://schemas.openxmlformats.org/officeDocument/2006/relationships" xmlns:p="http://schemas.openxmlformats.org/presentationml/2006/main">
   <p:cSld name="Slide 12">
     <p:bg>
@@ -5107,45 +3030,6 @@
       </p:sp>
       <p:sp>
         <p:nvSpPr>
-          <p:cNvPr id="8" name="Text 6"/>
-          <p:cNvSpPr/>
-          <p:nvPr/>
-        </p:nvSpPr>
-        <p:spPr>
-          <a:xfrm>
-            <a:off x="502920" y="6382512"/>
-            <a:ext cx="10744200" cy="320040"/>
-          </a:xfrm>
-          <a:prstGeom prst="rect">
-            <a:avLst/>
-          </a:prstGeom>
-          <a:noFill/>
-          <a:ln/>
-        </p:spPr>
-        <p:txBody>
-          <a:bodyPr wrap="square" lIns="0" tIns="0" rIns="0" bIns="0" rtlCol="0" anchor="ctr"/>
-          <a:lstStyle/>
-          <a:p>
-            <a:pPr marL="0" indent="0">
-              <a:buNone/>
-            </a:pPr>
-            <a:r>
-              <a:rPr lang="en-US" sz="1200" i="1" dirty="0">
-                <a:solidFill>
-                  <a:srgbClr val="595959"/>
-                </a:solidFill>
-                <a:latin typeface="Times New Roman" pitchFamily="34" charset="0"/>
-                <a:ea typeface="Times New Roman" pitchFamily="34" charset="-122"/>
-                <a:cs typeface="Times New Roman" pitchFamily="34" charset="-120"/>
-              </a:rPr>
-              <a:t>Teaching cue: Pre-processing is the easiest entry point since it needs no change to the model itself.</a:t>
-            </a:r>
-            <a:endParaRPr lang="en-US" sz="1200" dirty="0"/>
-          </a:p>
-        </p:txBody>
-      </p:sp>
-      <p:sp>
-        <p:nvSpPr>
           <p:cNvPr id="9" name="Text 7"/>
           <p:cNvSpPr/>
           <p:nvPr/>
@@ -5191,7 +3075,7 @@
 </p:sld>
 </file>
 
-<file path=ppt/slides/slide13.xml><?xml version="1.0" encoding="utf-8"?>
+<file path=ppt/slides/slide11.xml><?xml version="1.0" encoding="utf-8"?>
 <p:sld xmlns:a="http://schemas.openxmlformats.org/drawingml/2006/main" xmlns:r="http://schemas.openxmlformats.org/officeDocument/2006/relationships" xmlns:p="http://schemas.openxmlformats.org/presentationml/2006/main">
   <p:cSld name="Slide 13">
     <p:bg>
@@ -5507,45 +3391,6 @@
       </p:sp>
       <p:sp>
         <p:nvSpPr>
-          <p:cNvPr id="8" name="Text 6"/>
-          <p:cNvSpPr/>
-          <p:nvPr/>
-        </p:nvSpPr>
-        <p:spPr>
-          <a:xfrm>
-            <a:off x="502920" y="6382512"/>
-            <a:ext cx="10744200" cy="320040"/>
-          </a:xfrm>
-          <a:prstGeom prst="rect">
-            <a:avLst/>
-          </a:prstGeom>
-          <a:noFill/>
-          <a:ln/>
-        </p:spPr>
-        <p:txBody>
-          <a:bodyPr wrap="square" lIns="0" tIns="0" rIns="0" bIns="0" rtlCol="0" anchor="ctr"/>
-          <a:lstStyle/>
-          <a:p>
-            <a:pPr marL="0" indent="0">
-              <a:buNone/>
-            </a:pPr>
-            <a:r>
-              <a:rPr lang="en-US" sz="1200" i="1" dirty="0">
-                <a:solidFill>
-                  <a:srgbClr val="595959"/>
-                </a:solidFill>
-                <a:latin typeface="Times New Roman" pitchFamily="34" charset="0"/>
-                <a:ea typeface="Times New Roman" pitchFamily="34" charset="-122"/>
-                <a:cs typeface="Times New Roman" pitchFamily="34" charset="-120"/>
-              </a:rPr>
-              <a:t>Teaching cue: In-processing needs access to model internals, so it is used mainly by the model-building team.</a:t>
-            </a:r>
-            <a:endParaRPr lang="en-US" sz="1200" dirty="0"/>
-          </a:p>
-        </p:txBody>
-      </p:sp>
-      <p:sp>
-        <p:nvSpPr>
           <p:cNvPr id="9" name="Text 7"/>
           <p:cNvSpPr/>
           <p:nvPr/>
@@ -5591,7 +3436,7 @@
 </p:sld>
 </file>
 
-<file path=ppt/slides/slide14.xml><?xml version="1.0" encoding="utf-8"?>
+<file path=ppt/slides/slide12.xml><?xml version="1.0" encoding="utf-8"?>
 <p:sld xmlns:a="http://schemas.openxmlformats.org/drawingml/2006/main" xmlns:r="http://schemas.openxmlformats.org/officeDocument/2006/relationships" xmlns:p="http://schemas.openxmlformats.org/presentationml/2006/main">
   <p:cSld name="Slide 14">
     <p:bg>
@@ -5907,45 +3752,6 @@
       </p:sp>
       <p:sp>
         <p:nvSpPr>
-          <p:cNvPr id="8" name="Text 6"/>
-          <p:cNvSpPr/>
-          <p:nvPr/>
-        </p:nvSpPr>
-        <p:spPr>
-          <a:xfrm>
-            <a:off x="502920" y="6382512"/>
-            <a:ext cx="10744200" cy="320040"/>
-          </a:xfrm>
-          <a:prstGeom prst="rect">
-            <a:avLst/>
-          </a:prstGeom>
-          <a:noFill/>
-          <a:ln/>
-        </p:spPr>
-        <p:txBody>
-          <a:bodyPr wrap="square" lIns="0" tIns="0" rIns="0" bIns="0" rtlCol="0" anchor="ctr"/>
-          <a:lstStyle/>
-          <a:p>
-            <a:pPr marL="0" indent="0">
-              <a:buNone/>
-            </a:pPr>
-            <a:r>
-              <a:rPr lang="en-US" sz="1200" i="1" dirty="0">
-                <a:solidFill>
-                  <a:srgbClr val="595959"/>
-                </a:solidFill>
-                <a:latin typeface="Times New Roman" pitchFamily="34" charset="0"/>
-                <a:ea typeface="Times New Roman" pitchFamily="34" charset="-122"/>
-                <a:cs typeface="Times New Roman" pitchFamily="34" charset="-120"/>
-              </a:rPr>
-              <a:t>Teaching cue: Post-processing is the fastest fix to deploy when a biased model is already in production.</a:t>
-            </a:r>
-            <a:endParaRPr lang="en-US" sz="1200" dirty="0"/>
-          </a:p>
-        </p:txBody>
-      </p:sp>
-      <p:sp>
-        <p:nvSpPr>
           <p:cNvPr id="9" name="Text 7"/>
           <p:cNvSpPr/>
           <p:nvPr/>
@@ -5991,7 +3797,7 @@
 </p:sld>
 </file>
 
-<file path=ppt/slides/slide15.xml><?xml version="1.0" encoding="utf-8"?>
+<file path=ppt/slides/slide13.xml><?xml version="1.0" encoding="utf-8"?>
 <p:sld xmlns:a="http://schemas.openxmlformats.org/drawingml/2006/main" xmlns:r="http://schemas.openxmlformats.org/officeDocument/2006/relationships" xmlns:p="http://schemas.openxmlformats.org/presentationml/2006/main">
   <p:cSld name="Slide 15">
     <p:bg>
@@ -6307,45 +4113,6 @@
       </p:sp>
       <p:sp>
         <p:nvSpPr>
-          <p:cNvPr id="8" name="Text 6"/>
-          <p:cNvSpPr/>
-          <p:nvPr/>
-        </p:nvSpPr>
-        <p:spPr>
-          <a:xfrm>
-            <a:off x="502920" y="6382512"/>
-            <a:ext cx="10744200" cy="320040"/>
-          </a:xfrm>
-          <a:prstGeom prst="rect">
-            <a:avLst/>
-          </a:prstGeom>
-          <a:noFill/>
-          <a:ln/>
-        </p:spPr>
-        <p:txBody>
-          <a:bodyPr wrap="square" lIns="0" tIns="0" rIns="0" bIns="0" rtlCol="0" anchor="ctr"/>
-          <a:lstStyle/>
-          <a:p>
-            <a:pPr marL="0" indent="0">
-              <a:buNone/>
-            </a:pPr>
-            <a:r>
-              <a:rPr lang="en-US" sz="1200" i="1" dirty="0">
-                <a:solidFill>
-                  <a:srgbClr val="595959"/>
-                </a:solidFill>
-                <a:latin typeface="Times New Roman" pitchFamily="34" charset="0"/>
-                <a:ea typeface="Times New Roman" pitchFamily="34" charset="-122"/>
-                <a:cs typeface="Times New Roman" pitchFamily="34" charset="-120"/>
-              </a:rPr>
-              <a:t>Teaching cue: "Imminent" means these risks are already observable in deployed systems today.</a:t>
-            </a:r>
-            <a:endParaRPr lang="en-US" sz="1200" dirty="0"/>
-          </a:p>
-        </p:txBody>
-      </p:sp>
-      <p:sp>
-        <p:nvSpPr>
           <p:cNvPr id="9" name="Text 7"/>
           <p:cNvSpPr/>
           <p:nvPr/>
@@ -6391,7 +4158,7 @@
 </p:sld>
 </file>
 
-<file path=ppt/slides/slide16.xml><?xml version="1.0" encoding="utf-8"?>
+<file path=ppt/slides/slide14.xml><?xml version="1.0" encoding="utf-8"?>
 <p:sld xmlns:a="http://schemas.openxmlformats.org/drawingml/2006/main" xmlns:r="http://schemas.openxmlformats.org/officeDocument/2006/relationships" xmlns:p="http://schemas.openxmlformats.org/presentationml/2006/main">
   <p:cSld name="Slide 16">
     <p:bg>
@@ -6707,14 +4474,14 @@
       </p:sp>
       <p:sp>
         <p:nvSpPr>
-          <p:cNvPr id="8" name="Text 6"/>
+          <p:cNvPr id="9" name="Text 7"/>
           <p:cNvSpPr/>
           <p:nvPr/>
         </p:nvSpPr>
         <p:spPr>
           <a:xfrm>
-            <a:off x="502920" y="6382512"/>
-            <a:ext cx="10744200" cy="320040"/>
+            <a:off x="11430000" y="6446520"/>
+            <a:ext cx="365760" cy="182880"/>
           </a:xfrm>
           <a:prstGeom prst="rect">
             <a:avLst/>
@@ -6726,11 +4493,11 @@
           <a:bodyPr wrap="square" lIns="0" tIns="0" rIns="0" bIns="0" rtlCol="0" anchor="ctr"/>
           <a:lstStyle/>
           <a:p>
-            <a:pPr marL="0" indent="0">
-              <a:buNone/>
-            </a:pPr>
-            <a:r>
-              <a:rPr lang="en-US" sz="1200" i="1" dirty="0">
+            <a:pPr marL="0" indent="0" algn="ctr">
+              <a:buNone/>
+            </a:pPr>
+            <a:r>
+              <a:rPr lang="en-US" sz="1200" dirty="0">
                 <a:solidFill>
                   <a:srgbClr val="595959"/>
                 </a:solidFill>
@@ -6738,1269 +4505,7 @@
                 <a:ea typeface="Times New Roman" pitchFamily="34" charset="-122"/>
                 <a:cs typeface="Times New Roman" pitchFamily="34" charset="-120"/>
               </a:rPr>
-              <a:t>Teaching cue: Ask students to connect each long-term risk back to a specific imminent risk from the previous slide.</a:t>
-            </a:r>
-            <a:endParaRPr lang="en-US" sz="1200" dirty="0"/>
-          </a:p>
-        </p:txBody>
-      </p:sp>
-      <p:sp>
-        <p:nvSpPr>
-          <p:cNvPr id="9" name="Text 7"/>
-          <p:cNvSpPr/>
-          <p:nvPr/>
-        </p:nvSpPr>
-        <p:spPr>
-          <a:xfrm>
-            <a:off x="11430000" y="6446520"/>
-            <a:ext cx="365760" cy="182880"/>
-          </a:xfrm>
-          <a:prstGeom prst="rect">
-            <a:avLst/>
-          </a:prstGeom>
-          <a:noFill/>
-          <a:ln/>
-        </p:spPr>
-        <p:txBody>
-          <a:bodyPr wrap="square" lIns="0" tIns="0" rIns="0" bIns="0" rtlCol="0" anchor="ctr"/>
-          <a:lstStyle/>
-          <a:p>
-            <a:pPr marL="0" indent="0" algn="ctr">
-              <a:buNone/>
-            </a:pPr>
-            <a:r>
-              <a:rPr lang="en-US" sz="1200" dirty="0">
-                <a:solidFill>
-                  <a:srgbClr val="595959"/>
-                </a:solidFill>
-                <a:latin typeface="Times New Roman" pitchFamily="34" charset="0"/>
-                <a:ea typeface="Times New Roman" pitchFamily="34" charset="-122"/>
-                <a:cs typeface="Times New Roman" pitchFamily="34" charset="-120"/>
-              </a:rPr>
               <a:t>16</a:t>
-            </a:r>
-            <a:endParaRPr lang="en-US" sz="1200" dirty="0"/>
-          </a:p>
-        </p:txBody>
-      </p:sp>
-    </p:spTree>
-  </p:cSld>
-  <p:clrMapOvr>
-    <a:masterClrMapping/>
-  </p:clrMapOvr>
-</p:sld>
-</file>
-
-<file path=ppt/slides/slide17.xml><?xml version="1.0" encoding="utf-8"?>
-<p:sld xmlns:a="http://schemas.openxmlformats.org/drawingml/2006/main" xmlns:r="http://schemas.openxmlformats.org/officeDocument/2006/relationships" xmlns:p="http://schemas.openxmlformats.org/presentationml/2006/main">
-  <p:cSld name="Slide 17">
-    <p:bg>
-      <p:bgPr>
-        <a:solidFill>
-          <a:srgbClr val="FFFFFF"/>
-        </a:solidFill>
-        <a:effectLst/>
-      </p:bgPr>
-    </p:bg>
-    <p:spTree>
-      <p:nvGrpSpPr>
-        <p:cNvPr id="1" name=""/>
-        <p:cNvGrpSpPr/>
-        <p:nvPr/>
-      </p:nvGrpSpPr>
-      <p:grpSpPr>
-        <a:xfrm>
-          <a:off x="0" y="0"/>
-          <a:ext cx="0" cy="0"/>
-          <a:chOff x="0" y="0"/>
-          <a:chExt cx="0" cy="0"/>
-        </a:xfrm>
-      </p:grpSpPr>
-      <p:sp>
-        <p:nvSpPr>
-          <p:cNvPr id="2" name="Shape 0"/>
-          <p:cNvSpPr/>
-          <p:nvPr/>
-        </p:nvSpPr>
-        <p:spPr>
-          <a:xfrm>
-            <a:off x="0" y="0"/>
-            <a:ext cx="12191695" cy="502920"/>
-          </a:xfrm>
-          <a:prstGeom prst="rect">
-            <a:avLst/>
-          </a:prstGeom>
-          <a:solidFill>
-            <a:srgbClr val="F8FBFF"/>
-          </a:solidFill>
-          <a:ln w="12700">
-            <a:solidFill>
-              <a:srgbClr val="F8FBFF"/>
-            </a:solidFill>
-            <a:prstDash val="solid"/>
-          </a:ln>
-        </p:spPr>
-        <p:txBody>
-          <a:bodyPr/>
-          <a:lstStyle/>
-          <a:p>
-            <a:endParaRPr lang="en-IN"/>
-          </a:p>
-        </p:txBody>
-      </p:sp>
-      <p:sp>
-        <p:nvSpPr>
-          <p:cNvPr id="3" name="Shape 1"/>
-          <p:cNvSpPr/>
-          <p:nvPr/>
-        </p:nvSpPr>
-        <p:spPr>
-          <a:xfrm>
-            <a:off x="0" y="475488"/>
-            <a:ext cx="12191695" cy="27432"/>
-          </a:xfrm>
-          <a:prstGeom prst="rect">
-            <a:avLst/>
-          </a:prstGeom>
-          <a:solidFill>
-            <a:srgbClr val="2E75B6"/>
-          </a:solidFill>
-          <a:ln w="12700">
-            <a:solidFill>
-              <a:srgbClr val="2E75B6"/>
-            </a:solidFill>
-            <a:prstDash val="solid"/>
-          </a:ln>
-        </p:spPr>
-        <p:txBody>
-          <a:bodyPr/>
-          <a:lstStyle/>
-          <a:p>
-            <a:endParaRPr lang="en-IN"/>
-          </a:p>
-        </p:txBody>
-      </p:sp>
-      <p:sp>
-        <p:nvSpPr>
-          <p:cNvPr id="4" name="Text 2"/>
-          <p:cNvSpPr/>
-          <p:nvPr/>
-        </p:nvSpPr>
-        <p:spPr>
-          <a:xfrm>
-            <a:off x="365760" y="73152"/>
-            <a:ext cx="6400800" cy="274320"/>
-          </a:xfrm>
-          <a:prstGeom prst="rect">
-            <a:avLst/>
-          </a:prstGeom>
-          <a:noFill/>
-          <a:ln/>
-        </p:spPr>
-        <p:txBody>
-          <a:bodyPr wrap="square" lIns="0" tIns="0" rIns="0" bIns="0" rtlCol="0" anchor="ctr"/>
-          <a:lstStyle/>
-          <a:p>
-            <a:pPr marL="0" indent="0">
-              <a:buNone/>
-            </a:pPr>
-            <a:r>
-              <a:rPr lang="en-US" sz="1800" b="1" dirty="0">
-                <a:solidFill>
-                  <a:srgbClr val="1F4E79"/>
-                </a:solidFill>
-                <a:latin typeface="Times New Roman" pitchFamily="34" charset="0"/>
-                <a:ea typeface="Times New Roman" pitchFamily="34" charset="-122"/>
-                <a:cs typeface="Times New Roman" pitchFamily="34" charset="-120"/>
-              </a:rPr>
-              <a:t>TCS349: Responsible and Explainable AI</a:t>
-            </a:r>
-            <a:endParaRPr lang="en-US" sz="1800" dirty="0"/>
-          </a:p>
-        </p:txBody>
-      </p:sp>
-      <p:sp>
-        <p:nvSpPr>
-          <p:cNvPr id="5" name="Text 3"/>
-          <p:cNvSpPr/>
-          <p:nvPr/>
-        </p:nvSpPr>
-        <p:spPr>
-          <a:xfrm>
-            <a:off x="8321040" y="82296"/>
-            <a:ext cx="3383280" cy="274320"/>
-          </a:xfrm>
-          <a:prstGeom prst="rect">
-            <a:avLst/>
-          </a:prstGeom>
-          <a:noFill/>
-          <a:ln/>
-        </p:spPr>
-        <p:txBody>
-          <a:bodyPr wrap="square" lIns="0" tIns="0" rIns="0" bIns="0" rtlCol="0" anchor="ctr"/>
-          <a:lstStyle/>
-          <a:p>
-            <a:pPr marL="0" indent="0" algn="r">
-              <a:buNone/>
-            </a:pPr>
-            <a:r>
-              <a:rPr lang="en-US" sz="1600" b="1" dirty="0">
-                <a:solidFill>
-                  <a:srgbClr val="1F4E79"/>
-                </a:solidFill>
-                <a:latin typeface="Times New Roman" pitchFamily="34" charset="0"/>
-                <a:ea typeface="Times New Roman" pitchFamily="34" charset="-122"/>
-                <a:cs typeface="Times New Roman" pitchFamily="34" charset="-120"/>
-              </a:rPr>
-              <a:t>Unit 1 | Lectures 8 &amp; 9</a:t>
-            </a:r>
-            <a:endParaRPr lang="en-US" sz="1600" dirty="0"/>
-          </a:p>
-        </p:txBody>
-      </p:sp>
-      <p:sp>
-        <p:nvSpPr>
-          <p:cNvPr id="6" name="Text 4"/>
-          <p:cNvSpPr/>
-          <p:nvPr/>
-        </p:nvSpPr>
-        <p:spPr>
-          <a:xfrm>
-            <a:off x="502920" y="640080"/>
-            <a:ext cx="11155680" cy="640080"/>
-          </a:xfrm>
-          <a:prstGeom prst="rect">
-            <a:avLst/>
-          </a:prstGeom>
-          <a:noFill/>
-          <a:ln/>
-        </p:spPr>
-        <p:txBody>
-          <a:bodyPr wrap="square" lIns="0" tIns="0" rIns="0" bIns="0" rtlCol="0" anchor="ctr"/>
-          <a:lstStyle/>
-          <a:p>
-            <a:pPr marL="0" indent="0">
-              <a:buNone/>
-            </a:pPr>
-            <a:r>
-              <a:rPr lang="en-US" sz="2300" b="1" dirty="0">
-                <a:solidFill>
-                  <a:srgbClr val="1F4E79"/>
-                </a:solidFill>
-                <a:latin typeface="Times New Roman" pitchFamily="34" charset="0"/>
-                <a:ea typeface="Times New Roman" pitchFamily="34" charset="-122"/>
-                <a:cs typeface="Times New Roman" pitchFamily="34" charset="-120"/>
-              </a:rPr>
-              <a:t>Mini Classroom Activity</a:t>
-            </a:r>
-            <a:endParaRPr lang="en-US" sz="2300" dirty="0"/>
-          </a:p>
-        </p:txBody>
-      </p:sp>
-      <p:sp>
-        <p:nvSpPr>
-          <p:cNvPr id="7" name="Text 5"/>
-          <p:cNvSpPr/>
-          <p:nvPr/>
-        </p:nvSpPr>
-        <p:spPr>
-          <a:xfrm>
-            <a:off x="594360" y="1417320"/>
-            <a:ext cx="10972800" cy="4434840"/>
-          </a:xfrm>
-          <a:prstGeom prst="rect">
-            <a:avLst/>
-          </a:prstGeom>
-          <a:noFill/>
-          <a:ln/>
-        </p:spPr>
-        <p:txBody>
-          <a:bodyPr wrap="square" lIns="50800" tIns="50800" rIns="50800" bIns="50800" rtlCol="0" anchor="t"/>
-          <a:lstStyle/>
-          <a:p>
-            <a:pPr marL="0" indent="0">
-              <a:buNone/>
-            </a:pPr>
-            <a:r>
-              <a:rPr lang="en-US" sz="1800" dirty="0">
-                <a:solidFill>
-                  <a:srgbClr val="191919"/>
-                </a:solidFill>
-                <a:latin typeface="Times New Roman" pitchFamily="34" charset="0"/>
-                <a:ea typeface="Times New Roman" pitchFamily="34" charset="-122"/>
-                <a:cs typeface="Times New Roman" pitchFamily="34" charset="-120"/>
-              </a:rPr>
-              <a:t>Form groups of 3-4 students.</a:t>
-            </a:r>
-            <a:endParaRPr lang="en-US" sz="1800" dirty="0"/>
-          </a:p>
-          <a:p>
-            <a:pPr marL="0" indent="0">
-              <a:buNone/>
-            </a:pPr>
-            <a:endParaRPr lang="en-US" sz="1800" dirty="0"/>
-          </a:p>
-          <a:p>
-            <a:pPr marL="0" indent="0">
-              <a:buNone/>
-            </a:pPr>
-            <a:r>
-              <a:rPr lang="en-US" sz="1800" dirty="0">
-                <a:solidFill>
-                  <a:srgbClr val="191919"/>
-                </a:solidFill>
-                <a:latin typeface="Times New Roman" pitchFamily="34" charset="0"/>
-                <a:ea typeface="Times New Roman" pitchFamily="34" charset="-122"/>
-                <a:cs typeface="Times New Roman" pitchFamily="34" charset="-120"/>
-              </a:rPr>
-              <a:t>Take the Group A / Group B loan-approval numbers used in this session.</a:t>
-            </a:r>
-            <a:endParaRPr lang="en-US" sz="1800" dirty="0"/>
-          </a:p>
-          <a:p>
-            <a:pPr marL="0" indent="0">
-              <a:buNone/>
-            </a:pPr>
-            <a:endParaRPr lang="en-US" sz="1800" dirty="0"/>
-          </a:p>
-          <a:p>
-            <a:pPr marL="0" indent="0">
-              <a:buNone/>
-            </a:pPr>
-            <a:r>
-              <a:rPr lang="en-US" sz="1800" dirty="0">
-                <a:solidFill>
-                  <a:srgbClr val="191919"/>
-                </a:solidFill>
-                <a:latin typeface="Times New Roman" pitchFamily="34" charset="0"/>
-                <a:ea typeface="Times New Roman" pitchFamily="34" charset="-122"/>
-                <a:cs typeface="Times New Roman" pitchFamily="34" charset="-120"/>
-              </a:rPr>
-              <a:t>Propose one pre-processing, one in-processing and one post-processing fix to reduce the TPR/PPV gap.</a:t>
-            </a:r>
-            <a:endParaRPr lang="en-US" sz="1800" dirty="0"/>
-          </a:p>
-          <a:p>
-            <a:pPr marL="0" indent="0">
-              <a:buNone/>
-            </a:pPr>
-            <a:endParaRPr lang="en-US" sz="1800" dirty="0"/>
-          </a:p>
-          <a:p>
-            <a:pPr marL="0" indent="0">
-              <a:buNone/>
-            </a:pPr>
-            <a:r>
-              <a:rPr lang="en-US" sz="1800" dirty="0">
-                <a:solidFill>
-                  <a:srgbClr val="191919"/>
-                </a:solidFill>
-                <a:latin typeface="Times New Roman" pitchFamily="34" charset="0"/>
-                <a:ea typeface="Times New Roman" pitchFamily="34" charset="-122"/>
-                <a:cs typeface="Times New Roman" pitchFamily="34" charset="-120"/>
-              </a:rPr>
-              <a:t>Discuss which imminent or long-term risk your chosen AI system is most exposed to.</a:t>
-            </a:r>
-            <a:endParaRPr lang="en-US" sz="1800" dirty="0"/>
-          </a:p>
-          <a:p>
-            <a:pPr marL="0" indent="0">
-              <a:buNone/>
-            </a:pPr>
-            <a:endParaRPr lang="en-US" sz="1800" dirty="0"/>
-          </a:p>
-          <a:p>
-            <a:pPr marL="0" indent="0">
-              <a:buNone/>
-            </a:pPr>
-            <a:r>
-              <a:rPr lang="en-US" sz="1800" dirty="0">
-                <a:solidFill>
-                  <a:srgbClr val="191919"/>
-                </a:solidFill>
-                <a:latin typeface="Times New Roman" pitchFamily="34" charset="0"/>
-                <a:ea typeface="Times New Roman" pitchFamily="34" charset="-122"/>
-                <a:cs typeface="Times New Roman" pitchFamily="34" charset="-120"/>
-              </a:rPr>
-              <a:t>Each group shares one proposed fix in 1 minute.</a:t>
-            </a:r>
-            <a:endParaRPr lang="en-US" sz="1800" dirty="0"/>
-          </a:p>
-        </p:txBody>
-      </p:sp>
-      <p:sp>
-        <p:nvSpPr>
-          <p:cNvPr id="8" name="Text 6"/>
-          <p:cNvSpPr/>
-          <p:nvPr/>
-        </p:nvSpPr>
-        <p:spPr>
-          <a:xfrm>
-            <a:off x="502920" y="6382512"/>
-            <a:ext cx="10744200" cy="320040"/>
-          </a:xfrm>
-          <a:prstGeom prst="rect">
-            <a:avLst/>
-          </a:prstGeom>
-          <a:noFill/>
-          <a:ln/>
-        </p:spPr>
-        <p:txBody>
-          <a:bodyPr wrap="square" lIns="0" tIns="0" rIns="0" bIns="0" rtlCol="0" anchor="ctr"/>
-          <a:lstStyle/>
-          <a:p>
-            <a:pPr marL="0" indent="0">
-              <a:buNone/>
-            </a:pPr>
-            <a:r>
-              <a:rPr lang="en-US" sz="1200" i="1" dirty="0">
-                <a:solidFill>
-                  <a:srgbClr val="595959"/>
-                </a:solidFill>
-                <a:latin typeface="Times New Roman" pitchFamily="34" charset="0"/>
-                <a:ea typeface="Times New Roman" pitchFamily="34" charset="-122"/>
-                <a:cs typeface="Times New Roman" pitchFamily="34" charset="-120"/>
-              </a:rPr>
-              <a:t>Teaching cue: This activity checks whether students can connect metrics, mitigation and risk in one worked case.</a:t>
-            </a:r>
-            <a:endParaRPr lang="en-US" sz="1200" dirty="0"/>
-          </a:p>
-        </p:txBody>
-      </p:sp>
-      <p:sp>
-        <p:nvSpPr>
-          <p:cNvPr id="9" name="Text 7"/>
-          <p:cNvSpPr/>
-          <p:nvPr/>
-        </p:nvSpPr>
-        <p:spPr>
-          <a:xfrm>
-            <a:off x="11430000" y="6446520"/>
-            <a:ext cx="365760" cy="182880"/>
-          </a:xfrm>
-          <a:prstGeom prst="rect">
-            <a:avLst/>
-          </a:prstGeom>
-          <a:noFill/>
-          <a:ln/>
-        </p:spPr>
-        <p:txBody>
-          <a:bodyPr wrap="square" lIns="0" tIns="0" rIns="0" bIns="0" rtlCol="0" anchor="ctr"/>
-          <a:lstStyle/>
-          <a:p>
-            <a:pPr marL="0" indent="0" algn="ctr">
-              <a:buNone/>
-            </a:pPr>
-            <a:r>
-              <a:rPr lang="en-US" sz="1200" dirty="0">
-                <a:solidFill>
-                  <a:srgbClr val="595959"/>
-                </a:solidFill>
-                <a:latin typeface="Times New Roman" pitchFamily="34" charset="0"/>
-                <a:ea typeface="Times New Roman" pitchFamily="34" charset="-122"/>
-                <a:cs typeface="Times New Roman" pitchFamily="34" charset="-120"/>
-              </a:rPr>
-              <a:t>17</a:t>
-            </a:r>
-            <a:endParaRPr lang="en-US" sz="1200" dirty="0"/>
-          </a:p>
-        </p:txBody>
-      </p:sp>
-    </p:spTree>
-  </p:cSld>
-  <p:clrMapOvr>
-    <a:masterClrMapping/>
-  </p:clrMapOvr>
-</p:sld>
-</file>
-
-<file path=ppt/slides/slide18.xml><?xml version="1.0" encoding="utf-8"?>
-<p:sld xmlns:a="http://schemas.openxmlformats.org/drawingml/2006/main" xmlns:r="http://schemas.openxmlformats.org/officeDocument/2006/relationships" xmlns:p="http://schemas.openxmlformats.org/presentationml/2006/main">
-  <p:cSld name="Slide 18">
-    <p:bg>
-      <p:bgPr>
-        <a:solidFill>
-          <a:srgbClr val="FFFFFF"/>
-        </a:solidFill>
-        <a:effectLst/>
-      </p:bgPr>
-    </p:bg>
-    <p:spTree>
-      <p:nvGrpSpPr>
-        <p:cNvPr id="1" name=""/>
-        <p:cNvGrpSpPr/>
-        <p:nvPr/>
-      </p:nvGrpSpPr>
-      <p:grpSpPr>
-        <a:xfrm>
-          <a:off x="0" y="0"/>
-          <a:ext cx="0" cy="0"/>
-          <a:chOff x="0" y="0"/>
-          <a:chExt cx="0" cy="0"/>
-        </a:xfrm>
-      </p:grpSpPr>
-      <p:sp>
-        <p:nvSpPr>
-          <p:cNvPr id="2" name="Shape 0"/>
-          <p:cNvSpPr/>
-          <p:nvPr/>
-        </p:nvSpPr>
-        <p:spPr>
-          <a:xfrm>
-            <a:off x="0" y="0"/>
-            <a:ext cx="12191695" cy="502920"/>
-          </a:xfrm>
-          <a:prstGeom prst="rect">
-            <a:avLst/>
-          </a:prstGeom>
-          <a:solidFill>
-            <a:srgbClr val="F8FBFF"/>
-          </a:solidFill>
-          <a:ln w="12700">
-            <a:solidFill>
-              <a:srgbClr val="F8FBFF"/>
-            </a:solidFill>
-            <a:prstDash val="solid"/>
-          </a:ln>
-        </p:spPr>
-        <p:txBody>
-          <a:bodyPr/>
-          <a:lstStyle/>
-          <a:p>
-            <a:endParaRPr lang="en-IN"/>
-          </a:p>
-        </p:txBody>
-      </p:sp>
-      <p:sp>
-        <p:nvSpPr>
-          <p:cNvPr id="3" name="Shape 1"/>
-          <p:cNvSpPr/>
-          <p:nvPr/>
-        </p:nvSpPr>
-        <p:spPr>
-          <a:xfrm>
-            <a:off x="0" y="475488"/>
-            <a:ext cx="12191695" cy="27432"/>
-          </a:xfrm>
-          <a:prstGeom prst="rect">
-            <a:avLst/>
-          </a:prstGeom>
-          <a:solidFill>
-            <a:srgbClr val="2E75B6"/>
-          </a:solidFill>
-          <a:ln w="12700">
-            <a:solidFill>
-              <a:srgbClr val="2E75B6"/>
-            </a:solidFill>
-            <a:prstDash val="solid"/>
-          </a:ln>
-        </p:spPr>
-        <p:txBody>
-          <a:bodyPr/>
-          <a:lstStyle/>
-          <a:p>
-            <a:endParaRPr lang="en-IN"/>
-          </a:p>
-        </p:txBody>
-      </p:sp>
-      <p:sp>
-        <p:nvSpPr>
-          <p:cNvPr id="4" name="Text 2"/>
-          <p:cNvSpPr/>
-          <p:nvPr/>
-        </p:nvSpPr>
-        <p:spPr>
-          <a:xfrm>
-            <a:off x="365760" y="73152"/>
-            <a:ext cx="6400800" cy="274320"/>
-          </a:xfrm>
-          <a:prstGeom prst="rect">
-            <a:avLst/>
-          </a:prstGeom>
-          <a:noFill/>
-          <a:ln/>
-        </p:spPr>
-        <p:txBody>
-          <a:bodyPr wrap="square" lIns="0" tIns="0" rIns="0" bIns="0" rtlCol="0" anchor="ctr"/>
-          <a:lstStyle/>
-          <a:p>
-            <a:pPr marL="0" indent="0">
-              <a:buNone/>
-            </a:pPr>
-            <a:r>
-              <a:rPr lang="en-US" sz="1800" b="1" dirty="0">
-                <a:solidFill>
-                  <a:srgbClr val="1F4E79"/>
-                </a:solidFill>
-                <a:latin typeface="Times New Roman" pitchFamily="34" charset="0"/>
-                <a:ea typeface="Times New Roman" pitchFamily="34" charset="-122"/>
-                <a:cs typeface="Times New Roman" pitchFamily="34" charset="-120"/>
-              </a:rPr>
-              <a:t>TCS349: Responsible and Explainable AI</a:t>
-            </a:r>
-            <a:endParaRPr lang="en-US" sz="1800" dirty="0"/>
-          </a:p>
-        </p:txBody>
-      </p:sp>
-      <p:sp>
-        <p:nvSpPr>
-          <p:cNvPr id="5" name="Text 3"/>
-          <p:cNvSpPr/>
-          <p:nvPr/>
-        </p:nvSpPr>
-        <p:spPr>
-          <a:xfrm>
-            <a:off x="8321040" y="82296"/>
-            <a:ext cx="3383280" cy="274320"/>
-          </a:xfrm>
-          <a:prstGeom prst="rect">
-            <a:avLst/>
-          </a:prstGeom>
-          <a:noFill/>
-          <a:ln/>
-        </p:spPr>
-        <p:txBody>
-          <a:bodyPr wrap="square" lIns="0" tIns="0" rIns="0" bIns="0" rtlCol="0" anchor="ctr"/>
-          <a:lstStyle/>
-          <a:p>
-            <a:pPr marL="0" indent="0" algn="r">
-              <a:buNone/>
-            </a:pPr>
-            <a:r>
-              <a:rPr lang="en-US" sz="1600" b="1" dirty="0">
-                <a:solidFill>
-                  <a:srgbClr val="1F4E79"/>
-                </a:solidFill>
-                <a:latin typeface="Times New Roman" pitchFamily="34" charset="0"/>
-                <a:ea typeface="Times New Roman" pitchFamily="34" charset="-122"/>
-                <a:cs typeface="Times New Roman" pitchFamily="34" charset="-120"/>
-              </a:rPr>
-              <a:t>Unit 1 | Lectures 8 &amp; 9</a:t>
-            </a:r>
-            <a:endParaRPr lang="en-US" sz="1600" dirty="0"/>
-          </a:p>
-        </p:txBody>
-      </p:sp>
-      <p:sp>
-        <p:nvSpPr>
-          <p:cNvPr id="6" name="Text 4"/>
-          <p:cNvSpPr/>
-          <p:nvPr/>
-        </p:nvSpPr>
-        <p:spPr>
-          <a:xfrm>
-            <a:off x="502920" y="640080"/>
-            <a:ext cx="11155680" cy="640080"/>
-          </a:xfrm>
-          <a:prstGeom prst="rect">
-            <a:avLst/>
-          </a:prstGeom>
-          <a:noFill/>
-          <a:ln/>
-        </p:spPr>
-        <p:txBody>
-          <a:bodyPr wrap="square" lIns="0" tIns="0" rIns="0" bIns="0" rtlCol="0" anchor="ctr"/>
-          <a:lstStyle/>
-          <a:p>
-            <a:pPr marL="0" indent="0">
-              <a:buNone/>
-            </a:pPr>
-            <a:r>
-              <a:rPr lang="en-US" sz="2300" b="1" dirty="0">
-                <a:solidFill>
-                  <a:srgbClr val="1F4E79"/>
-                </a:solidFill>
-                <a:latin typeface="Times New Roman" pitchFamily="34" charset="0"/>
-                <a:ea typeface="Times New Roman" pitchFamily="34" charset="-122"/>
-                <a:cs typeface="Times New Roman" pitchFamily="34" charset="-120"/>
-              </a:rPr>
-              <a:t>Recap and Exit Questions</a:t>
-            </a:r>
-            <a:endParaRPr lang="en-US" sz="2300" dirty="0"/>
-          </a:p>
-        </p:txBody>
-      </p:sp>
-      <p:sp>
-        <p:nvSpPr>
-          <p:cNvPr id="7" name="Text 5"/>
-          <p:cNvSpPr/>
-          <p:nvPr/>
-        </p:nvSpPr>
-        <p:spPr>
-          <a:xfrm>
-            <a:off x="594360" y="1417320"/>
-            <a:ext cx="10972800" cy="4434840"/>
-          </a:xfrm>
-          <a:prstGeom prst="rect">
-            <a:avLst/>
-          </a:prstGeom>
-          <a:noFill/>
-          <a:ln/>
-        </p:spPr>
-        <p:txBody>
-          <a:bodyPr wrap="square" lIns="50800" tIns="50800" rIns="50800" bIns="50800" rtlCol="0" anchor="t"/>
-          <a:lstStyle/>
-          <a:p>
-            <a:pPr marL="0" indent="0">
-              <a:buNone/>
-            </a:pPr>
-            <a:r>
-              <a:rPr lang="en-US" sz="1800" dirty="0">
-                <a:solidFill>
-                  <a:srgbClr val="191919"/>
-                </a:solidFill>
-                <a:latin typeface="Times New Roman" pitchFamily="34" charset="0"/>
-                <a:ea typeface="Times New Roman" pitchFamily="34" charset="-122"/>
-                <a:cs typeface="Times New Roman" pitchFamily="34" charset="-120"/>
-              </a:rPr>
-              <a:t>Equal opportunity, equalized odds and predictive parity rarely hold together - metric choice is a context-driven decision.</a:t>
-            </a:r>
-            <a:endParaRPr lang="en-US" sz="1800" dirty="0"/>
-          </a:p>
-          <a:p>
-            <a:pPr marL="0" indent="0">
-              <a:buNone/>
-            </a:pPr>
-            <a:endParaRPr lang="en-US" sz="1800" dirty="0"/>
-          </a:p>
-          <a:p>
-            <a:pPr marL="0" indent="0">
-              <a:buNone/>
-            </a:pPr>
-            <a:r>
-              <a:rPr lang="en-US" sz="1800" dirty="0">
-                <a:solidFill>
-                  <a:srgbClr val="191919"/>
-                </a:solidFill>
-                <a:latin typeface="Times New Roman" pitchFamily="34" charset="0"/>
-                <a:ea typeface="Times New Roman" pitchFamily="34" charset="-122"/>
-                <a:cs typeface="Times New Roman" pitchFamily="34" charset="-120"/>
-              </a:rPr>
-              <a:t>Bias mitigation can act before training, during training or after training.</a:t>
-            </a:r>
-            <a:endParaRPr lang="en-US" sz="1800" dirty="0"/>
-          </a:p>
-          <a:p>
-            <a:pPr marL="0" indent="0">
-              <a:buNone/>
-            </a:pPr>
-            <a:endParaRPr lang="en-US" sz="1800" dirty="0"/>
-          </a:p>
-          <a:p>
-            <a:pPr marL="0" indent="0">
-              <a:buNone/>
-            </a:pPr>
-            <a:r>
-              <a:rPr lang="en-US" sz="1800" dirty="0">
-                <a:solidFill>
-                  <a:srgbClr val="191919"/>
-                </a:solidFill>
-                <a:latin typeface="Times New Roman" pitchFamily="34" charset="0"/>
-                <a:ea typeface="Times New Roman" pitchFamily="34" charset="-122"/>
-                <a:cs typeface="Times New Roman" pitchFamily="34" charset="-120"/>
-              </a:rPr>
-              <a:t>1. Why might equalized odds and predictive parity conflict for the same model?</a:t>
-            </a:r>
-            <a:endParaRPr lang="en-US" sz="1800" dirty="0"/>
-          </a:p>
-          <a:p>
-            <a:pPr marL="0" indent="0">
-              <a:buNone/>
-            </a:pPr>
-            <a:endParaRPr lang="en-US" sz="1800" dirty="0"/>
-          </a:p>
-          <a:p>
-            <a:pPr marL="0" indent="0">
-              <a:buNone/>
-            </a:pPr>
-            <a:r>
-              <a:rPr lang="en-US" sz="1800" dirty="0">
-                <a:solidFill>
-                  <a:srgbClr val="191919"/>
-                </a:solidFill>
-                <a:latin typeface="Times New Roman" pitchFamily="34" charset="0"/>
-                <a:ea typeface="Times New Roman" pitchFamily="34" charset="-122"/>
-                <a:cs typeface="Times New Roman" pitchFamily="34" charset="-120"/>
-              </a:rPr>
-              <a:t>2. Name one technique each for pre-, in- and post-processing bias mitigation.</a:t>
-            </a:r>
-            <a:endParaRPr lang="en-US" sz="1800" dirty="0"/>
-          </a:p>
-          <a:p>
-            <a:pPr marL="0" indent="0">
-              <a:buNone/>
-            </a:pPr>
-            <a:endParaRPr lang="en-US" sz="1800" dirty="0"/>
-          </a:p>
-          <a:p>
-            <a:pPr marL="0" indent="0">
-              <a:buNone/>
-            </a:pPr>
-            <a:r>
-              <a:rPr lang="en-US" sz="1800" dirty="0">
-                <a:solidFill>
-                  <a:srgbClr val="191919"/>
-                </a:solidFill>
-                <a:latin typeface="Times New Roman" pitchFamily="34" charset="0"/>
-                <a:ea typeface="Times New Roman" pitchFamily="34" charset="-122"/>
-                <a:cs typeface="Times New Roman" pitchFamily="34" charset="-120"/>
-              </a:rPr>
-              <a:t>3. Give one imminent and one long-term risk for a hiring AI system.</a:t>
-            </a:r>
-            <a:endParaRPr lang="en-US" sz="1800" dirty="0"/>
-          </a:p>
-        </p:txBody>
-      </p:sp>
-      <p:sp>
-        <p:nvSpPr>
-          <p:cNvPr id="8" name="Text 6"/>
-          <p:cNvSpPr/>
-          <p:nvPr/>
-        </p:nvSpPr>
-        <p:spPr>
-          <a:xfrm>
-            <a:off x="502920" y="6382512"/>
-            <a:ext cx="10744200" cy="320040"/>
-          </a:xfrm>
-          <a:prstGeom prst="rect">
-            <a:avLst/>
-          </a:prstGeom>
-          <a:noFill/>
-          <a:ln/>
-        </p:spPr>
-        <p:txBody>
-          <a:bodyPr wrap="square" lIns="0" tIns="0" rIns="0" bIns="0" rtlCol="0" anchor="ctr"/>
-          <a:lstStyle/>
-          <a:p>
-            <a:pPr marL="0" indent="0">
-              <a:buNone/>
-            </a:pPr>
-            <a:r>
-              <a:rPr lang="en-US" sz="1200" i="1" dirty="0">
-                <a:solidFill>
-                  <a:srgbClr val="595959"/>
-                </a:solidFill>
-                <a:latin typeface="Times New Roman" pitchFamily="34" charset="0"/>
-                <a:ea typeface="Times New Roman" pitchFamily="34" charset="-122"/>
-                <a:cs typeface="Times New Roman" pitchFamily="34" charset="-120"/>
-              </a:rPr>
-              <a:t>Teaching cue: Ask students to answer the exit questions in notebooks or as a quick oral discussion.</a:t>
-            </a:r>
-            <a:endParaRPr lang="en-US" sz="1200" dirty="0"/>
-          </a:p>
-        </p:txBody>
-      </p:sp>
-      <p:sp>
-        <p:nvSpPr>
-          <p:cNvPr id="9" name="Text 7"/>
-          <p:cNvSpPr/>
-          <p:nvPr/>
-        </p:nvSpPr>
-        <p:spPr>
-          <a:xfrm>
-            <a:off x="11430000" y="6446520"/>
-            <a:ext cx="365760" cy="182880"/>
-          </a:xfrm>
-          <a:prstGeom prst="rect">
-            <a:avLst/>
-          </a:prstGeom>
-          <a:noFill/>
-          <a:ln/>
-        </p:spPr>
-        <p:txBody>
-          <a:bodyPr wrap="square" lIns="0" tIns="0" rIns="0" bIns="0" rtlCol="0" anchor="ctr"/>
-          <a:lstStyle/>
-          <a:p>
-            <a:pPr marL="0" indent="0" algn="ctr">
-              <a:buNone/>
-            </a:pPr>
-            <a:r>
-              <a:rPr lang="en-US" sz="1200" dirty="0">
-                <a:solidFill>
-                  <a:srgbClr val="595959"/>
-                </a:solidFill>
-                <a:latin typeface="Times New Roman" pitchFamily="34" charset="0"/>
-                <a:ea typeface="Times New Roman" pitchFamily="34" charset="-122"/>
-                <a:cs typeface="Times New Roman" pitchFamily="34" charset="-120"/>
-              </a:rPr>
-              <a:t>18</a:t>
-            </a:r>
-            <a:endParaRPr lang="en-US" sz="1200" dirty="0"/>
-          </a:p>
-        </p:txBody>
-      </p:sp>
-    </p:spTree>
-  </p:cSld>
-  <p:clrMapOvr>
-    <a:masterClrMapping/>
-  </p:clrMapOvr>
-</p:sld>
-</file>
-
-<file path=ppt/slides/slide19.xml><?xml version="1.0" encoding="utf-8"?>
-<p:sld xmlns:a="http://schemas.openxmlformats.org/drawingml/2006/main" xmlns:r="http://schemas.openxmlformats.org/officeDocument/2006/relationships" xmlns:p="http://schemas.openxmlformats.org/presentationml/2006/main">
-  <p:cSld name="Slide 19">
-    <p:bg>
-      <p:bgPr>
-        <a:solidFill>
-          <a:srgbClr val="FFFFFF"/>
-        </a:solidFill>
-        <a:effectLst/>
-      </p:bgPr>
-    </p:bg>
-    <p:spTree>
-      <p:nvGrpSpPr>
-        <p:cNvPr id="1" name=""/>
-        <p:cNvGrpSpPr/>
-        <p:nvPr/>
-      </p:nvGrpSpPr>
-      <p:grpSpPr>
-        <a:xfrm>
-          <a:off x="0" y="0"/>
-          <a:ext cx="0" cy="0"/>
-          <a:chOff x="0" y="0"/>
-          <a:chExt cx="0" cy="0"/>
-        </a:xfrm>
-      </p:grpSpPr>
-      <p:sp>
-        <p:nvSpPr>
-          <p:cNvPr id="2" name="Shape 0"/>
-          <p:cNvSpPr/>
-          <p:nvPr/>
-        </p:nvSpPr>
-        <p:spPr>
-          <a:xfrm>
-            <a:off x="0" y="0"/>
-            <a:ext cx="12191695" cy="502920"/>
-          </a:xfrm>
-          <a:prstGeom prst="rect">
-            <a:avLst/>
-          </a:prstGeom>
-          <a:solidFill>
-            <a:srgbClr val="F8FBFF"/>
-          </a:solidFill>
-          <a:ln w="12700">
-            <a:solidFill>
-              <a:srgbClr val="F8FBFF"/>
-            </a:solidFill>
-            <a:prstDash val="solid"/>
-          </a:ln>
-        </p:spPr>
-        <p:txBody>
-          <a:bodyPr/>
-          <a:lstStyle/>
-          <a:p>
-            <a:endParaRPr lang="en-IN"/>
-          </a:p>
-        </p:txBody>
-      </p:sp>
-      <p:sp>
-        <p:nvSpPr>
-          <p:cNvPr id="3" name="Shape 1"/>
-          <p:cNvSpPr/>
-          <p:nvPr/>
-        </p:nvSpPr>
-        <p:spPr>
-          <a:xfrm>
-            <a:off x="0" y="475488"/>
-            <a:ext cx="12191695" cy="27432"/>
-          </a:xfrm>
-          <a:prstGeom prst="rect">
-            <a:avLst/>
-          </a:prstGeom>
-          <a:solidFill>
-            <a:srgbClr val="2E75B6"/>
-          </a:solidFill>
-          <a:ln w="12700">
-            <a:solidFill>
-              <a:srgbClr val="2E75B6"/>
-            </a:solidFill>
-            <a:prstDash val="solid"/>
-          </a:ln>
-        </p:spPr>
-        <p:txBody>
-          <a:bodyPr/>
-          <a:lstStyle/>
-          <a:p>
-            <a:endParaRPr lang="en-IN"/>
-          </a:p>
-        </p:txBody>
-      </p:sp>
-      <p:sp>
-        <p:nvSpPr>
-          <p:cNvPr id="4" name="Text 2"/>
-          <p:cNvSpPr/>
-          <p:nvPr/>
-        </p:nvSpPr>
-        <p:spPr>
-          <a:xfrm>
-            <a:off x="365760" y="73152"/>
-            <a:ext cx="6400800" cy="274320"/>
-          </a:xfrm>
-          <a:prstGeom prst="rect">
-            <a:avLst/>
-          </a:prstGeom>
-          <a:noFill/>
-          <a:ln/>
-        </p:spPr>
-        <p:txBody>
-          <a:bodyPr wrap="square" lIns="0" tIns="0" rIns="0" bIns="0" rtlCol="0" anchor="ctr"/>
-          <a:lstStyle/>
-          <a:p>
-            <a:pPr marL="0" indent="0">
-              <a:buNone/>
-            </a:pPr>
-            <a:r>
-              <a:rPr lang="en-US" sz="1800" b="1" dirty="0">
-                <a:solidFill>
-                  <a:srgbClr val="1F4E79"/>
-                </a:solidFill>
-                <a:latin typeface="Times New Roman" pitchFamily="34" charset="0"/>
-                <a:ea typeface="Times New Roman" pitchFamily="34" charset="-122"/>
-                <a:cs typeface="Times New Roman" pitchFamily="34" charset="-120"/>
-              </a:rPr>
-              <a:t>TCS349: Responsible and Explainable AI</a:t>
-            </a:r>
-            <a:endParaRPr lang="en-US" sz="1800" dirty="0"/>
-          </a:p>
-        </p:txBody>
-      </p:sp>
-      <p:sp>
-        <p:nvSpPr>
-          <p:cNvPr id="5" name="Text 3"/>
-          <p:cNvSpPr/>
-          <p:nvPr/>
-        </p:nvSpPr>
-        <p:spPr>
-          <a:xfrm>
-            <a:off x="8321040" y="82296"/>
-            <a:ext cx="3383280" cy="274320"/>
-          </a:xfrm>
-          <a:prstGeom prst="rect">
-            <a:avLst/>
-          </a:prstGeom>
-          <a:noFill/>
-          <a:ln/>
-        </p:spPr>
-        <p:txBody>
-          <a:bodyPr wrap="square" lIns="0" tIns="0" rIns="0" bIns="0" rtlCol="0" anchor="ctr"/>
-          <a:lstStyle/>
-          <a:p>
-            <a:pPr marL="0" indent="0" algn="r">
-              <a:buNone/>
-            </a:pPr>
-            <a:r>
-              <a:rPr lang="en-US" sz="1600" b="1" dirty="0">
-                <a:solidFill>
-                  <a:srgbClr val="1F4E79"/>
-                </a:solidFill>
-                <a:latin typeface="Times New Roman" pitchFamily="34" charset="0"/>
-                <a:ea typeface="Times New Roman" pitchFamily="34" charset="-122"/>
-                <a:cs typeface="Times New Roman" pitchFamily="34" charset="-120"/>
-              </a:rPr>
-              <a:t>Unit 1 | Lectures 8 &amp; 9</a:t>
-            </a:r>
-            <a:endParaRPr lang="en-US" sz="1600" dirty="0"/>
-          </a:p>
-        </p:txBody>
-      </p:sp>
-      <p:sp>
-        <p:nvSpPr>
-          <p:cNvPr id="6" name="Text 4"/>
-          <p:cNvSpPr/>
-          <p:nvPr/>
-        </p:nvSpPr>
-        <p:spPr>
-          <a:xfrm>
-            <a:off x="502920" y="640080"/>
-            <a:ext cx="11155680" cy="640080"/>
-          </a:xfrm>
-          <a:prstGeom prst="rect">
-            <a:avLst/>
-          </a:prstGeom>
-          <a:noFill/>
-          <a:ln/>
-        </p:spPr>
-        <p:txBody>
-          <a:bodyPr wrap="square" lIns="0" tIns="0" rIns="0" bIns="0" rtlCol="0" anchor="ctr"/>
-          <a:lstStyle/>
-          <a:p>
-            <a:pPr marL="0" indent="0">
-              <a:buNone/>
-            </a:pPr>
-            <a:r>
-              <a:rPr lang="en-US" sz="2300" b="1" dirty="0">
-                <a:solidFill>
-                  <a:srgbClr val="1F4E79"/>
-                </a:solidFill>
-                <a:latin typeface="Times New Roman" pitchFamily="34" charset="0"/>
-                <a:ea typeface="Times New Roman" pitchFamily="34" charset="-122"/>
-                <a:cs typeface="Times New Roman" pitchFamily="34" charset="-120"/>
-              </a:rPr>
-              <a:t>Unit I Wrap-up</a:t>
-            </a:r>
-            <a:endParaRPr lang="en-US" sz="2300" dirty="0"/>
-          </a:p>
-        </p:txBody>
-      </p:sp>
-      <p:sp>
-        <p:nvSpPr>
-          <p:cNvPr id="7" name="Text 5"/>
-          <p:cNvSpPr/>
-          <p:nvPr/>
-        </p:nvSpPr>
-        <p:spPr>
-          <a:xfrm>
-            <a:off x="594360" y="1417320"/>
-            <a:ext cx="10972800" cy="4434840"/>
-          </a:xfrm>
-          <a:prstGeom prst="rect">
-            <a:avLst/>
-          </a:prstGeom>
-          <a:noFill/>
-          <a:ln/>
-        </p:spPr>
-        <p:txBody>
-          <a:bodyPr wrap="square" lIns="50800" tIns="50800" rIns="50800" bIns="50800" rtlCol="0" anchor="t"/>
-          <a:lstStyle/>
-          <a:p>
-            <a:pPr marL="0" indent="0">
-              <a:buNone/>
-            </a:pPr>
-            <a:r>
-              <a:rPr lang="en-US" sz="1800" dirty="0">
-                <a:solidFill>
-                  <a:srgbClr val="191919"/>
-                </a:solidFill>
-                <a:latin typeface="Times New Roman" pitchFamily="34" charset="0"/>
-                <a:ea typeface="Times New Roman" pitchFamily="34" charset="-122"/>
-                <a:cs typeface="Times New Roman" pitchFamily="34" charset="-120"/>
-              </a:rPr>
-              <a:t>Self-Learning Activity: Review a real AI failure and identify the ethical issue, source of bias, affected stakeholders and relevant fairness concerns.</a:t>
-            </a:r>
-            <a:endParaRPr lang="en-US" sz="1800" dirty="0"/>
-          </a:p>
-          <a:p>
-            <a:pPr marL="0" indent="0">
-              <a:buNone/>
-            </a:pPr>
-            <a:endParaRPr lang="en-US" sz="1800" dirty="0"/>
-          </a:p>
-          <a:p>
-            <a:pPr marL="0" indent="0">
-              <a:buNone/>
-            </a:pPr>
-            <a:r>
-              <a:rPr lang="en-US" sz="1800" dirty="0">
-                <a:solidFill>
-                  <a:srgbClr val="191919"/>
-                </a:solidFill>
-                <a:latin typeface="Times New Roman" pitchFamily="34" charset="0"/>
-                <a:ea typeface="Times New Roman" pitchFamily="34" charset="-122"/>
-                <a:cs typeface="Times New Roman" pitchFamily="34" charset="-120"/>
-              </a:rPr>
-              <a:t>Team Activity: Analyse an AI application used in daily life and propose measures to make it fairer and safer.</a:t>
-            </a:r>
-            <a:endParaRPr lang="en-US" sz="1800" dirty="0"/>
-          </a:p>
-          <a:p>
-            <a:pPr marL="0" indent="0">
-              <a:buNone/>
-            </a:pPr>
-            <a:endParaRPr lang="en-US" sz="1800" dirty="0"/>
-          </a:p>
-          <a:p>
-            <a:pPr marL="0" indent="0">
-              <a:buNone/>
-            </a:pPr>
-            <a:r>
-              <a:rPr lang="en-US" sz="1800" dirty="0">
-                <a:solidFill>
-                  <a:srgbClr val="191919"/>
-                </a:solidFill>
-                <a:latin typeface="Times New Roman" pitchFamily="34" charset="0"/>
-                <a:ea typeface="Times New Roman" pitchFamily="34" charset="-122"/>
-                <a:cs typeface="Times New Roman" pitchFamily="34" charset="-120"/>
-              </a:rPr>
-              <a:t>This completes Unit I. Next Unit: Unit II - Transparency, Accountability, AI in Surveillance and Privacy.</a:t>
-            </a:r>
-            <a:endParaRPr lang="en-US" sz="1800" dirty="0"/>
-          </a:p>
-        </p:txBody>
-      </p:sp>
-      <p:sp>
-        <p:nvSpPr>
-          <p:cNvPr id="8" name="Text 6"/>
-          <p:cNvSpPr/>
-          <p:nvPr/>
-        </p:nvSpPr>
-        <p:spPr>
-          <a:xfrm>
-            <a:off x="502920" y="6382512"/>
-            <a:ext cx="10744200" cy="320040"/>
-          </a:xfrm>
-          <a:prstGeom prst="rect">
-            <a:avLst/>
-          </a:prstGeom>
-          <a:noFill/>
-          <a:ln/>
-        </p:spPr>
-        <p:txBody>
-          <a:bodyPr wrap="square" lIns="0" tIns="0" rIns="0" bIns="0" rtlCol="0" anchor="ctr"/>
-          <a:lstStyle/>
-          <a:p>
-            <a:pPr marL="0" indent="0">
-              <a:buNone/>
-            </a:pPr>
-            <a:r>
-              <a:rPr lang="en-US" sz="1200" i="1" dirty="0">
-                <a:solidFill>
-                  <a:srgbClr val="595959"/>
-                </a:solidFill>
-                <a:latin typeface="Times New Roman" pitchFamily="34" charset="0"/>
-                <a:ea typeface="Times New Roman" pitchFamily="34" charset="-122"/>
-                <a:cs typeface="Times New Roman" pitchFamily="34" charset="-120"/>
-              </a:rPr>
-              <a:t>Teaching cue: Confirm both Unit I activities are submitted before moving to Unit II next class.</a:t>
-            </a:r>
-            <a:endParaRPr lang="en-US" sz="1200" dirty="0"/>
-          </a:p>
-        </p:txBody>
-      </p:sp>
-      <p:sp>
-        <p:nvSpPr>
-          <p:cNvPr id="9" name="Text 7"/>
-          <p:cNvSpPr/>
-          <p:nvPr/>
-        </p:nvSpPr>
-        <p:spPr>
-          <a:xfrm>
-            <a:off x="11430000" y="6446520"/>
-            <a:ext cx="365760" cy="182880"/>
-          </a:xfrm>
-          <a:prstGeom prst="rect">
-            <a:avLst/>
-          </a:prstGeom>
-          <a:noFill/>
-          <a:ln/>
-        </p:spPr>
-        <p:txBody>
-          <a:bodyPr wrap="square" lIns="0" tIns="0" rIns="0" bIns="0" rtlCol="0" anchor="ctr"/>
-          <a:lstStyle/>
-          <a:p>
-            <a:pPr marL="0" indent="0" algn="ctr">
-              <a:buNone/>
-            </a:pPr>
-            <a:r>
-              <a:rPr lang="en-US" sz="1200" dirty="0">
-                <a:solidFill>
-                  <a:srgbClr val="595959"/>
-                </a:solidFill>
-                <a:latin typeface="Times New Roman" pitchFamily="34" charset="0"/>
-                <a:ea typeface="Times New Roman" pitchFamily="34" charset="-122"/>
-                <a:cs typeface="Times New Roman" pitchFamily="34" charset="-120"/>
-              </a:rPr>
-              <a:t>19</a:t>
             </a:r>
             <a:endParaRPr lang="en-US" sz="1200" dirty="0"/>
           </a:p>
@@ -8015,829 +4520,6 @@
 </file>
 
 <file path=ppt/slides/slide2.xml><?xml version="1.0" encoding="utf-8"?>
-<p:sld xmlns:a="http://schemas.openxmlformats.org/drawingml/2006/main" xmlns:r="http://schemas.openxmlformats.org/officeDocument/2006/relationships" xmlns:p="http://schemas.openxmlformats.org/presentationml/2006/main">
-  <p:cSld name="Slide 2">
-    <p:bg>
-      <p:bgPr>
-        <a:solidFill>
-          <a:srgbClr val="FFFFFF"/>
-        </a:solidFill>
-        <a:effectLst/>
-      </p:bgPr>
-    </p:bg>
-    <p:spTree>
-      <p:nvGrpSpPr>
-        <p:cNvPr id="1" name=""/>
-        <p:cNvGrpSpPr/>
-        <p:nvPr/>
-      </p:nvGrpSpPr>
-      <p:grpSpPr>
-        <a:xfrm>
-          <a:off x="0" y="0"/>
-          <a:ext cx="0" cy="0"/>
-          <a:chOff x="0" y="0"/>
-          <a:chExt cx="0" cy="0"/>
-        </a:xfrm>
-      </p:grpSpPr>
-      <p:sp>
-        <p:nvSpPr>
-          <p:cNvPr id="2" name="Shape 0"/>
-          <p:cNvSpPr/>
-          <p:nvPr/>
-        </p:nvSpPr>
-        <p:spPr>
-          <a:xfrm>
-            <a:off x="0" y="0"/>
-            <a:ext cx="12191695" cy="502920"/>
-          </a:xfrm>
-          <a:prstGeom prst="rect">
-            <a:avLst/>
-          </a:prstGeom>
-          <a:solidFill>
-            <a:srgbClr val="F8FBFF"/>
-          </a:solidFill>
-          <a:ln w="12700">
-            <a:solidFill>
-              <a:srgbClr val="F8FBFF"/>
-            </a:solidFill>
-            <a:prstDash val="solid"/>
-          </a:ln>
-        </p:spPr>
-        <p:txBody>
-          <a:bodyPr/>
-          <a:lstStyle/>
-          <a:p>
-            <a:endParaRPr lang="en-IN"/>
-          </a:p>
-        </p:txBody>
-      </p:sp>
-      <p:sp>
-        <p:nvSpPr>
-          <p:cNvPr id="3" name="Shape 1"/>
-          <p:cNvSpPr/>
-          <p:nvPr/>
-        </p:nvSpPr>
-        <p:spPr>
-          <a:xfrm>
-            <a:off x="0" y="475488"/>
-            <a:ext cx="12191695" cy="27432"/>
-          </a:xfrm>
-          <a:prstGeom prst="rect">
-            <a:avLst/>
-          </a:prstGeom>
-          <a:solidFill>
-            <a:srgbClr val="2E75B6"/>
-          </a:solidFill>
-          <a:ln w="12700">
-            <a:solidFill>
-              <a:srgbClr val="2E75B6"/>
-            </a:solidFill>
-            <a:prstDash val="solid"/>
-          </a:ln>
-        </p:spPr>
-        <p:txBody>
-          <a:bodyPr/>
-          <a:lstStyle/>
-          <a:p>
-            <a:endParaRPr lang="en-IN"/>
-          </a:p>
-        </p:txBody>
-      </p:sp>
-      <p:sp>
-        <p:nvSpPr>
-          <p:cNvPr id="4" name="Text 2"/>
-          <p:cNvSpPr/>
-          <p:nvPr/>
-        </p:nvSpPr>
-        <p:spPr>
-          <a:xfrm>
-            <a:off x="365760" y="73152"/>
-            <a:ext cx="6400800" cy="274320"/>
-          </a:xfrm>
-          <a:prstGeom prst="rect">
-            <a:avLst/>
-          </a:prstGeom>
-          <a:noFill/>
-          <a:ln/>
-        </p:spPr>
-        <p:txBody>
-          <a:bodyPr wrap="square" lIns="0" tIns="0" rIns="0" bIns="0" rtlCol="0" anchor="ctr"/>
-          <a:lstStyle/>
-          <a:p>
-            <a:pPr marL="0" indent="0">
-              <a:buNone/>
-            </a:pPr>
-            <a:r>
-              <a:rPr lang="en-US" sz="1800" b="1" dirty="0">
-                <a:solidFill>
-                  <a:srgbClr val="1F4E79"/>
-                </a:solidFill>
-                <a:latin typeface="Times New Roman" pitchFamily="34" charset="0"/>
-                <a:ea typeface="Times New Roman" pitchFamily="34" charset="-122"/>
-                <a:cs typeface="Times New Roman" pitchFamily="34" charset="-120"/>
-              </a:rPr>
-              <a:t>TCS349: Responsible and Explainable AI</a:t>
-            </a:r>
-            <a:endParaRPr lang="en-US" sz="1800" dirty="0"/>
-          </a:p>
-        </p:txBody>
-      </p:sp>
-      <p:sp>
-        <p:nvSpPr>
-          <p:cNvPr id="5" name="Text 3"/>
-          <p:cNvSpPr/>
-          <p:nvPr/>
-        </p:nvSpPr>
-        <p:spPr>
-          <a:xfrm>
-            <a:off x="8321040" y="82296"/>
-            <a:ext cx="3383280" cy="274320"/>
-          </a:xfrm>
-          <a:prstGeom prst="rect">
-            <a:avLst/>
-          </a:prstGeom>
-          <a:noFill/>
-          <a:ln/>
-        </p:spPr>
-        <p:txBody>
-          <a:bodyPr wrap="square" lIns="0" tIns="0" rIns="0" bIns="0" rtlCol="0" anchor="ctr"/>
-          <a:lstStyle/>
-          <a:p>
-            <a:pPr marL="0" indent="0" algn="r">
-              <a:buNone/>
-            </a:pPr>
-            <a:r>
-              <a:rPr lang="en-US" sz="1600" b="1" dirty="0">
-                <a:solidFill>
-                  <a:srgbClr val="1F4E79"/>
-                </a:solidFill>
-                <a:latin typeface="Times New Roman" pitchFamily="34" charset="0"/>
-                <a:ea typeface="Times New Roman" pitchFamily="34" charset="-122"/>
-                <a:cs typeface="Times New Roman" pitchFamily="34" charset="-120"/>
-              </a:rPr>
-              <a:t>Unit 1 | Lectures 8 &amp; 9</a:t>
-            </a:r>
-            <a:endParaRPr lang="en-US" sz="1600" dirty="0"/>
-          </a:p>
-        </p:txBody>
-      </p:sp>
-      <p:sp>
-        <p:nvSpPr>
-          <p:cNvPr id="6" name="Text 4"/>
-          <p:cNvSpPr/>
-          <p:nvPr/>
-        </p:nvSpPr>
-        <p:spPr>
-          <a:xfrm>
-            <a:off x="502920" y="640080"/>
-            <a:ext cx="11155680" cy="640080"/>
-          </a:xfrm>
-          <a:prstGeom prst="rect">
-            <a:avLst/>
-          </a:prstGeom>
-          <a:noFill/>
-          <a:ln/>
-        </p:spPr>
-        <p:txBody>
-          <a:bodyPr wrap="square" lIns="0" tIns="0" rIns="0" bIns="0" rtlCol="0" anchor="ctr"/>
-          <a:lstStyle/>
-          <a:p>
-            <a:pPr marL="0" indent="0">
-              <a:buNone/>
-            </a:pPr>
-            <a:r>
-              <a:rPr lang="en-US" sz="2300" b="1" dirty="0">
-                <a:solidFill>
-                  <a:srgbClr val="1F4E79"/>
-                </a:solidFill>
-                <a:latin typeface="Times New Roman" pitchFamily="34" charset="0"/>
-                <a:ea typeface="Times New Roman" pitchFamily="34" charset="-122"/>
-                <a:cs typeface="Times New Roman" pitchFamily="34" charset="-120"/>
-              </a:rPr>
-              <a:t>Where are we in Unit I?</a:t>
-            </a:r>
-            <a:endParaRPr lang="en-US" sz="2300" dirty="0"/>
-          </a:p>
-        </p:txBody>
-      </p:sp>
-      <p:sp>
-        <p:nvSpPr>
-          <p:cNvPr id="7" name="Text 5"/>
-          <p:cNvSpPr/>
-          <p:nvPr/>
-        </p:nvSpPr>
-        <p:spPr>
-          <a:xfrm>
-            <a:off x="594360" y="1417320"/>
-            <a:ext cx="10972800" cy="4434840"/>
-          </a:xfrm>
-          <a:prstGeom prst="rect">
-            <a:avLst/>
-          </a:prstGeom>
-          <a:noFill/>
-          <a:ln/>
-        </p:spPr>
-        <p:txBody>
-          <a:bodyPr wrap="square" lIns="50800" tIns="50800" rIns="50800" bIns="50800" rtlCol="0" anchor="t"/>
-          <a:lstStyle/>
-          <a:p>
-            <a:pPr marL="0" indent="0">
-              <a:buNone/>
-            </a:pPr>
-            <a:r>
-              <a:rPr lang="en-US" sz="1800" dirty="0">
-                <a:solidFill>
-                  <a:srgbClr val="191919"/>
-                </a:solidFill>
-                <a:latin typeface="Times New Roman" pitchFamily="34" charset="0"/>
-                <a:ea typeface="Times New Roman" pitchFamily="34" charset="-122"/>
-                <a:cs typeface="Times New Roman" pitchFamily="34" charset="-120"/>
-              </a:rPr>
-              <a:t>Lectures 1-3: AI ethics, morality, law and stakeholder-oriented ethical analysis</a:t>
-            </a:r>
-            <a:endParaRPr lang="en-US" sz="1800" dirty="0"/>
-          </a:p>
-          <a:p>
-            <a:pPr marL="0" indent="0">
-              <a:buNone/>
-            </a:pPr>
-            <a:endParaRPr lang="en-US" sz="1800" dirty="0"/>
-          </a:p>
-          <a:p>
-            <a:pPr marL="0" indent="0">
-              <a:buNone/>
-            </a:pPr>
-            <a:r>
-              <a:rPr lang="en-US" sz="1800" dirty="0">
-                <a:solidFill>
-                  <a:srgbClr val="191919"/>
-                </a:solidFill>
-                <a:latin typeface="Times New Roman" pitchFamily="34" charset="0"/>
-                <a:ea typeface="Times New Roman" pitchFamily="34" charset="-122"/>
-                <a:cs typeface="Times New Roman" pitchFamily="34" charset="-120"/>
-              </a:rPr>
-              <a:t>Lectures 4-5: Data-related bias, algorithmic, interactional, feedback-loop and deployment bias</a:t>
-            </a:r>
-            <a:endParaRPr lang="en-US" sz="1800" dirty="0"/>
-          </a:p>
-          <a:p>
-            <a:pPr marL="0" indent="0">
-              <a:buNone/>
-            </a:pPr>
-            <a:endParaRPr lang="en-US" sz="1800" dirty="0"/>
-          </a:p>
-          <a:p>
-            <a:pPr marL="0" indent="0">
-              <a:buNone/>
-            </a:pPr>
-            <a:r>
-              <a:rPr lang="en-US" sz="1800" dirty="0">
-                <a:solidFill>
-                  <a:srgbClr val="191919"/>
-                </a:solidFill>
-                <a:latin typeface="Times New Roman" pitchFamily="34" charset="0"/>
-                <a:ea typeface="Times New Roman" pitchFamily="34" charset="-122"/>
-                <a:cs typeface="Times New Roman" pitchFamily="34" charset="-120"/>
-              </a:rPr>
-              <a:t>Lectures 6-7: Subgroup analysis, confusion-matrix measures, group and individual fairness</a:t>
-            </a:r>
-            <a:endParaRPr lang="en-US" sz="1800" dirty="0"/>
-          </a:p>
-          <a:p>
-            <a:pPr marL="0" indent="0">
-              <a:buNone/>
-            </a:pPr>
-            <a:endParaRPr lang="en-US" sz="1800" dirty="0"/>
-          </a:p>
-          <a:p>
-            <a:pPr marL="0" indent="0">
-              <a:buNone/>
-            </a:pPr>
-            <a:r>
-              <a:rPr lang="en-US" sz="1800" dirty="0">
-                <a:solidFill>
-                  <a:srgbClr val="191919"/>
-                </a:solidFill>
-                <a:latin typeface="Times New Roman" pitchFamily="34" charset="0"/>
-                <a:ea typeface="Times New Roman" pitchFamily="34" charset="-122"/>
-                <a:cs typeface="Times New Roman" pitchFamily="34" charset="-120"/>
-              </a:rPr>
-              <a:t>Lectures 8 &amp; 9 (Today): Fairness metrics and trade-offs; bias mitigation strategies; imminent and long-term AI risks</a:t>
-            </a:r>
-            <a:endParaRPr lang="en-US" sz="1800" dirty="0"/>
-          </a:p>
-          <a:p>
-            <a:pPr marL="0" indent="0">
-              <a:buNone/>
-            </a:pPr>
-            <a:endParaRPr lang="en-US" sz="1800" dirty="0"/>
-          </a:p>
-          <a:p>
-            <a:pPr marL="0" indent="0">
-              <a:buNone/>
-            </a:pPr>
-            <a:r>
-              <a:rPr lang="en-US" sz="1800" dirty="0">
-                <a:solidFill>
-                  <a:srgbClr val="191919"/>
-                </a:solidFill>
-                <a:latin typeface="Times New Roman" pitchFamily="34" charset="0"/>
-                <a:ea typeface="Times New Roman" pitchFamily="34" charset="-122"/>
-                <a:cs typeface="Times New Roman" pitchFamily="34" charset="-120"/>
-              </a:rPr>
-              <a:t>Lecture 9 completes Unit I and leads into Unit II: Transparency, Accountability, Surveillance and Privacy.</a:t>
-            </a:r>
-            <a:endParaRPr lang="en-US" sz="1800" dirty="0"/>
-          </a:p>
-        </p:txBody>
-      </p:sp>
-      <p:sp>
-        <p:nvSpPr>
-          <p:cNvPr id="8" name="Text 6"/>
-          <p:cNvSpPr/>
-          <p:nvPr/>
-        </p:nvSpPr>
-        <p:spPr>
-          <a:xfrm>
-            <a:off x="502920" y="6382512"/>
-            <a:ext cx="10744200" cy="320040"/>
-          </a:xfrm>
-          <a:prstGeom prst="rect">
-            <a:avLst/>
-          </a:prstGeom>
-          <a:noFill/>
-          <a:ln/>
-        </p:spPr>
-        <p:txBody>
-          <a:bodyPr wrap="square" lIns="0" tIns="0" rIns="0" bIns="0" rtlCol="0" anchor="ctr"/>
-          <a:lstStyle/>
-          <a:p>
-            <a:pPr marL="0" indent="0">
-              <a:buNone/>
-            </a:pPr>
-            <a:r>
-              <a:rPr lang="en-US" sz="1200" i="1" dirty="0">
-                <a:solidFill>
-                  <a:srgbClr val="595959"/>
-                </a:solidFill>
-                <a:latin typeface="Times New Roman" pitchFamily="34" charset="0"/>
-                <a:ea typeface="Times New Roman" pitchFamily="34" charset="-122"/>
-                <a:cs typeface="Times New Roman" pitchFamily="34" charset="-120"/>
-              </a:rPr>
-              <a:t>Teaching cue: Remind students this is the final pair of lectures in Unit I before the unit wraps up.</a:t>
-            </a:r>
-            <a:endParaRPr lang="en-US" sz="1200" dirty="0"/>
-          </a:p>
-        </p:txBody>
-      </p:sp>
-      <p:sp>
-        <p:nvSpPr>
-          <p:cNvPr id="9" name="Text 7"/>
-          <p:cNvSpPr/>
-          <p:nvPr/>
-        </p:nvSpPr>
-        <p:spPr>
-          <a:xfrm>
-            <a:off x="11430000" y="6446520"/>
-            <a:ext cx="365760" cy="182880"/>
-          </a:xfrm>
-          <a:prstGeom prst="rect">
-            <a:avLst/>
-          </a:prstGeom>
-          <a:noFill/>
-          <a:ln/>
-        </p:spPr>
-        <p:txBody>
-          <a:bodyPr wrap="square" lIns="0" tIns="0" rIns="0" bIns="0" rtlCol="0" anchor="ctr"/>
-          <a:lstStyle/>
-          <a:p>
-            <a:pPr marL="0" indent="0" algn="ctr">
-              <a:buNone/>
-            </a:pPr>
-            <a:r>
-              <a:rPr lang="en-US" sz="1200" dirty="0">
-                <a:solidFill>
-                  <a:srgbClr val="595959"/>
-                </a:solidFill>
-                <a:latin typeface="Times New Roman" pitchFamily="34" charset="0"/>
-                <a:ea typeface="Times New Roman" pitchFamily="34" charset="-122"/>
-                <a:cs typeface="Times New Roman" pitchFamily="34" charset="-120"/>
-              </a:rPr>
-              <a:t>2</a:t>
-            </a:r>
-            <a:endParaRPr lang="en-US" sz="1200" dirty="0"/>
-          </a:p>
-        </p:txBody>
-      </p:sp>
-    </p:spTree>
-  </p:cSld>
-  <p:clrMapOvr>
-    <a:masterClrMapping/>
-  </p:clrMapOvr>
-</p:sld>
-</file>
-
-<file path=ppt/slides/slide3.xml><?xml version="1.0" encoding="utf-8"?>
-<p:sld xmlns:a="http://schemas.openxmlformats.org/drawingml/2006/main" xmlns:r="http://schemas.openxmlformats.org/officeDocument/2006/relationships" xmlns:p="http://schemas.openxmlformats.org/presentationml/2006/main">
-  <p:cSld name="Slide 3">
-    <p:bg>
-      <p:bgPr>
-        <a:solidFill>
-          <a:srgbClr val="FFFFFF"/>
-        </a:solidFill>
-        <a:effectLst/>
-      </p:bgPr>
-    </p:bg>
-    <p:spTree>
-      <p:nvGrpSpPr>
-        <p:cNvPr id="1" name=""/>
-        <p:cNvGrpSpPr/>
-        <p:nvPr/>
-      </p:nvGrpSpPr>
-      <p:grpSpPr>
-        <a:xfrm>
-          <a:off x="0" y="0"/>
-          <a:ext cx="0" cy="0"/>
-          <a:chOff x="0" y="0"/>
-          <a:chExt cx="0" cy="0"/>
-        </a:xfrm>
-      </p:grpSpPr>
-      <p:sp>
-        <p:nvSpPr>
-          <p:cNvPr id="2" name="Shape 0"/>
-          <p:cNvSpPr/>
-          <p:nvPr/>
-        </p:nvSpPr>
-        <p:spPr>
-          <a:xfrm>
-            <a:off x="0" y="0"/>
-            <a:ext cx="12191695" cy="502920"/>
-          </a:xfrm>
-          <a:prstGeom prst="rect">
-            <a:avLst/>
-          </a:prstGeom>
-          <a:solidFill>
-            <a:srgbClr val="F8FBFF"/>
-          </a:solidFill>
-          <a:ln w="12700">
-            <a:solidFill>
-              <a:srgbClr val="F8FBFF"/>
-            </a:solidFill>
-            <a:prstDash val="solid"/>
-          </a:ln>
-        </p:spPr>
-        <p:txBody>
-          <a:bodyPr/>
-          <a:lstStyle/>
-          <a:p>
-            <a:endParaRPr lang="en-IN"/>
-          </a:p>
-        </p:txBody>
-      </p:sp>
-      <p:sp>
-        <p:nvSpPr>
-          <p:cNvPr id="3" name="Shape 1"/>
-          <p:cNvSpPr/>
-          <p:nvPr/>
-        </p:nvSpPr>
-        <p:spPr>
-          <a:xfrm>
-            <a:off x="0" y="475488"/>
-            <a:ext cx="12191695" cy="27432"/>
-          </a:xfrm>
-          <a:prstGeom prst="rect">
-            <a:avLst/>
-          </a:prstGeom>
-          <a:solidFill>
-            <a:srgbClr val="2E75B6"/>
-          </a:solidFill>
-          <a:ln w="12700">
-            <a:solidFill>
-              <a:srgbClr val="2E75B6"/>
-            </a:solidFill>
-            <a:prstDash val="solid"/>
-          </a:ln>
-        </p:spPr>
-        <p:txBody>
-          <a:bodyPr/>
-          <a:lstStyle/>
-          <a:p>
-            <a:endParaRPr lang="en-IN"/>
-          </a:p>
-        </p:txBody>
-      </p:sp>
-      <p:sp>
-        <p:nvSpPr>
-          <p:cNvPr id="4" name="Text 2"/>
-          <p:cNvSpPr/>
-          <p:nvPr/>
-        </p:nvSpPr>
-        <p:spPr>
-          <a:xfrm>
-            <a:off x="365760" y="73152"/>
-            <a:ext cx="6400800" cy="274320"/>
-          </a:xfrm>
-          <a:prstGeom prst="rect">
-            <a:avLst/>
-          </a:prstGeom>
-          <a:noFill/>
-          <a:ln/>
-        </p:spPr>
-        <p:txBody>
-          <a:bodyPr wrap="square" lIns="0" tIns="0" rIns="0" bIns="0" rtlCol="0" anchor="ctr"/>
-          <a:lstStyle/>
-          <a:p>
-            <a:pPr marL="0" indent="0">
-              <a:buNone/>
-            </a:pPr>
-            <a:r>
-              <a:rPr lang="en-US" sz="1800" b="1" dirty="0">
-                <a:solidFill>
-                  <a:srgbClr val="1F4E79"/>
-                </a:solidFill>
-                <a:latin typeface="Times New Roman" pitchFamily="34" charset="0"/>
-                <a:ea typeface="Times New Roman" pitchFamily="34" charset="-122"/>
-                <a:cs typeface="Times New Roman" pitchFamily="34" charset="-120"/>
-              </a:rPr>
-              <a:t>TCS349: Responsible and Explainable AI</a:t>
-            </a:r>
-            <a:endParaRPr lang="en-US" sz="1800" dirty="0"/>
-          </a:p>
-        </p:txBody>
-      </p:sp>
-      <p:sp>
-        <p:nvSpPr>
-          <p:cNvPr id="5" name="Text 3"/>
-          <p:cNvSpPr/>
-          <p:nvPr/>
-        </p:nvSpPr>
-        <p:spPr>
-          <a:xfrm>
-            <a:off x="8321040" y="82296"/>
-            <a:ext cx="3383280" cy="274320"/>
-          </a:xfrm>
-          <a:prstGeom prst="rect">
-            <a:avLst/>
-          </a:prstGeom>
-          <a:noFill/>
-          <a:ln/>
-        </p:spPr>
-        <p:txBody>
-          <a:bodyPr wrap="square" lIns="0" tIns="0" rIns="0" bIns="0" rtlCol="0" anchor="ctr"/>
-          <a:lstStyle/>
-          <a:p>
-            <a:pPr marL="0" indent="0" algn="r">
-              <a:buNone/>
-            </a:pPr>
-            <a:r>
-              <a:rPr lang="en-US" sz="1600" b="1" dirty="0">
-                <a:solidFill>
-                  <a:srgbClr val="1F4E79"/>
-                </a:solidFill>
-                <a:latin typeface="Times New Roman" pitchFamily="34" charset="0"/>
-                <a:ea typeface="Times New Roman" pitchFamily="34" charset="-122"/>
-                <a:cs typeface="Times New Roman" pitchFamily="34" charset="-120"/>
-              </a:rPr>
-              <a:t>Unit 1 | Lectures 8 &amp; 9</a:t>
-            </a:r>
-            <a:endParaRPr lang="en-US" sz="1600" dirty="0"/>
-          </a:p>
-        </p:txBody>
-      </p:sp>
-      <p:sp>
-        <p:nvSpPr>
-          <p:cNvPr id="6" name="Text 4"/>
-          <p:cNvSpPr/>
-          <p:nvPr/>
-        </p:nvSpPr>
-        <p:spPr>
-          <a:xfrm>
-            <a:off x="502920" y="640080"/>
-            <a:ext cx="11155680" cy="640080"/>
-          </a:xfrm>
-          <a:prstGeom prst="rect">
-            <a:avLst/>
-          </a:prstGeom>
-          <a:noFill/>
-          <a:ln/>
-        </p:spPr>
-        <p:txBody>
-          <a:bodyPr wrap="square" lIns="0" tIns="0" rIns="0" bIns="0" rtlCol="0" anchor="ctr"/>
-          <a:lstStyle/>
-          <a:p>
-            <a:pPr marL="0" indent="0">
-              <a:buNone/>
-            </a:pPr>
-            <a:r>
-              <a:rPr lang="en-US" sz="2300" b="1" dirty="0">
-                <a:solidFill>
-                  <a:srgbClr val="1F4E79"/>
-                </a:solidFill>
-                <a:latin typeface="Times New Roman" pitchFamily="34" charset="0"/>
-                <a:ea typeface="Times New Roman" pitchFamily="34" charset="-122"/>
-                <a:cs typeface="Times New Roman" pitchFamily="34" charset="-120"/>
-              </a:rPr>
-              <a:t>Lecture Outcomes</a:t>
-            </a:r>
-            <a:endParaRPr lang="en-US" sz="2300" dirty="0"/>
-          </a:p>
-        </p:txBody>
-      </p:sp>
-      <p:sp>
-        <p:nvSpPr>
-          <p:cNvPr id="7" name="Text 5"/>
-          <p:cNvSpPr/>
-          <p:nvPr/>
-        </p:nvSpPr>
-        <p:spPr>
-          <a:xfrm>
-            <a:off x="594360" y="1417320"/>
-            <a:ext cx="10972800" cy="4434840"/>
-          </a:xfrm>
-          <a:prstGeom prst="rect">
-            <a:avLst/>
-          </a:prstGeom>
-          <a:noFill/>
-          <a:ln/>
-        </p:spPr>
-        <p:txBody>
-          <a:bodyPr wrap="square" lIns="50800" tIns="50800" rIns="50800" bIns="50800" rtlCol="0" anchor="t"/>
-          <a:lstStyle/>
-          <a:p>
-            <a:pPr marL="0" indent="0">
-              <a:buNone/>
-            </a:pPr>
-            <a:r>
-              <a:rPr lang="en-US" sz="1800" dirty="0">
-                <a:solidFill>
-                  <a:srgbClr val="191919"/>
-                </a:solidFill>
-                <a:latin typeface="Times New Roman" pitchFamily="34" charset="0"/>
-                <a:ea typeface="Times New Roman" pitchFamily="34" charset="-122"/>
-                <a:cs typeface="Times New Roman" pitchFamily="34" charset="-120"/>
-              </a:rPr>
-              <a:t>Define predictive parity and compare it with equal opportunity and equalized odds.</a:t>
-            </a:r>
-            <a:endParaRPr lang="en-US" sz="1800" dirty="0"/>
-          </a:p>
-          <a:p>
-            <a:pPr marL="0" indent="0">
-              <a:buNone/>
-            </a:pPr>
-            <a:endParaRPr lang="en-US" sz="1800" dirty="0"/>
-          </a:p>
-          <a:p>
-            <a:pPr marL="0" indent="0">
-              <a:buNone/>
-            </a:pPr>
-            <a:r>
-              <a:rPr lang="en-US" sz="1800" dirty="0">
-                <a:solidFill>
-                  <a:srgbClr val="191919"/>
-                </a:solidFill>
-                <a:latin typeface="Times New Roman" pitchFamily="34" charset="0"/>
-                <a:ea typeface="Times New Roman" pitchFamily="34" charset="-122"/>
-                <a:cs typeface="Times New Roman" pitchFamily="34" charset="-120"/>
-              </a:rPr>
-              <a:t>Explain why fairness metrics generally cannot all be satisfied at the same time.</a:t>
-            </a:r>
-            <a:endParaRPr lang="en-US" sz="1800" dirty="0"/>
-          </a:p>
-          <a:p>
-            <a:pPr marL="0" indent="0">
-              <a:buNone/>
-            </a:pPr>
-            <a:endParaRPr lang="en-US" sz="1800" dirty="0"/>
-          </a:p>
-          <a:p>
-            <a:pPr marL="0" indent="0">
-              <a:buNone/>
-            </a:pPr>
-            <a:r>
-              <a:rPr lang="en-US" sz="1800" dirty="0">
-                <a:solidFill>
-                  <a:srgbClr val="191919"/>
-                </a:solidFill>
-                <a:latin typeface="Times New Roman" pitchFamily="34" charset="0"/>
-                <a:ea typeface="Times New Roman" pitchFamily="34" charset="-122"/>
-                <a:cs typeface="Times New Roman" pitchFamily="34" charset="-120"/>
-              </a:rPr>
-              <a:t>Describe pre-processing, in-processing and post-processing bias-mitigation strategies.</a:t>
-            </a:r>
-            <a:endParaRPr lang="en-US" sz="1800" dirty="0"/>
-          </a:p>
-          <a:p>
-            <a:pPr marL="0" indent="0">
-              <a:buNone/>
-            </a:pPr>
-            <a:endParaRPr lang="en-US" sz="1800" dirty="0"/>
-          </a:p>
-          <a:p>
-            <a:pPr marL="0" indent="0">
-              <a:buNone/>
-            </a:pPr>
-            <a:r>
-              <a:rPr lang="en-US" sz="1800" dirty="0">
-                <a:solidFill>
-                  <a:srgbClr val="191919"/>
-                </a:solidFill>
-                <a:latin typeface="Times New Roman" pitchFamily="34" charset="0"/>
-                <a:ea typeface="Times New Roman" pitchFamily="34" charset="-122"/>
-                <a:cs typeface="Times New Roman" pitchFamily="34" charset="-120"/>
-              </a:rPr>
-              <a:t>Identify imminent risks and long-term risks associated with deployed AI models.</a:t>
-            </a:r>
-            <a:endParaRPr lang="en-US" sz="1800" dirty="0"/>
-          </a:p>
-        </p:txBody>
-      </p:sp>
-      <p:sp>
-        <p:nvSpPr>
-          <p:cNvPr id="8" name="Text 6"/>
-          <p:cNvSpPr/>
-          <p:nvPr/>
-        </p:nvSpPr>
-        <p:spPr>
-          <a:xfrm>
-            <a:off x="502920" y="6382512"/>
-            <a:ext cx="10744200" cy="320040"/>
-          </a:xfrm>
-          <a:prstGeom prst="rect">
-            <a:avLst/>
-          </a:prstGeom>
-          <a:noFill/>
-          <a:ln/>
-        </p:spPr>
-        <p:txBody>
-          <a:bodyPr wrap="square" lIns="0" tIns="0" rIns="0" bIns="0" rtlCol="0" anchor="ctr"/>
-          <a:lstStyle/>
-          <a:p>
-            <a:pPr marL="0" indent="0">
-              <a:buNone/>
-            </a:pPr>
-            <a:r>
-              <a:rPr lang="en-US" sz="1200" i="1" dirty="0">
-                <a:solidFill>
-                  <a:srgbClr val="595959"/>
-                </a:solidFill>
-                <a:latin typeface="Times New Roman" pitchFamily="34" charset="0"/>
-                <a:ea typeface="Times New Roman" pitchFamily="34" charset="-122"/>
-                <a:cs typeface="Times New Roman" pitchFamily="34" charset="-120"/>
-              </a:rPr>
-              <a:t>Teaching cue: Tell students today's session moves from measuring unfairness to actively reducing and managing it.</a:t>
-            </a:r>
-            <a:endParaRPr lang="en-US" sz="1200" dirty="0"/>
-          </a:p>
-        </p:txBody>
-      </p:sp>
-      <p:sp>
-        <p:nvSpPr>
-          <p:cNvPr id="9" name="Text 7"/>
-          <p:cNvSpPr/>
-          <p:nvPr/>
-        </p:nvSpPr>
-        <p:spPr>
-          <a:xfrm>
-            <a:off x="11430000" y="6446520"/>
-            <a:ext cx="365760" cy="182880"/>
-          </a:xfrm>
-          <a:prstGeom prst="rect">
-            <a:avLst/>
-          </a:prstGeom>
-          <a:noFill/>
-          <a:ln/>
-        </p:spPr>
-        <p:txBody>
-          <a:bodyPr wrap="square" lIns="0" tIns="0" rIns="0" bIns="0" rtlCol="0" anchor="ctr"/>
-          <a:lstStyle/>
-          <a:p>
-            <a:pPr marL="0" indent="0" algn="ctr">
-              <a:buNone/>
-            </a:pPr>
-            <a:r>
-              <a:rPr lang="en-US" sz="1200" dirty="0">
-                <a:solidFill>
-                  <a:srgbClr val="595959"/>
-                </a:solidFill>
-                <a:latin typeface="Times New Roman" pitchFamily="34" charset="0"/>
-                <a:ea typeface="Times New Roman" pitchFamily="34" charset="-122"/>
-                <a:cs typeface="Times New Roman" pitchFamily="34" charset="-120"/>
-              </a:rPr>
-              <a:t>3</a:t>
-            </a:r>
-            <a:endParaRPr lang="en-US" sz="1200" dirty="0"/>
-          </a:p>
-        </p:txBody>
-      </p:sp>
-    </p:spTree>
-  </p:cSld>
-  <p:clrMapOvr>
-    <a:masterClrMapping/>
-  </p:clrMapOvr>
-</p:sld>
-</file>
-
-<file path=ppt/slides/slide4.xml><?xml version="1.0" encoding="utf-8"?>
 <p:sld xmlns:a="http://schemas.openxmlformats.org/drawingml/2006/main" xmlns:r="http://schemas.openxmlformats.org/officeDocument/2006/relationships" xmlns:p="http://schemas.openxmlformats.org/presentationml/2006/main">
   <p:cSld name="Slide 4">
     <p:bg>
@@ -9153,45 +4835,6 @@
       </p:sp>
       <p:sp>
         <p:nvSpPr>
-          <p:cNvPr id="8" name="Text 6"/>
-          <p:cNvSpPr/>
-          <p:nvPr/>
-        </p:nvSpPr>
-        <p:spPr>
-          <a:xfrm>
-            <a:off x="502920" y="6382512"/>
-            <a:ext cx="10744200" cy="320040"/>
-          </a:xfrm>
-          <a:prstGeom prst="rect">
-            <a:avLst/>
-          </a:prstGeom>
-          <a:noFill/>
-          <a:ln/>
-        </p:spPr>
-        <p:txBody>
-          <a:bodyPr wrap="square" lIns="0" tIns="0" rIns="0" bIns="0" rtlCol="0" anchor="ctr"/>
-          <a:lstStyle/>
-          <a:p>
-            <a:pPr marL="0" indent="0">
-              <a:buNone/>
-            </a:pPr>
-            <a:r>
-              <a:rPr lang="en-US" sz="1200" i="1" dirty="0">
-                <a:solidFill>
-                  <a:srgbClr val="595959"/>
-                </a:solidFill>
-                <a:latin typeface="Times New Roman" pitchFamily="34" charset="0"/>
-                <a:ea typeface="Times New Roman" pitchFamily="34" charset="-122"/>
-                <a:cs typeface="Times New Roman" pitchFamily="34" charset="-120"/>
-              </a:rPr>
-              <a:t>Teaching cue: A 60-second recap is enough — most students saw these definitions in Lecture 7.</a:t>
-            </a:r>
-            <a:endParaRPr lang="en-US" sz="1200" dirty="0"/>
-          </a:p>
-        </p:txBody>
-      </p:sp>
-      <p:sp>
-        <p:nvSpPr>
           <p:cNvPr id="9" name="Text 7"/>
           <p:cNvSpPr/>
           <p:nvPr/>
@@ -9237,7 +4880,7 @@
 </p:sld>
 </file>
 
-<file path=ppt/slides/slide5.xml><?xml version="1.0" encoding="utf-8"?>
+<file path=ppt/slides/slide3.xml><?xml version="1.0" encoding="utf-8"?>
 <p:sld xmlns:a="http://schemas.openxmlformats.org/drawingml/2006/main" xmlns:r="http://schemas.openxmlformats.org/officeDocument/2006/relationships" xmlns:p="http://schemas.openxmlformats.org/presentationml/2006/main">
   <p:cSld name="Slide 5">
     <p:bg>
@@ -9553,45 +5196,6 @@
       </p:sp>
       <p:sp>
         <p:nvSpPr>
-          <p:cNvPr id="8" name="Text 6"/>
-          <p:cNvSpPr/>
-          <p:nvPr/>
-        </p:nvSpPr>
-        <p:spPr>
-          <a:xfrm>
-            <a:off x="502920" y="6382512"/>
-            <a:ext cx="10744200" cy="320040"/>
-          </a:xfrm>
-          <a:prstGeom prst="rect">
-            <a:avLst/>
-          </a:prstGeom>
-          <a:noFill/>
-          <a:ln/>
-        </p:spPr>
-        <p:txBody>
-          <a:bodyPr wrap="square" lIns="0" tIns="0" rIns="0" bIns="0" rtlCol="0" anchor="ctr"/>
-          <a:lstStyle/>
-          <a:p>
-            <a:pPr marL="0" indent="0">
-              <a:buNone/>
-            </a:pPr>
-            <a:r>
-              <a:rPr lang="en-US" sz="1200" i="1" dirty="0">
-                <a:solidFill>
-                  <a:srgbClr val="595959"/>
-                </a:solidFill>
-                <a:latin typeface="Times New Roman" pitchFamily="34" charset="0"/>
-                <a:ea typeface="Times New Roman" pitchFamily="34" charset="-122"/>
-                <a:cs typeface="Times New Roman" pitchFamily="34" charset="-120"/>
-              </a:rPr>
-              <a:t>Teaching cue: Contrast this with TPR — predictive parity looks at predicted positives, TPR looks at actual positives.</a:t>
-            </a:r>
-            <a:endParaRPr lang="en-US" sz="1200" dirty="0"/>
-          </a:p>
-        </p:txBody>
-      </p:sp>
-      <p:sp>
-        <p:nvSpPr>
           <p:cNvPr id="9" name="Text 7"/>
           <p:cNvSpPr/>
           <p:nvPr/>
@@ -9637,7 +5241,7 @@
 </p:sld>
 </file>
 
-<file path=ppt/slides/slide6.xml><?xml version="1.0" encoding="utf-8"?>
+<file path=ppt/slides/slide4.xml><?xml version="1.0" encoding="utf-8"?>
 <p:sld xmlns:a="http://schemas.openxmlformats.org/drawingml/2006/main" xmlns:r="http://schemas.openxmlformats.org/officeDocument/2006/relationships" xmlns:p="http://schemas.openxmlformats.org/presentationml/2006/main">
   <p:cSld name="Slide 6">
     <p:bg>
@@ -10801,45 +6405,6 @@
       </p:graphicFrame>
       <p:sp>
         <p:nvSpPr>
-          <p:cNvPr id="8" name="Text 5"/>
-          <p:cNvSpPr/>
-          <p:nvPr/>
-        </p:nvSpPr>
-        <p:spPr>
-          <a:xfrm>
-            <a:off x="502920" y="6382512"/>
-            <a:ext cx="10744200" cy="320040"/>
-          </a:xfrm>
-          <a:prstGeom prst="rect">
-            <a:avLst/>
-          </a:prstGeom>
-          <a:noFill/>
-          <a:ln/>
-        </p:spPr>
-        <p:txBody>
-          <a:bodyPr wrap="square" lIns="0" tIns="0" rIns="0" bIns="0" rtlCol="0" anchor="ctr"/>
-          <a:lstStyle/>
-          <a:p>
-            <a:pPr marL="0" indent="0">
-              <a:buNone/>
-            </a:pPr>
-            <a:r>
-              <a:rPr lang="en-US" sz="1200" i="1" dirty="0">
-                <a:solidFill>
-                  <a:srgbClr val="595959"/>
-                </a:solidFill>
-                <a:latin typeface="Times New Roman" pitchFamily="34" charset="0"/>
-                <a:ea typeface="Times New Roman" pitchFamily="34" charset="-122"/>
-                <a:cs typeface="Times New Roman" pitchFamily="34" charset="-120"/>
-              </a:rPr>
-              <a:t>Teaching cue: Ask students to restate each question in their own words before moving on.</a:t>
-            </a:r>
-            <a:endParaRPr lang="en-US" sz="1200" dirty="0"/>
-          </a:p>
-        </p:txBody>
-      </p:sp>
-      <p:sp>
-        <p:nvSpPr>
           <p:cNvPr id="9" name="Text 6"/>
           <p:cNvSpPr/>
           <p:nvPr/>
@@ -10885,7 +6450,7 @@
 </p:sld>
 </file>
 
-<file path=ppt/slides/slide7.xml><?xml version="1.0" encoding="utf-8"?>
+<file path=ppt/slides/slide5.xml><?xml version="1.0" encoding="utf-8"?>
 <p:sld xmlns:a="http://schemas.openxmlformats.org/drawingml/2006/main" xmlns:r="http://schemas.openxmlformats.org/officeDocument/2006/relationships" xmlns:p="http://schemas.openxmlformats.org/presentationml/2006/main">
   <p:cSld name="Slide 7">
     <p:bg>
@@ -11201,45 +6766,6 @@
       </p:sp>
       <p:sp>
         <p:nvSpPr>
-          <p:cNvPr id="8" name="Text 6"/>
-          <p:cNvSpPr/>
-          <p:nvPr/>
-        </p:nvSpPr>
-        <p:spPr>
-          <a:xfrm>
-            <a:off x="502920" y="6382512"/>
-            <a:ext cx="10744200" cy="320040"/>
-          </a:xfrm>
-          <a:prstGeom prst="rect">
-            <a:avLst/>
-          </a:prstGeom>
-          <a:noFill/>
-          <a:ln/>
-        </p:spPr>
-        <p:txBody>
-          <a:bodyPr wrap="square" lIns="0" tIns="0" rIns="0" bIns="0" rtlCol="0" anchor="ctr"/>
-          <a:lstStyle/>
-          <a:p>
-            <a:pPr marL="0" indent="0">
-              <a:buNone/>
-            </a:pPr>
-            <a:r>
-              <a:rPr lang="en-US" sz="1200" i="1" dirty="0">
-                <a:solidFill>
-                  <a:srgbClr val="595959"/>
-                </a:solidFill>
-                <a:latin typeface="Times New Roman" pitchFamily="34" charset="0"/>
-                <a:ea typeface="Times New Roman" pitchFamily="34" charset="-122"/>
-                <a:cs typeface="Times New Roman" pitchFamily="34" charset="-120"/>
-              </a:rPr>
-              <a:t>Teaching cue: This is a conceptual result — a full proof is not required, just the intuition that trade-offs are unavoidable.</a:t>
-            </a:r>
-            <a:endParaRPr lang="en-US" sz="1200" dirty="0"/>
-          </a:p>
-        </p:txBody>
-      </p:sp>
-      <p:sp>
-        <p:nvSpPr>
           <p:cNvPr id="9" name="Text 7"/>
           <p:cNvSpPr/>
           <p:nvPr/>
@@ -11285,7 +6811,7 @@
 </p:sld>
 </file>
 
-<file path=ppt/slides/slide8.xml><?xml version="1.0" encoding="utf-8"?>
+<file path=ppt/slides/slide6.xml><?xml version="1.0" encoding="utf-8"?>
 <p:sld xmlns:a="http://schemas.openxmlformats.org/drawingml/2006/main" xmlns:r="http://schemas.openxmlformats.org/officeDocument/2006/relationships" xmlns:p="http://schemas.openxmlformats.org/presentationml/2006/main">
   <p:cSld name="Slide 8">
     <p:bg>
@@ -12746,45 +8272,6 @@
       </p:graphicFrame>
       <p:sp>
         <p:nvSpPr>
-          <p:cNvPr id="8" name="Text 6"/>
-          <p:cNvSpPr/>
-          <p:nvPr/>
-        </p:nvSpPr>
-        <p:spPr>
-          <a:xfrm>
-            <a:off x="502920" y="6382512"/>
-            <a:ext cx="10744200" cy="320040"/>
-          </a:xfrm>
-          <a:prstGeom prst="rect">
-            <a:avLst/>
-          </a:prstGeom>
-          <a:noFill/>
-          <a:ln/>
-        </p:spPr>
-        <p:txBody>
-          <a:bodyPr wrap="square" lIns="0" tIns="0" rIns="0" bIns="0" rtlCol="0" anchor="ctr"/>
-          <a:lstStyle/>
-          <a:p>
-            <a:pPr marL="0" indent="0">
-              <a:buNone/>
-            </a:pPr>
-            <a:r>
-              <a:rPr lang="en-US" sz="1200" i="1" dirty="0">
-                <a:solidFill>
-                  <a:srgbClr val="595959"/>
-                </a:solidFill>
-                <a:latin typeface="Times New Roman" pitchFamily="34" charset="0"/>
-                <a:ea typeface="Times New Roman" pitchFamily="34" charset="-122"/>
-                <a:cs typeface="Times New Roman" pitchFamily="34" charset="-120"/>
-              </a:rPr>
-              <a:t>Teaching cue: Even with equal FPR, neither equal opportunity nor predictive parity holds — that is the trade-off in action.</a:t>
-            </a:r>
-            <a:endParaRPr lang="en-US" sz="1200" dirty="0"/>
-          </a:p>
-        </p:txBody>
-      </p:sp>
-      <p:sp>
-        <p:nvSpPr>
           <p:cNvPr id="10" name="Text 7"/>
           <p:cNvSpPr/>
           <p:nvPr/>
@@ -12830,7 +8317,7 @@
 </p:sld>
 </file>
 
-<file path=ppt/slides/slide9.xml><?xml version="1.0" encoding="utf-8"?>
+<file path=ppt/slides/slide7.xml><?xml version="1.0" encoding="utf-8"?>
 <p:sld xmlns:a="http://schemas.openxmlformats.org/drawingml/2006/main" xmlns:r="http://schemas.openxmlformats.org/officeDocument/2006/relationships" xmlns:p="http://schemas.openxmlformats.org/presentationml/2006/main">
   <p:cSld name="Slide 9">
     <p:bg>
@@ -13168,14 +8655,14 @@
       </p:sp>
       <p:sp>
         <p:nvSpPr>
-          <p:cNvPr id="8" name="Text 6"/>
+          <p:cNvPr id="9" name="Text 7"/>
           <p:cNvSpPr/>
           <p:nvPr/>
         </p:nvSpPr>
         <p:spPr>
           <a:xfrm>
-            <a:off x="502920" y="6382512"/>
-            <a:ext cx="10744200" cy="320040"/>
+            <a:off x="11430000" y="6446520"/>
+            <a:ext cx="365760" cy="182880"/>
           </a:xfrm>
           <a:prstGeom prst="rect">
             <a:avLst/>
@@ -13187,21 +8674,343 @@
           <a:bodyPr wrap="square" lIns="0" tIns="0" rIns="0" bIns="0" rtlCol="0" anchor="ctr"/>
           <a:lstStyle/>
           <a:p>
+            <a:pPr marL="0" indent="0" algn="ctr">
+              <a:buNone/>
+            </a:pPr>
+            <a:r>
+              <a:rPr lang="en-US" sz="1200" dirty="0">
+                <a:solidFill>
+                  <a:srgbClr val="595959"/>
+                </a:solidFill>
+                <a:latin typeface="Times New Roman" pitchFamily="34" charset="0"/>
+                <a:ea typeface="Times New Roman" pitchFamily="34" charset="-122"/>
+                <a:cs typeface="Times New Roman" pitchFamily="34" charset="-120"/>
+              </a:rPr>
+              <a:t>9</a:t>
+            </a:r>
+            <a:endParaRPr lang="en-US" sz="1200" dirty="0"/>
+          </a:p>
+        </p:txBody>
+      </p:sp>
+    </p:spTree>
+  </p:cSld>
+  <p:clrMapOvr>
+    <a:masterClrMapping/>
+  </p:clrMapOvr>
+</p:sld>
+</file>
+
+<file path=ppt/slides/slide8.xml><?xml version="1.0" encoding="utf-8"?>
+<p:sld xmlns:a="http://schemas.openxmlformats.org/drawingml/2006/main" xmlns:r="http://schemas.openxmlformats.org/officeDocument/2006/relationships" xmlns:p="http://schemas.openxmlformats.org/presentationml/2006/main">
+  <p:cSld name="Slide 10">
+    <p:bg>
+      <p:bgPr>
+        <a:solidFill>
+          <a:srgbClr val="FFFFFF"/>
+        </a:solidFill>
+        <a:effectLst/>
+      </p:bgPr>
+    </p:bg>
+    <p:spTree>
+      <p:nvGrpSpPr>
+        <p:cNvPr id="1" name=""/>
+        <p:cNvGrpSpPr/>
+        <p:nvPr/>
+      </p:nvGrpSpPr>
+      <p:grpSpPr>
+        <a:xfrm>
+          <a:off x="0" y="0"/>
+          <a:ext cx="0" cy="0"/>
+          <a:chOff x="0" y="0"/>
+          <a:chExt cx="0" cy="0"/>
+        </a:xfrm>
+      </p:grpSpPr>
+      <p:sp>
+        <p:nvSpPr>
+          <p:cNvPr id="2" name="Shape 0"/>
+          <p:cNvSpPr/>
+          <p:nvPr/>
+        </p:nvSpPr>
+        <p:spPr>
+          <a:xfrm>
+            <a:off x="0" y="0"/>
+            <a:ext cx="12191695" cy="502920"/>
+          </a:xfrm>
+          <a:prstGeom prst="rect">
+            <a:avLst/>
+          </a:prstGeom>
+          <a:solidFill>
+            <a:srgbClr val="F8FBFF"/>
+          </a:solidFill>
+          <a:ln w="12700">
+            <a:solidFill>
+              <a:srgbClr val="F8FBFF"/>
+            </a:solidFill>
+            <a:prstDash val="solid"/>
+          </a:ln>
+        </p:spPr>
+        <p:txBody>
+          <a:bodyPr/>
+          <a:lstStyle/>
+          <a:p>
+            <a:endParaRPr lang="en-IN"/>
+          </a:p>
+        </p:txBody>
+      </p:sp>
+      <p:sp>
+        <p:nvSpPr>
+          <p:cNvPr id="3" name="Shape 1"/>
+          <p:cNvSpPr/>
+          <p:nvPr/>
+        </p:nvSpPr>
+        <p:spPr>
+          <a:xfrm>
+            <a:off x="0" y="475488"/>
+            <a:ext cx="12191695" cy="27432"/>
+          </a:xfrm>
+          <a:prstGeom prst="rect">
+            <a:avLst/>
+          </a:prstGeom>
+          <a:solidFill>
+            <a:srgbClr val="2E75B6"/>
+          </a:solidFill>
+          <a:ln w="12700">
+            <a:solidFill>
+              <a:srgbClr val="2E75B6"/>
+            </a:solidFill>
+            <a:prstDash val="solid"/>
+          </a:ln>
+        </p:spPr>
+        <p:txBody>
+          <a:bodyPr/>
+          <a:lstStyle/>
+          <a:p>
+            <a:endParaRPr lang="en-IN"/>
+          </a:p>
+        </p:txBody>
+      </p:sp>
+      <p:sp>
+        <p:nvSpPr>
+          <p:cNvPr id="4" name="Text 2"/>
+          <p:cNvSpPr/>
+          <p:nvPr/>
+        </p:nvSpPr>
+        <p:spPr>
+          <a:xfrm>
+            <a:off x="365760" y="73152"/>
+            <a:ext cx="6400800" cy="274320"/>
+          </a:xfrm>
+          <a:prstGeom prst="rect">
+            <a:avLst/>
+          </a:prstGeom>
+          <a:noFill/>
+          <a:ln/>
+        </p:spPr>
+        <p:txBody>
+          <a:bodyPr wrap="square" lIns="0" tIns="0" rIns="0" bIns="0" rtlCol="0" anchor="ctr"/>
+          <a:lstStyle/>
+          <a:p>
             <a:pPr marL="0" indent="0">
               <a:buNone/>
             </a:pPr>
             <a:r>
-              <a:rPr lang="en-US" sz="1200" i="1" dirty="0">
-                <a:solidFill>
-                  <a:srgbClr val="595959"/>
-                </a:solidFill>
-                <a:latin typeface="Times New Roman" pitchFamily="34" charset="0"/>
-                <a:ea typeface="Times New Roman" pitchFamily="34" charset="-122"/>
-                <a:cs typeface="Times New Roman" pitchFamily="34" charset="-120"/>
-              </a:rPr>
-              <a:t>Teaching cue: Ask students to name a fourth domain and argue for the metric that fits it best.</a:t>
-            </a:r>
-            <a:endParaRPr lang="en-US" sz="1200" dirty="0"/>
+              <a:rPr lang="en-US" sz="1800" b="1" dirty="0">
+                <a:solidFill>
+                  <a:srgbClr val="1F4E79"/>
+                </a:solidFill>
+                <a:latin typeface="Times New Roman" pitchFamily="34" charset="0"/>
+                <a:ea typeface="Times New Roman" pitchFamily="34" charset="-122"/>
+                <a:cs typeface="Times New Roman" pitchFamily="34" charset="-120"/>
+              </a:rPr>
+              <a:t>TCS349: Responsible and Explainable AI</a:t>
+            </a:r>
+            <a:endParaRPr lang="en-US" sz="1800" dirty="0"/>
+          </a:p>
+        </p:txBody>
+      </p:sp>
+      <p:sp>
+        <p:nvSpPr>
+          <p:cNvPr id="5" name="Text 3"/>
+          <p:cNvSpPr/>
+          <p:nvPr/>
+        </p:nvSpPr>
+        <p:spPr>
+          <a:xfrm>
+            <a:off x="8321040" y="82296"/>
+            <a:ext cx="3383280" cy="274320"/>
+          </a:xfrm>
+          <a:prstGeom prst="rect">
+            <a:avLst/>
+          </a:prstGeom>
+          <a:noFill/>
+          <a:ln/>
+        </p:spPr>
+        <p:txBody>
+          <a:bodyPr wrap="square" lIns="0" tIns="0" rIns="0" bIns="0" rtlCol="0" anchor="ctr"/>
+          <a:lstStyle/>
+          <a:p>
+            <a:pPr marL="0" indent="0" algn="r">
+              <a:buNone/>
+            </a:pPr>
+            <a:r>
+              <a:rPr lang="en-US" sz="1600" b="1" dirty="0">
+                <a:solidFill>
+                  <a:srgbClr val="1F4E79"/>
+                </a:solidFill>
+                <a:latin typeface="Times New Roman" pitchFamily="34" charset="0"/>
+                <a:ea typeface="Times New Roman" pitchFamily="34" charset="-122"/>
+                <a:cs typeface="Times New Roman" pitchFamily="34" charset="-120"/>
+              </a:rPr>
+              <a:t>Unit 1 | Lecture 8</a:t>
+            </a:r>
+            <a:endParaRPr lang="en-US" sz="1600" dirty="0"/>
+          </a:p>
+        </p:txBody>
+      </p:sp>
+      <p:sp>
+        <p:nvSpPr>
+          <p:cNvPr id="6" name="Text 4"/>
+          <p:cNvSpPr/>
+          <p:nvPr/>
+        </p:nvSpPr>
+        <p:spPr>
+          <a:xfrm>
+            <a:off x="502920" y="640080"/>
+            <a:ext cx="11155680" cy="640080"/>
+          </a:xfrm>
+          <a:prstGeom prst="rect">
+            <a:avLst/>
+          </a:prstGeom>
+          <a:noFill/>
+          <a:ln/>
+        </p:spPr>
+        <p:txBody>
+          <a:bodyPr wrap="square" lIns="0" tIns="0" rIns="0" bIns="0" rtlCol="0" anchor="ctr"/>
+          <a:lstStyle/>
+          <a:p>
+            <a:pPr marL="0" indent="0">
+              <a:buNone/>
+            </a:pPr>
+            <a:r>
+              <a:rPr lang="en-US" sz="2300" b="1" dirty="0">
+                <a:solidFill>
+                  <a:srgbClr val="1F4E79"/>
+                </a:solidFill>
+                <a:latin typeface="Times New Roman" pitchFamily="34" charset="0"/>
+                <a:ea typeface="Times New Roman" pitchFamily="34" charset="-122"/>
+                <a:cs typeface="Times New Roman" pitchFamily="34" charset="-120"/>
+              </a:rPr>
+              <a:t>7. Lecture 8 Summary</a:t>
+            </a:r>
+            <a:endParaRPr lang="en-US" sz="2300" dirty="0"/>
+          </a:p>
+        </p:txBody>
+      </p:sp>
+      <p:sp>
+        <p:nvSpPr>
+          <p:cNvPr id="7" name="Text 5"/>
+          <p:cNvSpPr/>
+          <p:nvPr/>
+        </p:nvSpPr>
+        <p:spPr>
+          <a:xfrm>
+            <a:off x="594360" y="1417320"/>
+            <a:ext cx="10972800" cy="4434840"/>
+          </a:xfrm>
+          <a:prstGeom prst="rect">
+            <a:avLst/>
+          </a:prstGeom>
+          <a:noFill/>
+          <a:ln/>
+        </p:spPr>
+        <p:txBody>
+          <a:bodyPr wrap="square" lIns="50800" tIns="50800" rIns="50800" bIns="50800" rtlCol="0" anchor="t"/>
+          <a:lstStyle/>
+          <a:p>
+            <a:pPr marL="0" indent="0">
+              <a:buNone/>
+            </a:pPr>
+            <a:r>
+              <a:rPr lang="en-US" sz="1800" dirty="0">
+                <a:solidFill>
+                  <a:srgbClr val="191919"/>
+                </a:solidFill>
+                <a:latin typeface="Times New Roman" pitchFamily="34" charset="0"/>
+                <a:ea typeface="Times New Roman" pitchFamily="34" charset="-122"/>
+                <a:cs typeface="Times New Roman" pitchFamily="34" charset="-120"/>
+              </a:rPr>
+              <a:t>Equal opportunity, equalized odds and predictive parity each formalise a different notion of equal treatment.</a:t>
+            </a:r>
+            <a:endParaRPr lang="en-US" sz="1800" dirty="0"/>
+          </a:p>
+          <a:p>
+            <a:pPr marL="0" indent="0">
+              <a:buNone/>
+            </a:pPr>
+            <a:endParaRPr lang="en-US" sz="1800" dirty="0"/>
+          </a:p>
+          <a:p>
+            <a:pPr marL="0" indent="0">
+              <a:buNone/>
+            </a:pPr>
+            <a:r>
+              <a:rPr lang="en-US" sz="1800" dirty="0">
+                <a:solidFill>
+                  <a:srgbClr val="191919"/>
+                </a:solidFill>
+                <a:latin typeface="Times New Roman" pitchFamily="34" charset="0"/>
+                <a:ea typeface="Times New Roman" pitchFamily="34" charset="-122"/>
+                <a:cs typeface="Times New Roman" pitchFamily="34" charset="-120"/>
+              </a:rPr>
+              <a:t>These metrics generally cannot all be satisfied at once when groups have different base rates.</a:t>
+            </a:r>
+            <a:endParaRPr lang="en-US" sz="1800" dirty="0"/>
+          </a:p>
+          <a:p>
+            <a:pPr marL="0" indent="0">
+              <a:buNone/>
+            </a:pPr>
+            <a:endParaRPr lang="en-US" sz="1800" dirty="0"/>
+          </a:p>
+          <a:p>
+            <a:pPr marL="0" indent="0">
+              <a:buNone/>
+            </a:pPr>
+            <a:r>
+              <a:rPr lang="en-US" sz="1800" dirty="0">
+                <a:solidFill>
+                  <a:srgbClr val="191919"/>
+                </a:solidFill>
+                <a:latin typeface="Times New Roman" pitchFamily="34" charset="0"/>
+                <a:ea typeface="Times New Roman" pitchFamily="34" charset="-122"/>
+                <a:cs typeface="Times New Roman" pitchFamily="34" charset="-120"/>
+              </a:rPr>
+              <a:t>Metric choice should reflect the real-world cost of false positives versus false negatives in that application.</a:t>
+            </a:r>
+            <a:endParaRPr lang="en-US" sz="1800" dirty="0"/>
+          </a:p>
+          <a:p>
+            <a:pPr marL="0" indent="0">
+              <a:buNone/>
+            </a:pPr>
+            <a:endParaRPr lang="en-US" sz="1800" dirty="0"/>
+          </a:p>
+          <a:p>
+            <a:pPr marL="0" indent="0">
+              <a:buNone/>
+            </a:pPr>
+            <a:r>
+              <a:rPr lang="en-US" sz="1800" dirty="0">
+                <a:solidFill>
+                  <a:srgbClr val="191919"/>
+                </a:solidFill>
+                <a:latin typeface="Times New Roman" pitchFamily="34" charset="0"/>
+                <a:ea typeface="Times New Roman" pitchFamily="34" charset="-122"/>
+                <a:cs typeface="Times New Roman" pitchFamily="34" charset="-120"/>
+              </a:rPr>
+              <a:t>Next: how to actually reduce the bias these metrics reveal - bias-mitigation strategies.</a:t>
+            </a:r>
+            <a:endParaRPr lang="en-US" sz="1800" dirty="0"/>
           </a:p>
         </p:txBody>
       </p:sp>
@@ -13238,7 +9047,1192 @@
                 <a:ea typeface="Times New Roman" pitchFamily="34" charset="-122"/>
                 <a:cs typeface="Times New Roman" pitchFamily="34" charset="-120"/>
               </a:rPr>
-              <a:t>9</a:t>
+              <a:t>10</a:t>
+            </a:r>
+            <a:endParaRPr lang="en-US" sz="1200" dirty="0"/>
+          </a:p>
+        </p:txBody>
+      </p:sp>
+    </p:spTree>
+  </p:cSld>
+  <p:clrMapOvr>
+    <a:masterClrMapping/>
+  </p:clrMapOvr>
+</p:sld>
+</file>
+
+<file path=ppt/slides/slide9.xml><?xml version="1.0" encoding="utf-8"?>
+<p:sld xmlns:a="http://schemas.openxmlformats.org/drawingml/2006/main" xmlns:r="http://schemas.openxmlformats.org/officeDocument/2006/relationships" xmlns:p="http://schemas.openxmlformats.org/presentationml/2006/main">
+  <p:cSld name="Slide 11">
+    <p:bg>
+      <p:bgPr>
+        <a:solidFill>
+          <a:srgbClr val="FFFFFF"/>
+        </a:solidFill>
+        <a:effectLst/>
+      </p:bgPr>
+    </p:bg>
+    <p:spTree>
+      <p:nvGrpSpPr>
+        <p:cNvPr id="1" name=""/>
+        <p:cNvGrpSpPr/>
+        <p:nvPr/>
+      </p:nvGrpSpPr>
+      <p:grpSpPr>
+        <a:xfrm>
+          <a:off x="0" y="0"/>
+          <a:ext cx="0" cy="0"/>
+          <a:chOff x="0" y="0"/>
+          <a:chExt cx="0" cy="0"/>
+        </a:xfrm>
+      </p:grpSpPr>
+      <p:sp>
+        <p:nvSpPr>
+          <p:cNvPr id="2" name="Shape 0"/>
+          <p:cNvSpPr/>
+          <p:nvPr/>
+        </p:nvSpPr>
+        <p:spPr>
+          <a:xfrm>
+            <a:off x="0" y="0"/>
+            <a:ext cx="12191695" cy="502920"/>
+          </a:xfrm>
+          <a:prstGeom prst="rect">
+            <a:avLst/>
+          </a:prstGeom>
+          <a:solidFill>
+            <a:srgbClr val="F8FBFF"/>
+          </a:solidFill>
+          <a:ln w="12700">
+            <a:solidFill>
+              <a:srgbClr val="F8FBFF"/>
+            </a:solidFill>
+            <a:prstDash val="solid"/>
+          </a:ln>
+        </p:spPr>
+        <p:txBody>
+          <a:bodyPr/>
+          <a:lstStyle/>
+          <a:p>
+            <a:endParaRPr lang="en-IN"/>
+          </a:p>
+        </p:txBody>
+      </p:sp>
+      <p:sp>
+        <p:nvSpPr>
+          <p:cNvPr id="3" name="Shape 1"/>
+          <p:cNvSpPr/>
+          <p:nvPr/>
+        </p:nvSpPr>
+        <p:spPr>
+          <a:xfrm>
+            <a:off x="0" y="475488"/>
+            <a:ext cx="12191695" cy="27432"/>
+          </a:xfrm>
+          <a:prstGeom prst="rect">
+            <a:avLst/>
+          </a:prstGeom>
+          <a:solidFill>
+            <a:srgbClr val="2E75B6"/>
+          </a:solidFill>
+          <a:ln w="12700">
+            <a:solidFill>
+              <a:srgbClr val="2E75B6"/>
+            </a:solidFill>
+            <a:prstDash val="solid"/>
+          </a:ln>
+        </p:spPr>
+        <p:txBody>
+          <a:bodyPr/>
+          <a:lstStyle/>
+          <a:p>
+            <a:endParaRPr lang="en-IN"/>
+          </a:p>
+        </p:txBody>
+      </p:sp>
+      <p:sp>
+        <p:nvSpPr>
+          <p:cNvPr id="4" name="Text 2"/>
+          <p:cNvSpPr/>
+          <p:nvPr/>
+        </p:nvSpPr>
+        <p:spPr>
+          <a:xfrm>
+            <a:off x="365760" y="73152"/>
+            <a:ext cx="6400800" cy="274320"/>
+          </a:xfrm>
+          <a:prstGeom prst="rect">
+            <a:avLst/>
+          </a:prstGeom>
+          <a:noFill/>
+          <a:ln/>
+        </p:spPr>
+        <p:txBody>
+          <a:bodyPr wrap="square" lIns="0" tIns="0" rIns="0" bIns="0" rtlCol="0" anchor="ctr"/>
+          <a:lstStyle/>
+          <a:p>
+            <a:pPr marL="0" indent="0">
+              <a:buNone/>
+            </a:pPr>
+            <a:r>
+              <a:rPr lang="en-US" sz="1800" b="1" dirty="0">
+                <a:solidFill>
+                  <a:srgbClr val="1F4E79"/>
+                </a:solidFill>
+                <a:latin typeface="Times New Roman" pitchFamily="34" charset="0"/>
+                <a:ea typeface="Times New Roman" pitchFamily="34" charset="-122"/>
+                <a:cs typeface="Times New Roman" pitchFamily="34" charset="-120"/>
+              </a:rPr>
+              <a:t>TCS349: Responsible and Explainable AI</a:t>
+            </a:r>
+            <a:endParaRPr lang="en-US" sz="1800" dirty="0"/>
+          </a:p>
+        </p:txBody>
+      </p:sp>
+      <p:sp>
+        <p:nvSpPr>
+          <p:cNvPr id="5" name="Text 3"/>
+          <p:cNvSpPr/>
+          <p:nvPr/>
+        </p:nvSpPr>
+        <p:spPr>
+          <a:xfrm>
+            <a:off x="8321040" y="82296"/>
+            <a:ext cx="3383280" cy="274320"/>
+          </a:xfrm>
+          <a:prstGeom prst="rect">
+            <a:avLst/>
+          </a:prstGeom>
+          <a:noFill/>
+          <a:ln/>
+        </p:spPr>
+        <p:txBody>
+          <a:bodyPr wrap="square" lIns="0" tIns="0" rIns="0" bIns="0" rtlCol="0" anchor="ctr"/>
+          <a:lstStyle/>
+          <a:p>
+            <a:pPr marL="0" indent="0" algn="r">
+              <a:buNone/>
+            </a:pPr>
+            <a:r>
+              <a:rPr lang="en-US" sz="1600" b="1" dirty="0">
+                <a:solidFill>
+                  <a:srgbClr val="1F4E79"/>
+                </a:solidFill>
+                <a:latin typeface="Times New Roman" pitchFamily="34" charset="0"/>
+                <a:ea typeface="Times New Roman" pitchFamily="34" charset="-122"/>
+                <a:cs typeface="Times New Roman" pitchFamily="34" charset="-120"/>
+              </a:rPr>
+              <a:t>Unit 1 | Lecture 9</a:t>
+            </a:r>
+            <a:endParaRPr lang="en-US" sz="1600" dirty="0"/>
+          </a:p>
+        </p:txBody>
+      </p:sp>
+      <p:sp>
+        <p:nvSpPr>
+          <p:cNvPr id="6" name="Text 4"/>
+          <p:cNvSpPr/>
+          <p:nvPr/>
+        </p:nvSpPr>
+        <p:spPr>
+          <a:xfrm>
+            <a:off x="502920" y="640080"/>
+            <a:ext cx="11155680" cy="640080"/>
+          </a:xfrm>
+          <a:prstGeom prst="rect">
+            <a:avLst/>
+          </a:prstGeom>
+          <a:noFill/>
+          <a:ln/>
+        </p:spPr>
+        <p:txBody>
+          <a:bodyPr wrap="square" lIns="0" tIns="0" rIns="0" bIns="0" rtlCol="0" anchor="ctr"/>
+          <a:lstStyle/>
+          <a:p>
+            <a:pPr marL="0" indent="0">
+              <a:buNone/>
+            </a:pPr>
+            <a:r>
+              <a:rPr lang="en-US" sz="2300" b="1" dirty="0">
+                <a:solidFill>
+                  <a:srgbClr val="1F4E79"/>
+                </a:solidFill>
+                <a:latin typeface="Times New Roman" pitchFamily="34" charset="0"/>
+                <a:ea typeface="Times New Roman" pitchFamily="34" charset="-122"/>
+                <a:cs typeface="Times New Roman" pitchFamily="34" charset="-120"/>
+              </a:rPr>
+              <a:t>8. Bias Mitigation - Three Intervention Points</a:t>
+            </a:r>
+            <a:endParaRPr lang="en-US" sz="2300" dirty="0"/>
+          </a:p>
+        </p:txBody>
+      </p:sp>
+      <p:sp>
+        <p:nvSpPr>
+          <p:cNvPr id="7" name="Text 5"/>
+          <p:cNvSpPr/>
+          <p:nvPr/>
+        </p:nvSpPr>
+        <p:spPr>
+          <a:xfrm>
+            <a:off x="594360" y="1417320"/>
+            <a:ext cx="10972800" cy="548640"/>
+          </a:xfrm>
+          <a:prstGeom prst="rect">
+            <a:avLst/>
+          </a:prstGeom>
+          <a:noFill/>
+          <a:ln/>
+        </p:spPr>
+        <p:txBody>
+          <a:bodyPr wrap="square" lIns="50800" tIns="50800" rIns="50800" bIns="50800" rtlCol="0" anchor="t"/>
+          <a:lstStyle/>
+          <a:p>
+            <a:pPr marL="0" indent="0">
+              <a:buNone/>
+            </a:pPr>
+            <a:r>
+              <a:rPr lang="en-US" sz="1800" dirty="0">
+                <a:solidFill>
+                  <a:srgbClr val="191919"/>
+                </a:solidFill>
+                <a:latin typeface="Times New Roman" pitchFamily="34" charset="0"/>
+                <a:ea typeface="Times New Roman" pitchFamily="34" charset="-122"/>
+                <a:cs typeface="Times New Roman" pitchFamily="34" charset="-120"/>
+              </a:rPr>
+              <a:t>Bias-mitigation techniques intervene at one of three stages of the ML pipeline:</a:t>
+            </a:r>
+            <a:endParaRPr lang="en-US" sz="1800" dirty="0"/>
+          </a:p>
+        </p:txBody>
+      </p:sp>
+      <p:graphicFrame>
+        <p:nvGraphicFramePr>
+          <p:cNvPr id="12" name="Table 0"/>
+          <p:cNvGraphicFramePr>
+            <a:graphicFrameLocks noGrp="1"/>
+          </p:cNvGraphicFramePr>
+          <p:nvPr>
+            <p:extLst>
+              <p:ext uri="{D42A27DB-BD31-4B8C-83A1-F6EECF244321}">
+                <p14:modId xmlns:p14="http://schemas.microsoft.com/office/powerpoint/2010/main" val="1579011935"/>
+              </p:ext>
+            </p:extLst>
+          </p:nvPr>
+        </p:nvGraphicFramePr>
+        <p:xfrm>
+          <a:off x="502920" y="2103120"/>
+          <a:ext cx="11155680" cy="3566160"/>
+        </p:xfrm>
+        <a:graphic>
+          <a:graphicData uri="http://schemas.openxmlformats.org/drawingml/2006/table">
+            <a:tbl>
+              <a:tblPr/>
+              <a:tblGrid>
+                <a:gridCol w="2377440">
+                  <a:extLst>
+                    <a:ext uri="{9D8B030D-6E8A-4147-A177-3AD203B41FA5}">
+                      <a16:colId xmlns:a16="http://schemas.microsoft.com/office/drawing/2014/main" val="20000"/>
+                    </a:ext>
+                  </a:extLst>
+                </a:gridCol>
+                <a:gridCol w="3931920">
+                  <a:extLst>
+                    <a:ext uri="{9D8B030D-6E8A-4147-A177-3AD203B41FA5}">
+                      <a16:colId xmlns:a16="http://schemas.microsoft.com/office/drawing/2014/main" val="20001"/>
+                    </a:ext>
+                  </a:extLst>
+                </a:gridCol>
+                <a:gridCol w="4846320">
+                  <a:extLst>
+                    <a:ext uri="{9D8B030D-6E8A-4147-A177-3AD203B41FA5}">
+                      <a16:colId xmlns:a16="http://schemas.microsoft.com/office/drawing/2014/main" val="20002"/>
+                    </a:ext>
+                  </a:extLst>
+                </a:gridCol>
+              </a:tblGrid>
+              <a:tr h="891540">
+                <a:tc>
+                  <a:txBody>
+                    <a:bodyPr/>
+                    <a:lstStyle/>
+                    <a:p>
+                      <a:pPr marL="0" indent="0" algn="ctr">
+                        <a:buNone/>
+                      </a:pPr>
+                      <a:r>
+                        <a:rPr lang="en-US" sz="1800" b="1" dirty="0">
+                          <a:solidFill>
+                            <a:srgbClr val="FFFFFF"/>
+                          </a:solidFill>
+                          <a:latin typeface="Times New Roman" pitchFamily="34" charset="0"/>
+                          <a:ea typeface="Times New Roman" pitchFamily="34" charset="-122"/>
+                          <a:cs typeface="Times New Roman" pitchFamily="34" charset="-120"/>
+                        </a:rPr>
+                        <a:t>Stage</a:t>
+                      </a:r>
+                      <a:endParaRPr lang="en-US" sz="1800" dirty="0">
+                        <a:latin typeface="Times New Roman" charset="0"/>
+                        <a:ea typeface="Times New Roman" charset="0"/>
+                        <a:cs typeface="Times New Roman" charset="0"/>
+                      </a:endParaRPr>
+                    </a:p>
+                  </a:txBody>
+                  <a:tcPr anchor="ctr">
+                    <a:lnL w="25400" cap="flat" cmpd="sng" algn="ctr">
+                      <a:solidFill>
+                        <a:srgbClr val="FFFFFF"/>
+                      </a:solidFill>
+                      <a:prstDash val="solid"/>
+                      <a:round/>
+                      <a:headEnd type="none" w="med" len="med"/>
+                      <a:tailEnd type="none" w="med" len="med"/>
+                    </a:lnL>
+                    <a:lnR w="25400" cap="flat" cmpd="sng" algn="ctr">
+                      <a:solidFill>
+                        <a:srgbClr val="FFFFFF"/>
+                      </a:solidFill>
+                      <a:prstDash val="solid"/>
+                      <a:round/>
+                      <a:headEnd type="none" w="med" len="med"/>
+                      <a:tailEnd type="none" w="med" len="med"/>
+                    </a:lnR>
+                    <a:lnT w="25400" cap="flat" cmpd="sng" algn="ctr">
+                      <a:solidFill>
+                        <a:srgbClr val="FFFFFF"/>
+                      </a:solidFill>
+                      <a:prstDash val="solid"/>
+                      <a:round/>
+                      <a:headEnd type="none" w="med" len="med"/>
+                      <a:tailEnd type="none" w="med" len="med"/>
+                    </a:lnT>
+                    <a:lnB w="25400" cap="flat" cmpd="sng" algn="ctr">
+                      <a:solidFill>
+                        <a:srgbClr val="FFFFFF"/>
+                      </a:solidFill>
+                      <a:prstDash val="solid"/>
+                      <a:round/>
+                      <a:headEnd type="none" w="med" len="med"/>
+                      <a:tailEnd type="none" w="med" len="med"/>
+                    </a:lnB>
+                    <a:solidFill>
+                      <a:srgbClr val="1F4E79"/>
+                    </a:solidFill>
+                  </a:tcPr>
+                </a:tc>
+                <a:tc>
+                  <a:txBody>
+                    <a:bodyPr/>
+                    <a:lstStyle/>
+                    <a:p>
+                      <a:pPr marL="0" indent="0" algn="ctr">
+                        <a:buNone/>
+                      </a:pPr>
+                      <a:r>
+                        <a:rPr lang="en-US" sz="1800" b="1" dirty="0">
+                          <a:solidFill>
+                            <a:srgbClr val="FFFFFF"/>
+                          </a:solidFill>
+                          <a:latin typeface="Times New Roman" pitchFamily="34" charset="0"/>
+                          <a:ea typeface="Times New Roman" pitchFamily="34" charset="-122"/>
+                          <a:cs typeface="Times New Roman" pitchFamily="34" charset="-120"/>
+                        </a:rPr>
+                        <a:t>When It Intervenes</a:t>
+                      </a:r>
+                      <a:endParaRPr lang="en-US" sz="1800" dirty="0">
+                        <a:latin typeface="Times New Roman" charset="0"/>
+                        <a:ea typeface="Times New Roman" charset="0"/>
+                        <a:cs typeface="Times New Roman" charset="0"/>
+                      </a:endParaRPr>
+                    </a:p>
+                  </a:txBody>
+                  <a:tcPr anchor="ctr">
+                    <a:lnL w="25400" cap="flat" cmpd="sng" algn="ctr">
+                      <a:solidFill>
+                        <a:srgbClr val="FFFFFF"/>
+                      </a:solidFill>
+                      <a:prstDash val="solid"/>
+                      <a:round/>
+                      <a:headEnd type="none" w="med" len="med"/>
+                      <a:tailEnd type="none" w="med" len="med"/>
+                    </a:lnL>
+                    <a:lnR w="25400" cap="flat" cmpd="sng" algn="ctr">
+                      <a:solidFill>
+                        <a:srgbClr val="FFFFFF"/>
+                      </a:solidFill>
+                      <a:prstDash val="solid"/>
+                      <a:round/>
+                      <a:headEnd type="none" w="med" len="med"/>
+                      <a:tailEnd type="none" w="med" len="med"/>
+                    </a:lnR>
+                    <a:lnT w="25400" cap="flat" cmpd="sng" algn="ctr">
+                      <a:solidFill>
+                        <a:srgbClr val="FFFFFF"/>
+                      </a:solidFill>
+                      <a:prstDash val="solid"/>
+                      <a:round/>
+                      <a:headEnd type="none" w="med" len="med"/>
+                      <a:tailEnd type="none" w="med" len="med"/>
+                    </a:lnT>
+                    <a:lnB w="25400" cap="flat" cmpd="sng" algn="ctr">
+                      <a:solidFill>
+                        <a:srgbClr val="FFFFFF"/>
+                      </a:solidFill>
+                      <a:prstDash val="solid"/>
+                      <a:round/>
+                      <a:headEnd type="none" w="med" len="med"/>
+                      <a:tailEnd type="none" w="med" len="med"/>
+                    </a:lnB>
+                    <a:solidFill>
+                      <a:srgbClr val="1F4E79"/>
+                    </a:solidFill>
+                  </a:tcPr>
+                </a:tc>
+                <a:tc>
+                  <a:txBody>
+                    <a:bodyPr/>
+                    <a:lstStyle/>
+                    <a:p>
+                      <a:pPr marL="0" indent="0" algn="ctr">
+                        <a:buNone/>
+                      </a:pPr>
+                      <a:r>
+                        <a:rPr lang="en-US" sz="1800" b="1" dirty="0">
+                          <a:solidFill>
+                            <a:srgbClr val="FFFFFF"/>
+                          </a:solidFill>
+                          <a:latin typeface="Times New Roman" pitchFamily="34" charset="0"/>
+                          <a:ea typeface="Times New Roman" pitchFamily="34" charset="-122"/>
+                          <a:cs typeface="Times New Roman" pitchFamily="34" charset="-120"/>
+                        </a:rPr>
+                        <a:t>Example Technique</a:t>
+                      </a:r>
+                      <a:endParaRPr lang="en-US" sz="1800" dirty="0">
+                        <a:latin typeface="Times New Roman" charset="0"/>
+                        <a:ea typeface="Times New Roman" charset="0"/>
+                        <a:cs typeface="Times New Roman" charset="0"/>
+                      </a:endParaRPr>
+                    </a:p>
+                  </a:txBody>
+                  <a:tcPr anchor="ctr">
+                    <a:lnL w="25400" cap="flat" cmpd="sng" algn="ctr">
+                      <a:solidFill>
+                        <a:srgbClr val="FFFFFF"/>
+                      </a:solidFill>
+                      <a:prstDash val="solid"/>
+                      <a:round/>
+                      <a:headEnd type="none" w="med" len="med"/>
+                      <a:tailEnd type="none" w="med" len="med"/>
+                    </a:lnL>
+                    <a:lnR w="25400" cap="flat" cmpd="sng" algn="ctr">
+                      <a:solidFill>
+                        <a:srgbClr val="FFFFFF"/>
+                      </a:solidFill>
+                      <a:prstDash val="solid"/>
+                      <a:round/>
+                      <a:headEnd type="none" w="med" len="med"/>
+                      <a:tailEnd type="none" w="med" len="med"/>
+                    </a:lnR>
+                    <a:lnT w="25400" cap="flat" cmpd="sng" algn="ctr">
+                      <a:solidFill>
+                        <a:srgbClr val="FFFFFF"/>
+                      </a:solidFill>
+                      <a:prstDash val="solid"/>
+                      <a:round/>
+                      <a:headEnd type="none" w="med" len="med"/>
+                      <a:tailEnd type="none" w="med" len="med"/>
+                    </a:lnT>
+                    <a:lnB w="25400" cap="flat" cmpd="sng" algn="ctr">
+                      <a:solidFill>
+                        <a:srgbClr val="FFFFFF"/>
+                      </a:solidFill>
+                      <a:prstDash val="solid"/>
+                      <a:round/>
+                      <a:headEnd type="none" w="med" len="med"/>
+                      <a:tailEnd type="none" w="med" len="med"/>
+                    </a:lnB>
+                    <a:solidFill>
+                      <a:srgbClr val="1F4E79"/>
+                    </a:solidFill>
+                  </a:tcPr>
+                </a:tc>
+                <a:extLst>
+                  <a:ext uri="{0D108BD9-81ED-4DB2-BD59-A6C34878D82A}">
+                    <a16:rowId xmlns:a16="http://schemas.microsoft.com/office/drawing/2014/main" val="10000"/>
+                  </a:ext>
+                </a:extLst>
+              </a:tr>
+              <a:tr h="891540">
+                <a:tc>
+                  <a:txBody>
+                    <a:bodyPr/>
+                    <a:lstStyle/>
+                    <a:p>
+                      <a:pPr marL="0" indent="0" algn="ctr">
+                        <a:buNone/>
+                      </a:pPr>
+                      <a:r>
+                        <a:rPr lang="en-US" sz="1800" b="1" dirty="0">
+                          <a:solidFill>
+                            <a:srgbClr val="FFFFFF"/>
+                          </a:solidFill>
+                          <a:latin typeface="Times New Roman" pitchFamily="34" charset="0"/>
+                          <a:ea typeface="Times New Roman" pitchFamily="34" charset="-122"/>
+                          <a:cs typeface="Times New Roman" pitchFamily="34" charset="-120"/>
+                        </a:rPr>
+                        <a:t>Pre-processing</a:t>
+                      </a:r>
+                      <a:endParaRPr lang="en-US" sz="1800" dirty="0">
+                        <a:latin typeface="Times New Roman" charset="0"/>
+                        <a:ea typeface="Times New Roman" charset="0"/>
+                        <a:cs typeface="Times New Roman" charset="0"/>
+                      </a:endParaRPr>
+                    </a:p>
+                  </a:txBody>
+                  <a:tcPr anchor="ctr">
+                    <a:lnL w="25400" cap="flat" cmpd="sng" algn="ctr">
+                      <a:solidFill>
+                        <a:srgbClr val="FFFFFF"/>
+                      </a:solidFill>
+                      <a:prstDash val="solid"/>
+                      <a:round/>
+                      <a:headEnd type="none" w="med" len="med"/>
+                      <a:tailEnd type="none" w="med" len="med"/>
+                    </a:lnL>
+                    <a:lnR w="25400" cap="flat" cmpd="sng" algn="ctr">
+                      <a:solidFill>
+                        <a:srgbClr val="FFFFFF"/>
+                      </a:solidFill>
+                      <a:prstDash val="solid"/>
+                      <a:round/>
+                      <a:headEnd type="none" w="med" len="med"/>
+                      <a:tailEnd type="none" w="med" len="med"/>
+                    </a:lnR>
+                    <a:lnT w="25400" cap="flat" cmpd="sng" algn="ctr">
+                      <a:solidFill>
+                        <a:srgbClr val="FFFFFF"/>
+                      </a:solidFill>
+                      <a:prstDash val="solid"/>
+                      <a:round/>
+                      <a:headEnd type="none" w="med" len="med"/>
+                      <a:tailEnd type="none" w="med" len="med"/>
+                    </a:lnT>
+                    <a:lnB w="25400" cap="flat" cmpd="sng" algn="ctr">
+                      <a:solidFill>
+                        <a:srgbClr val="FFFFFF"/>
+                      </a:solidFill>
+                      <a:prstDash val="solid"/>
+                      <a:round/>
+                      <a:headEnd type="none" w="med" len="med"/>
+                      <a:tailEnd type="none" w="med" len="med"/>
+                    </a:lnB>
+                    <a:solidFill>
+                      <a:srgbClr val="1F4E79"/>
+                    </a:solidFill>
+                  </a:tcPr>
+                </a:tc>
+                <a:tc>
+                  <a:txBody>
+                    <a:bodyPr/>
+                    <a:lstStyle/>
+                    <a:p>
+                      <a:pPr marL="0" indent="0" algn="ctr">
+                        <a:buNone/>
+                      </a:pPr>
+                      <a:r>
+                        <a:rPr lang="en-US" sz="1800" dirty="0">
+                          <a:solidFill>
+                            <a:srgbClr val="191919"/>
+                          </a:solidFill>
+                          <a:latin typeface="Times New Roman" pitchFamily="34" charset="0"/>
+                          <a:ea typeface="Times New Roman" pitchFamily="34" charset="-122"/>
+                          <a:cs typeface="Times New Roman" pitchFamily="34" charset="-120"/>
+                        </a:rPr>
+                        <a:t>Before training, on the data</a:t>
+                      </a:r>
+                      <a:endParaRPr lang="en-US" sz="1800" dirty="0">
+                        <a:latin typeface="Times New Roman" charset="0"/>
+                        <a:ea typeface="Times New Roman" charset="0"/>
+                        <a:cs typeface="Times New Roman" charset="0"/>
+                      </a:endParaRPr>
+                    </a:p>
+                  </a:txBody>
+                  <a:tcPr anchor="ctr">
+                    <a:lnL w="25400" cap="flat" cmpd="sng" algn="ctr">
+                      <a:solidFill>
+                        <a:srgbClr val="FFFFFF"/>
+                      </a:solidFill>
+                      <a:prstDash val="solid"/>
+                      <a:round/>
+                      <a:headEnd type="none" w="med" len="med"/>
+                      <a:tailEnd type="none" w="med" len="med"/>
+                    </a:lnL>
+                    <a:lnR w="25400" cap="flat" cmpd="sng" algn="ctr">
+                      <a:solidFill>
+                        <a:srgbClr val="FFFFFF"/>
+                      </a:solidFill>
+                      <a:prstDash val="solid"/>
+                      <a:round/>
+                      <a:headEnd type="none" w="med" len="med"/>
+                      <a:tailEnd type="none" w="med" len="med"/>
+                    </a:lnR>
+                    <a:lnT w="25400" cap="flat" cmpd="sng" algn="ctr">
+                      <a:solidFill>
+                        <a:srgbClr val="FFFFFF"/>
+                      </a:solidFill>
+                      <a:prstDash val="solid"/>
+                      <a:round/>
+                      <a:headEnd type="none" w="med" len="med"/>
+                      <a:tailEnd type="none" w="med" len="med"/>
+                    </a:lnT>
+                    <a:lnB w="25400" cap="flat" cmpd="sng" algn="ctr">
+                      <a:solidFill>
+                        <a:srgbClr val="FFFFFF"/>
+                      </a:solidFill>
+                      <a:prstDash val="solid"/>
+                      <a:round/>
+                      <a:headEnd type="none" w="med" len="med"/>
+                      <a:tailEnd type="none" w="med" len="med"/>
+                    </a:lnB>
+                    <a:solidFill>
+                      <a:srgbClr val="EEF5FF"/>
+                    </a:solidFill>
+                  </a:tcPr>
+                </a:tc>
+                <a:tc>
+                  <a:txBody>
+                    <a:bodyPr/>
+                    <a:lstStyle/>
+                    <a:p>
+                      <a:pPr marL="0" indent="0" algn="ctr">
+                        <a:buNone/>
+                      </a:pPr>
+                      <a:r>
+                        <a:rPr lang="en-US" sz="1800" dirty="0">
+                          <a:solidFill>
+                            <a:srgbClr val="191919"/>
+                          </a:solidFill>
+                          <a:latin typeface="Times New Roman" pitchFamily="34" charset="0"/>
+                          <a:ea typeface="Times New Roman" pitchFamily="34" charset="-122"/>
+                          <a:cs typeface="Times New Roman" pitchFamily="34" charset="-120"/>
+                        </a:rPr>
+                        <a:t>Reweighing, resampling</a:t>
+                      </a:r>
+                      <a:endParaRPr lang="en-US" sz="1800" dirty="0">
+                        <a:latin typeface="Times New Roman" charset="0"/>
+                        <a:ea typeface="Times New Roman" charset="0"/>
+                        <a:cs typeface="Times New Roman" charset="0"/>
+                      </a:endParaRPr>
+                    </a:p>
+                  </a:txBody>
+                  <a:tcPr anchor="ctr">
+                    <a:lnL w="25400" cap="flat" cmpd="sng" algn="ctr">
+                      <a:solidFill>
+                        <a:srgbClr val="FFFFFF"/>
+                      </a:solidFill>
+                      <a:prstDash val="solid"/>
+                      <a:round/>
+                      <a:headEnd type="none" w="med" len="med"/>
+                      <a:tailEnd type="none" w="med" len="med"/>
+                    </a:lnL>
+                    <a:lnR w="25400" cap="flat" cmpd="sng" algn="ctr">
+                      <a:solidFill>
+                        <a:srgbClr val="FFFFFF"/>
+                      </a:solidFill>
+                      <a:prstDash val="solid"/>
+                      <a:round/>
+                      <a:headEnd type="none" w="med" len="med"/>
+                      <a:tailEnd type="none" w="med" len="med"/>
+                    </a:lnR>
+                    <a:lnT w="25400" cap="flat" cmpd="sng" algn="ctr">
+                      <a:solidFill>
+                        <a:srgbClr val="FFFFFF"/>
+                      </a:solidFill>
+                      <a:prstDash val="solid"/>
+                      <a:round/>
+                      <a:headEnd type="none" w="med" len="med"/>
+                      <a:tailEnd type="none" w="med" len="med"/>
+                    </a:lnT>
+                    <a:lnB w="25400" cap="flat" cmpd="sng" algn="ctr">
+                      <a:solidFill>
+                        <a:srgbClr val="FFFFFF"/>
+                      </a:solidFill>
+                      <a:prstDash val="solid"/>
+                      <a:round/>
+                      <a:headEnd type="none" w="med" len="med"/>
+                      <a:tailEnd type="none" w="med" len="med"/>
+                    </a:lnB>
+                    <a:solidFill>
+                      <a:srgbClr val="EEF5FF"/>
+                    </a:solidFill>
+                  </a:tcPr>
+                </a:tc>
+                <a:extLst>
+                  <a:ext uri="{0D108BD9-81ED-4DB2-BD59-A6C34878D82A}">
+                    <a16:rowId xmlns:a16="http://schemas.microsoft.com/office/drawing/2014/main" val="10001"/>
+                  </a:ext>
+                </a:extLst>
+              </a:tr>
+              <a:tr h="891540">
+                <a:tc>
+                  <a:txBody>
+                    <a:bodyPr/>
+                    <a:lstStyle/>
+                    <a:p>
+                      <a:pPr marL="0" indent="0" algn="ctr">
+                        <a:buNone/>
+                      </a:pPr>
+                      <a:r>
+                        <a:rPr lang="en-US" sz="1800" b="1" dirty="0">
+                          <a:solidFill>
+                            <a:srgbClr val="FFFFFF"/>
+                          </a:solidFill>
+                          <a:latin typeface="Times New Roman" pitchFamily="34" charset="0"/>
+                          <a:ea typeface="Times New Roman" pitchFamily="34" charset="-122"/>
+                          <a:cs typeface="Times New Roman" pitchFamily="34" charset="-120"/>
+                        </a:rPr>
+                        <a:t>In-processing</a:t>
+                      </a:r>
+                      <a:endParaRPr lang="en-US" sz="1800" dirty="0">
+                        <a:latin typeface="Times New Roman" charset="0"/>
+                        <a:ea typeface="Times New Roman" charset="0"/>
+                        <a:cs typeface="Times New Roman" charset="0"/>
+                      </a:endParaRPr>
+                    </a:p>
+                  </a:txBody>
+                  <a:tcPr anchor="ctr">
+                    <a:lnL w="25400" cap="flat" cmpd="sng" algn="ctr">
+                      <a:solidFill>
+                        <a:srgbClr val="FFFFFF"/>
+                      </a:solidFill>
+                      <a:prstDash val="solid"/>
+                      <a:round/>
+                      <a:headEnd type="none" w="med" len="med"/>
+                      <a:tailEnd type="none" w="med" len="med"/>
+                    </a:lnL>
+                    <a:lnR w="25400" cap="flat" cmpd="sng" algn="ctr">
+                      <a:solidFill>
+                        <a:srgbClr val="FFFFFF"/>
+                      </a:solidFill>
+                      <a:prstDash val="solid"/>
+                      <a:round/>
+                      <a:headEnd type="none" w="med" len="med"/>
+                      <a:tailEnd type="none" w="med" len="med"/>
+                    </a:lnR>
+                    <a:lnT w="25400" cap="flat" cmpd="sng" algn="ctr">
+                      <a:solidFill>
+                        <a:srgbClr val="FFFFFF"/>
+                      </a:solidFill>
+                      <a:prstDash val="solid"/>
+                      <a:round/>
+                      <a:headEnd type="none" w="med" len="med"/>
+                      <a:tailEnd type="none" w="med" len="med"/>
+                    </a:lnT>
+                    <a:lnB w="25400" cap="flat" cmpd="sng" algn="ctr">
+                      <a:solidFill>
+                        <a:srgbClr val="FFFFFF"/>
+                      </a:solidFill>
+                      <a:prstDash val="solid"/>
+                      <a:round/>
+                      <a:headEnd type="none" w="med" len="med"/>
+                      <a:tailEnd type="none" w="med" len="med"/>
+                    </a:lnB>
+                    <a:solidFill>
+                      <a:srgbClr val="1F4E79"/>
+                    </a:solidFill>
+                  </a:tcPr>
+                </a:tc>
+                <a:tc>
+                  <a:txBody>
+                    <a:bodyPr/>
+                    <a:lstStyle/>
+                    <a:p>
+                      <a:pPr marL="0" indent="0" algn="ctr">
+                        <a:buNone/>
+                      </a:pPr>
+                      <a:r>
+                        <a:rPr lang="en-US" sz="1800" dirty="0">
+                          <a:solidFill>
+                            <a:srgbClr val="191919"/>
+                          </a:solidFill>
+                          <a:latin typeface="Times New Roman" pitchFamily="34" charset="0"/>
+                          <a:ea typeface="Times New Roman" pitchFamily="34" charset="-122"/>
+                          <a:cs typeface="Times New Roman" pitchFamily="34" charset="-120"/>
+                        </a:rPr>
+                        <a:t>During training, in the objective</a:t>
+                      </a:r>
+                      <a:endParaRPr lang="en-US" sz="1800" dirty="0">
+                        <a:latin typeface="Times New Roman" charset="0"/>
+                        <a:ea typeface="Times New Roman" charset="0"/>
+                        <a:cs typeface="Times New Roman" charset="0"/>
+                      </a:endParaRPr>
+                    </a:p>
+                  </a:txBody>
+                  <a:tcPr anchor="ctr">
+                    <a:lnL w="25400" cap="flat" cmpd="sng" algn="ctr">
+                      <a:solidFill>
+                        <a:srgbClr val="FFFFFF"/>
+                      </a:solidFill>
+                      <a:prstDash val="solid"/>
+                      <a:round/>
+                      <a:headEnd type="none" w="med" len="med"/>
+                      <a:tailEnd type="none" w="med" len="med"/>
+                    </a:lnL>
+                    <a:lnR w="25400" cap="flat" cmpd="sng" algn="ctr">
+                      <a:solidFill>
+                        <a:srgbClr val="FFFFFF"/>
+                      </a:solidFill>
+                      <a:prstDash val="solid"/>
+                      <a:round/>
+                      <a:headEnd type="none" w="med" len="med"/>
+                      <a:tailEnd type="none" w="med" len="med"/>
+                    </a:lnR>
+                    <a:lnT w="25400" cap="flat" cmpd="sng" algn="ctr">
+                      <a:solidFill>
+                        <a:srgbClr val="FFFFFF"/>
+                      </a:solidFill>
+                      <a:prstDash val="solid"/>
+                      <a:round/>
+                      <a:headEnd type="none" w="med" len="med"/>
+                      <a:tailEnd type="none" w="med" len="med"/>
+                    </a:lnT>
+                    <a:lnB w="25400" cap="flat" cmpd="sng" algn="ctr">
+                      <a:solidFill>
+                        <a:srgbClr val="FFFFFF"/>
+                      </a:solidFill>
+                      <a:prstDash val="solid"/>
+                      <a:round/>
+                      <a:headEnd type="none" w="med" len="med"/>
+                      <a:tailEnd type="none" w="med" len="med"/>
+                    </a:lnB>
+                    <a:solidFill>
+                      <a:srgbClr val="F3F8FF"/>
+                    </a:solidFill>
+                  </a:tcPr>
+                </a:tc>
+                <a:tc>
+                  <a:txBody>
+                    <a:bodyPr/>
+                    <a:lstStyle/>
+                    <a:p>
+                      <a:pPr marL="0" indent="0" algn="ctr">
+                        <a:buNone/>
+                      </a:pPr>
+                      <a:r>
+                        <a:rPr lang="en-US" sz="1800" dirty="0">
+                          <a:solidFill>
+                            <a:srgbClr val="191919"/>
+                          </a:solidFill>
+                          <a:latin typeface="Times New Roman" pitchFamily="34" charset="0"/>
+                          <a:ea typeface="Times New Roman" pitchFamily="34" charset="-122"/>
+                          <a:cs typeface="Times New Roman" pitchFamily="34" charset="-120"/>
+                        </a:rPr>
+                        <a:t>Constrained optimisation, adversarial debiasing</a:t>
+                      </a:r>
+                      <a:endParaRPr lang="en-US" sz="1800" dirty="0">
+                        <a:latin typeface="Times New Roman" charset="0"/>
+                        <a:ea typeface="Times New Roman" charset="0"/>
+                        <a:cs typeface="Times New Roman" charset="0"/>
+                      </a:endParaRPr>
+                    </a:p>
+                  </a:txBody>
+                  <a:tcPr anchor="ctr">
+                    <a:lnL w="25400" cap="flat" cmpd="sng" algn="ctr">
+                      <a:solidFill>
+                        <a:srgbClr val="FFFFFF"/>
+                      </a:solidFill>
+                      <a:prstDash val="solid"/>
+                      <a:round/>
+                      <a:headEnd type="none" w="med" len="med"/>
+                      <a:tailEnd type="none" w="med" len="med"/>
+                    </a:lnL>
+                    <a:lnR w="25400" cap="flat" cmpd="sng" algn="ctr">
+                      <a:solidFill>
+                        <a:srgbClr val="FFFFFF"/>
+                      </a:solidFill>
+                      <a:prstDash val="solid"/>
+                      <a:round/>
+                      <a:headEnd type="none" w="med" len="med"/>
+                      <a:tailEnd type="none" w="med" len="med"/>
+                    </a:lnR>
+                    <a:lnT w="25400" cap="flat" cmpd="sng" algn="ctr">
+                      <a:solidFill>
+                        <a:srgbClr val="FFFFFF"/>
+                      </a:solidFill>
+                      <a:prstDash val="solid"/>
+                      <a:round/>
+                      <a:headEnd type="none" w="med" len="med"/>
+                      <a:tailEnd type="none" w="med" len="med"/>
+                    </a:lnT>
+                    <a:lnB w="25400" cap="flat" cmpd="sng" algn="ctr">
+                      <a:solidFill>
+                        <a:srgbClr val="FFFFFF"/>
+                      </a:solidFill>
+                      <a:prstDash val="solid"/>
+                      <a:round/>
+                      <a:headEnd type="none" w="med" len="med"/>
+                      <a:tailEnd type="none" w="med" len="med"/>
+                    </a:lnB>
+                    <a:solidFill>
+                      <a:srgbClr val="F3F8FF"/>
+                    </a:solidFill>
+                  </a:tcPr>
+                </a:tc>
+                <a:extLst>
+                  <a:ext uri="{0D108BD9-81ED-4DB2-BD59-A6C34878D82A}">
+                    <a16:rowId xmlns:a16="http://schemas.microsoft.com/office/drawing/2014/main" val="10002"/>
+                  </a:ext>
+                </a:extLst>
+              </a:tr>
+              <a:tr h="891540">
+                <a:tc>
+                  <a:txBody>
+                    <a:bodyPr/>
+                    <a:lstStyle/>
+                    <a:p>
+                      <a:pPr marL="0" indent="0" algn="ctr">
+                        <a:buNone/>
+                      </a:pPr>
+                      <a:r>
+                        <a:rPr lang="en-US" sz="1800" b="1" dirty="0">
+                          <a:solidFill>
+                            <a:srgbClr val="FFFFFF"/>
+                          </a:solidFill>
+                          <a:latin typeface="Times New Roman" pitchFamily="34" charset="0"/>
+                          <a:ea typeface="Times New Roman" pitchFamily="34" charset="-122"/>
+                          <a:cs typeface="Times New Roman" pitchFamily="34" charset="-120"/>
+                        </a:rPr>
+                        <a:t>Post-processing</a:t>
+                      </a:r>
+                      <a:endParaRPr lang="en-US" sz="1800" dirty="0">
+                        <a:latin typeface="Times New Roman" charset="0"/>
+                        <a:ea typeface="Times New Roman" charset="0"/>
+                        <a:cs typeface="Times New Roman" charset="0"/>
+                      </a:endParaRPr>
+                    </a:p>
+                  </a:txBody>
+                  <a:tcPr anchor="ctr">
+                    <a:lnL w="25400" cap="flat" cmpd="sng" algn="ctr">
+                      <a:solidFill>
+                        <a:srgbClr val="FFFFFF"/>
+                      </a:solidFill>
+                      <a:prstDash val="solid"/>
+                      <a:round/>
+                      <a:headEnd type="none" w="med" len="med"/>
+                      <a:tailEnd type="none" w="med" len="med"/>
+                    </a:lnL>
+                    <a:lnR w="25400" cap="flat" cmpd="sng" algn="ctr">
+                      <a:solidFill>
+                        <a:srgbClr val="FFFFFF"/>
+                      </a:solidFill>
+                      <a:prstDash val="solid"/>
+                      <a:round/>
+                      <a:headEnd type="none" w="med" len="med"/>
+                      <a:tailEnd type="none" w="med" len="med"/>
+                    </a:lnR>
+                    <a:lnT w="25400" cap="flat" cmpd="sng" algn="ctr">
+                      <a:solidFill>
+                        <a:srgbClr val="FFFFFF"/>
+                      </a:solidFill>
+                      <a:prstDash val="solid"/>
+                      <a:round/>
+                      <a:headEnd type="none" w="med" len="med"/>
+                      <a:tailEnd type="none" w="med" len="med"/>
+                    </a:lnT>
+                    <a:lnB w="25400" cap="flat" cmpd="sng" algn="ctr">
+                      <a:solidFill>
+                        <a:srgbClr val="FFFFFF"/>
+                      </a:solidFill>
+                      <a:prstDash val="solid"/>
+                      <a:round/>
+                      <a:headEnd type="none" w="med" len="med"/>
+                      <a:tailEnd type="none" w="med" len="med"/>
+                    </a:lnB>
+                    <a:solidFill>
+                      <a:srgbClr val="1F4E79"/>
+                    </a:solidFill>
+                  </a:tcPr>
+                </a:tc>
+                <a:tc>
+                  <a:txBody>
+                    <a:bodyPr/>
+                    <a:lstStyle/>
+                    <a:p>
+                      <a:pPr marL="0" indent="0" algn="ctr">
+                        <a:buNone/>
+                      </a:pPr>
+                      <a:r>
+                        <a:rPr lang="en-US" sz="1800" dirty="0">
+                          <a:solidFill>
+                            <a:srgbClr val="191919"/>
+                          </a:solidFill>
+                          <a:latin typeface="Times New Roman" pitchFamily="34" charset="0"/>
+                          <a:ea typeface="Times New Roman" pitchFamily="34" charset="-122"/>
+                          <a:cs typeface="Times New Roman" pitchFamily="34" charset="-120"/>
+                        </a:rPr>
+                        <a:t>After training, on the outputs</a:t>
+                      </a:r>
+                      <a:endParaRPr lang="en-US" sz="1800" dirty="0">
+                        <a:latin typeface="Times New Roman" charset="0"/>
+                        <a:ea typeface="Times New Roman" charset="0"/>
+                        <a:cs typeface="Times New Roman" charset="0"/>
+                      </a:endParaRPr>
+                    </a:p>
+                  </a:txBody>
+                  <a:tcPr anchor="ctr">
+                    <a:lnL w="25400" cap="flat" cmpd="sng" algn="ctr">
+                      <a:solidFill>
+                        <a:srgbClr val="FFFFFF"/>
+                      </a:solidFill>
+                      <a:prstDash val="solid"/>
+                      <a:round/>
+                      <a:headEnd type="none" w="med" len="med"/>
+                      <a:tailEnd type="none" w="med" len="med"/>
+                    </a:lnL>
+                    <a:lnR w="25400" cap="flat" cmpd="sng" algn="ctr">
+                      <a:solidFill>
+                        <a:srgbClr val="FFFFFF"/>
+                      </a:solidFill>
+                      <a:prstDash val="solid"/>
+                      <a:round/>
+                      <a:headEnd type="none" w="med" len="med"/>
+                      <a:tailEnd type="none" w="med" len="med"/>
+                    </a:lnR>
+                    <a:lnT w="25400" cap="flat" cmpd="sng" algn="ctr">
+                      <a:solidFill>
+                        <a:srgbClr val="FFFFFF"/>
+                      </a:solidFill>
+                      <a:prstDash val="solid"/>
+                      <a:round/>
+                      <a:headEnd type="none" w="med" len="med"/>
+                      <a:tailEnd type="none" w="med" len="med"/>
+                    </a:lnT>
+                    <a:lnB w="25400" cap="flat" cmpd="sng" algn="ctr">
+                      <a:solidFill>
+                        <a:srgbClr val="FFFFFF"/>
+                      </a:solidFill>
+                      <a:prstDash val="solid"/>
+                      <a:round/>
+                      <a:headEnd type="none" w="med" len="med"/>
+                      <a:tailEnd type="none" w="med" len="med"/>
+                    </a:lnB>
+                    <a:solidFill>
+                      <a:srgbClr val="EEF5FF"/>
+                    </a:solidFill>
+                  </a:tcPr>
+                </a:tc>
+                <a:tc>
+                  <a:txBody>
+                    <a:bodyPr/>
+                    <a:lstStyle/>
+                    <a:p>
+                      <a:pPr marL="0" indent="0" algn="ctr">
+                        <a:buNone/>
+                      </a:pPr>
+                      <a:r>
+                        <a:rPr lang="en-US" sz="1800" dirty="0">
+                          <a:solidFill>
+                            <a:srgbClr val="191919"/>
+                          </a:solidFill>
+                          <a:latin typeface="Times New Roman" pitchFamily="34" charset="0"/>
+                          <a:ea typeface="Times New Roman" pitchFamily="34" charset="-122"/>
+                          <a:cs typeface="Times New Roman" pitchFamily="34" charset="-120"/>
+                        </a:rPr>
+                        <a:t>Threshold adjustment, calibration</a:t>
+                      </a:r>
+                      <a:endParaRPr lang="en-US" sz="1800" dirty="0">
+                        <a:latin typeface="Times New Roman" charset="0"/>
+                        <a:ea typeface="Times New Roman" charset="0"/>
+                        <a:cs typeface="Times New Roman" charset="0"/>
+                      </a:endParaRPr>
+                    </a:p>
+                  </a:txBody>
+                  <a:tcPr anchor="ctr">
+                    <a:lnL w="25400" cap="flat" cmpd="sng" algn="ctr">
+                      <a:solidFill>
+                        <a:srgbClr val="FFFFFF"/>
+                      </a:solidFill>
+                      <a:prstDash val="solid"/>
+                      <a:round/>
+                      <a:headEnd type="none" w="med" len="med"/>
+                      <a:tailEnd type="none" w="med" len="med"/>
+                    </a:lnL>
+                    <a:lnR w="25400" cap="flat" cmpd="sng" algn="ctr">
+                      <a:solidFill>
+                        <a:srgbClr val="FFFFFF"/>
+                      </a:solidFill>
+                      <a:prstDash val="solid"/>
+                      <a:round/>
+                      <a:headEnd type="none" w="med" len="med"/>
+                      <a:tailEnd type="none" w="med" len="med"/>
+                    </a:lnR>
+                    <a:lnT w="25400" cap="flat" cmpd="sng" algn="ctr">
+                      <a:solidFill>
+                        <a:srgbClr val="FFFFFF"/>
+                      </a:solidFill>
+                      <a:prstDash val="solid"/>
+                      <a:round/>
+                      <a:headEnd type="none" w="med" len="med"/>
+                      <a:tailEnd type="none" w="med" len="med"/>
+                    </a:lnT>
+                    <a:lnB w="25400" cap="flat" cmpd="sng" algn="ctr">
+                      <a:solidFill>
+                        <a:srgbClr val="FFFFFF"/>
+                      </a:solidFill>
+                      <a:prstDash val="solid"/>
+                      <a:round/>
+                      <a:headEnd type="none" w="med" len="med"/>
+                      <a:tailEnd type="none" w="med" len="med"/>
+                    </a:lnB>
+                    <a:solidFill>
+                      <a:srgbClr val="EEF5FF"/>
+                    </a:solidFill>
+                  </a:tcPr>
+                </a:tc>
+                <a:extLst>
+                  <a:ext uri="{0D108BD9-81ED-4DB2-BD59-A6C34878D82A}">
+                    <a16:rowId xmlns:a16="http://schemas.microsoft.com/office/drawing/2014/main" val="10003"/>
+                  </a:ext>
+                </a:extLst>
+              </a:tr>
+            </a:tbl>
+          </a:graphicData>
+        </a:graphic>
+      </p:graphicFrame>
+      <p:sp>
+        <p:nvSpPr>
+          <p:cNvPr id="10" name="Text 7"/>
+          <p:cNvSpPr/>
+          <p:nvPr/>
+        </p:nvSpPr>
+        <p:spPr>
+          <a:xfrm>
+            <a:off x="11430000" y="6446520"/>
+            <a:ext cx="365760" cy="182880"/>
+          </a:xfrm>
+          <a:prstGeom prst="rect">
+            <a:avLst/>
+          </a:prstGeom>
+          <a:noFill/>
+          <a:ln/>
+        </p:spPr>
+        <p:txBody>
+          <a:bodyPr wrap="square" lIns="0" tIns="0" rIns="0" bIns="0" rtlCol="0" anchor="ctr"/>
+          <a:lstStyle/>
+          <a:p>
+            <a:pPr marL="0" indent="0" algn="ctr">
+              <a:buNone/>
+            </a:pPr>
+            <a:r>
+              <a:rPr lang="en-US" sz="1200" dirty="0">
+                <a:solidFill>
+                  <a:srgbClr val="595959"/>
+                </a:solidFill>
+                <a:latin typeface="Times New Roman" pitchFamily="34" charset="0"/>
+                <a:ea typeface="Times New Roman" pitchFamily="34" charset="-122"/>
+                <a:cs typeface="Times New Roman" pitchFamily="34" charset="-120"/>
+              </a:rPr>
+              <a:t>11</a:t>
             </a:r>
             <a:endParaRPr lang="en-US" sz="1200" dirty="0"/>
           </a:p>
